--- a/progress/E.1/sprint_E.1_increment_demo.pptx
+++ b/progress/E.1/sprint_E.1_increment_demo.pptx
@@ -2,40 +2,41 @@
 <file path=ppt/presentation.xml><?xml version="1.0" encoding="utf-8"?>
 <p:presentation xmlns:p="http://schemas.openxmlformats.org/presentationml/2006/main">
   <p:sldMasterIdLst>
-    <p:sldMasterId xmlns:r="http://schemas.openxmlformats.org/officeDocument/2006/relationships" id="2147483648" r:id="Re0a4ec3181424212"/>
+    <p:sldMasterId xmlns:r="http://schemas.openxmlformats.org/officeDocument/2006/relationships" id="2147483648" r:id="Ra8cde0dd05764112"/>
   </p:sldMasterIdLst>
   <p:notesMasterIdLst>
-    <p:notesMasterId xmlns:r="http://schemas.openxmlformats.org/officeDocument/2006/relationships" r:id="R2a97e59cdbcf45e7"/>
+    <p:notesMasterId xmlns:r="http://schemas.openxmlformats.org/officeDocument/2006/relationships" r:id="Rc935ff478b274390"/>
   </p:notesMasterIdLst>
   <p:sldIdLst>
-    <p:sldId xmlns:r="http://schemas.openxmlformats.org/officeDocument/2006/relationships" id="256" r:id="Racd6c2b31fc9457c"/>
-    <p:sldId xmlns:r="http://schemas.openxmlformats.org/officeDocument/2006/relationships" id="257" r:id="R736f22e45d5d4414"/>
-    <p:sldId xmlns:r="http://schemas.openxmlformats.org/officeDocument/2006/relationships" id="258" r:id="R579c3420aef247b1"/>
-    <p:sldId xmlns:r="http://schemas.openxmlformats.org/officeDocument/2006/relationships" id="259" r:id="R05dc7d81401f4f1d"/>
-    <p:sldId xmlns:r="http://schemas.openxmlformats.org/officeDocument/2006/relationships" id="260" r:id="R61ec7cf52a674e05"/>
-    <p:sldId xmlns:r="http://schemas.openxmlformats.org/officeDocument/2006/relationships" id="261" r:id="R4e8fe4e580894049"/>
-    <p:sldId xmlns:r="http://schemas.openxmlformats.org/officeDocument/2006/relationships" id="262" r:id="Ra2f36ebb62e9404d"/>
-    <p:sldId xmlns:r="http://schemas.openxmlformats.org/officeDocument/2006/relationships" id="263" r:id="R9718dabc91bc4985"/>
-    <p:sldId xmlns:r="http://schemas.openxmlformats.org/officeDocument/2006/relationships" id="264" r:id="Rf3e92167661f4bad"/>
-    <p:sldId xmlns:r="http://schemas.openxmlformats.org/officeDocument/2006/relationships" id="265" r:id="R29c6351a02e1416d"/>
-    <p:sldId xmlns:r="http://schemas.openxmlformats.org/officeDocument/2006/relationships" id="266" r:id="Rdaa9bfe68d7e49fd"/>
-    <p:sldId xmlns:r="http://schemas.openxmlformats.org/officeDocument/2006/relationships" id="267" r:id="Rf4b2013d9a074986"/>
-    <p:sldId xmlns:r="http://schemas.openxmlformats.org/officeDocument/2006/relationships" id="268" r:id="R4eaac579cac847b8"/>
-    <p:sldId xmlns:r="http://schemas.openxmlformats.org/officeDocument/2006/relationships" id="269" r:id="Rda3559c842584401"/>
-    <p:sldId xmlns:r="http://schemas.openxmlformats.org/officeDocument/2006/relationships" id="270" r:id="R45e11e2cedbf4711"/>
-    <p:sldId xmlns:r="http://schemas.openxmlformats.org/officeDocument/2006/relationships" id="271" r:id="Re13113828b224b82"/>
-    <p:sldId xmlns:r="http://schemas.openxmlformats.org/officeDocument/2006/relationships" id="272" r:id="R472cd455806644c0"/>
-    <p:sldId xmlns:r="http://schemas.openxmlformats.org/officeDocument/2006/relationships" id="273" r:id="Rb884938753744f56"/>
-    <p:sldId xmlns:r="http://schemas.openxmlformats.org/officeDocument/2006/relationships" id="274" r:id="Redd6edee595e4231"/>
-    <p:sldId xmlns:r="http://schemas.openxmlformats.org/officeDocument/2006/relationships" id="275" r:id="Reab9997491e240dc"/>
-    <p:sldId xmlns:r="http://schemas.openxmlformats.org/officeDocument/2006/relationships" id="276" r:id="R4a35df01bd694b26"/>
-    <p:sldId xmlns:r="http://schemas.openxmlformats.org/officeDocument/2006/relationships" id="277" r:id="Refaf12ac4afa423f"/>
-    <p:sldId xmlns:r="http://schemas.openxmlformats.org/officeDocument/2006/relationships" id="278" r:id="R1235382bb3264fda"/>
-    <p:sldId xmlns:r="http://schemas.openxmlformats.org/officeDocument/2006/relationships" id="279" r:id="R45cc86a30e154464"/>
-    <p:sldId xmlns:r="http://schemas.openxmlformats.org/officeDocument/2006/relationships" id="280" r:id="Rad058612469d4ed0"/>
-    <p:sldId xmlns:r="http://schemas.openxmlformats.org/officeDocument/2006/relationships" id="281" r:id="R2eeedb6b471d464c"/>
-    <p:sldId xmlns:r="http://schemas.openxmlformats.org/officeDocument/2006/relationships" id="282" r:id="Rfeaeb471dd6e4378"/>
-    <p:sldId xmlns:r="http://schemas.openxmlformats.org/officeDocument/2006/relationships" id="283" r:id="Raaeb2da283fd4937"/>
+    <p:sldId xmlns:r="http://schemas.openxmlformats.org/officeDocument/2006/relationships" id="256" r:id="R6ab2a4640dfd468d"/>
+    <p:sldId xmlns:r="http://schemas.openxmlformats.org/officeDocument/2006/relationships" id="257" r:id="R19f77a3c2cc64c4d"/>
+    <p:sldId xmlns:r="http://schemas.openxmlformats.org/officeDocument/2006/relationships" id="258" r:id="Rc05a0e3cd2a54045"/>
+    <p:sldId xmlns:r="http://schemas.openxmlformats.org/officeDocument/2006/relationships" id="259" r:id="R797e9ae9f9f44ebe"/>
+    <p:sldId xmlns:r="http://schemas.openxmlformats.org/officeDocument/2006/relationships" id="260" r:id="R040d5f8262314a04"/>
+    <p:sldId xmlns:r="http://schemas.openxmlformats.org/officeDocument/2006/relationships" id="261" r:id="R5b3d9fe3d0704fe5"/>
+    <p:sldId xmlns:r="http://schemas.openxmlformats.org/officeDocument/2006/relationships" id="262" r:id="Rf23268c6373f4a3d"/>
+    <p:sldId xmlns:r="http://schemas.openxmlformats.org/officeDocument/2006/relationships" id="263" r:id="R62a1055fd396422f"/>
+    <p:sldId xmlns:r="http://schemas.openxmlformats.org/officeDocument/2006/relationships" id="264" r:id="R54f50c2f732f4d1f"/>
+    <p:sldId xmlns:r="http://schemas.openxmlformats.org/officeDocument/2006/relationships" id="265" r:id="R388dafdb2f0846c5"/>
+    <p:sldId xmlns:r="http://schemas.openxmlformats.org/officeDocument/2006/relationships" id="266" r:id="Rbbbfe0523bc64e9f"/>
+    <p:sldId xmlns:r="http://schemas.openxmlformats.org/officeDocument/2006/relationships" id="267" r:id="Rf42dadb463fc4659"/>
+    <p:sldId xmlns:r="http://schemas.openxmlformats.org/officeDocument/2006/relationships" id="268" r:id="Rf6e9b78bc26a4d2e"/>
+    <p:sldId xmlns:r="http://schemas.openxmlformats.org/officeDocument/2006/relationships" id="269" r:id="R5f51980595be4b62"/>
+    <p:sldId xmlns:r="http://schemas.openxmlformats.org/officeDocument/2006/relationships" id="270" r:id="R15664c9c112749dc"/>
+    <p:sldId xmlns:r="http://schemas.openxmlformats.org/officeDocument/2006/relationships" id="271" r:id="Re5c1314a4ed0405c"/>
+    <p:sldId xmlns:r="http://schemas.openxmlformats.org/officeDocument/2006/relationships" id="272" r:id="R89bc0b0fbf1640e0"/>
+    <p:sldId xmlns:r="http://schemas.openxmlformats.org/officeDocument/2006/relationships" id="273" r:id="R84ba16b9f2ef4331"/>
+    <p:sldId xmlns:r="http://schemas.openxmlformats.org/officeDocument/2006/relationships" id="274" r:id="Rc207f38a9d954ce7"/>
+    <p:sldId xmlns:r="http://schemas.openxmlformats.org/officeDocument/2006/relationships" id="275" r:id="R8aca8623b42046a5"/>
+    <p:sldId xmlns:r="http://schemas.openxmlformats.org/officeDocument/2006/relationships" id="276" r:id="Rb45c0b6e2b054e57"/>
+    <p:sldId xmlns:r="http://schemas.openxmlformats.org/officeDocument/2006/relationships" id="277" r:id="Rff42431320b3452f"/>
+    <p:sldId xmlns:r="http://schemas.openxmlformats.org/officeDocument/2006/relationships" id="278" r:id="R7ef8a574053d4b3e"/>
+    <p:sldId xmlns:r="http://schemas.openxmlformats.org/officeDocument/2006/relationships" id="279" r:id="Rb1f8965ce43c4be9"/>
+    <p:sldId xmlns:r="http://schemas.openxmlformats.org/officeDocument/2006/relationships" id="280" r:id="Rbd8500a1ce0d4827"/>
+    <p:sldId xmlns:r="http://schemas.openxmlformats.org/officeDocument/2006/relationships" id="281" r:id="Ra20e16b0cad64014"/>
+    <p:sldId xmlns:r="http://schemas.openxmlformats.org/officeDocument/2006/relationships" id="282" r:id="R3584eb8786e74eff"/>
+    <p:sldId xmlns:r="http://schemas.openxmlformats.org/officeDocument/2006/relationships" id="283" r:id="Rfbc7bc0a48464e17"/>
+    <p:sldId xmlns:r="http://schemas.openxmlformats.org/officeDocument/2006/relationships" id="284" r:id="R52d4ed7a6fff49ca"/>
   </p:sldIdLst>
   <p:sldSz cx="12192000" cy="6858000"/>
   <p:notesSz cx="6858000" cy="9144000"/>
@@ -789,7 +790,7 @@
           </a:p>
           <a:p xmlns:a="http://schemas.openxmlformats.org/drawingml/2006/main">
             <a:r>
-              <a:t>Full commands, credentials, separate area provisioning and developer login setup are in companion Markdown stage 2. Infrastructure initialization cannot create project schemas. This is a previously rehearsed destructive fresh-start path, not a new run performed for this handover.</a:t>
+              <a:t>Full commands, credentials, separate area provisioning and developer login setup are in companion Markdown stage 2. Infrastructure initialization cannot create project schemas. An independent clean-checkout A–I rehearsal passes at 54c0fd3 using a new empty engine, fresh credentials, reconstructed archives and explicit runtime API fixtures. Browser acceptance is separate.</a:t>
             </a:r>
           </a:p>
         </p:txBody>
@@ -1994,12 +1995,17 @@
           <a:lstStyle xmlns:a="http://schemas.openxmlformats.org/drawingml/2006/main"/>
           <a:p xmlns:a="http://schemas.openxmlformats.org/drawingml/2006/main">
             <a:r>
-              <a:t>Sources: PROGRESS_BOARD.md; progress/E.1/sprint_E.1_tests.md</a:t>
+              <a:t>Sources: scripts/cicd-walkthrough-I_repair.sh; progress/E.1/tests/recovery_proof_20261018.txt</a:t>
             </a:r>
           </a:p>
           <a:p xmlns:a="http://schemas.openxmlformats.org/drawingml/2006/main">
             <a:r>
               <a:t>E.1 handover snapshot, 18 October 2026. PLAN: Progress; PROGRESS_BOARD: under_construction. No sprint closure or full quality-gate acceptance is implied.</a:t>
+            </a:r>
+          </a:p>
+          <a:p xmlns:a="http://schemas.openxmlformats.org/drawingml/2006/main">
+            <a:r>
+              <a:t>Bounded integration_test experiment only. A deliberately failed Liquibase changeset follows one successful additive index. A separate source-bound repair archive retains the first successful changeset identity and adds forward completion. Observation hash approval and database recheck precede repair. No checksum clearing, rollback of business history or arbitrary recovery claim.</a:t>
             </a:r>
           </a:p>
         </p:txBody>
@@ -2069,7 +2075,7 @@
           <a:lstStyle xmlns:a="http://schemas.openxmlformats.org/drawingml/2006/main"/>
           <a:p xmlns:a="http://schemas.openxmlformats.org/drawingml/2006/main">
             <a:r>
-              <a:t>Sources: PROGRESS_BOARD.md; progress/E.1/sprint_E.1_assessment.md</a:t>
+              <a:t>Sources: PROGRESS_BOARD.md; progress/E.1/sprint_E.1_tests.md</a:t>
             </a:r>
           </a:p>
           <a:p xmlns:a="http://schemas.openxmlformats.org/drawingml/2006/main">
@@ -2144,17 +2150,12 @@
           <a:lstStyle xmlns:a="http://schemas.openxmlformats.org/drawingml/2006/main"/>
           <a:p xmlns:a="http://schemas.openxmlformats.org/drawingml/2006/main">
             <a:r>
-              <a:t>Sources: progress/E.1/sprint_E.1_design.md; docs/test-profile.md</a:t>
+              <a:t>Sources: PROGRESS_BOARD.md; progress/E.1/sprint_E.1_assessment.md</a:t>
             </a:r>
           </a:p>
           <a:p xmlns:a="http://schemas.openxmlformats.org/drawingml/2006/main">
             <a:r>
               <a:t>E.1 handover snapshot, 18 October 2026. PLAN: Progress; PROGRESS_BOARD: under_construction. No sprint closure or full quality-gate acceptance is implied.</a:t>
-            </a:r>
-          </a:p>
-          <a:p xmlns:a="http://schemas.openxmlformats.org/drawingml/2006/main">
-            <a:r>
-              <a:t>Existing scope: PBI-011.2/.5/.7/.8, validation under PBI-012; original IT-6/7/8/9/12. These are registered child definitions, not newly scheduled sprints. Dedicated measurements and all full-suite gates remain incomplete.</a:t>
             </a:r>
           </a:p>
         </p:txBody>
@@ -2224,12 +2225,17 @@
           <a:lstStyle xmlns:a="http://schemas.openxmlformats.org/drawingml/2006/main"/>
           <a:p xmlns:a="http://schemas.openxmlformats.org/drawingml/2006/main">
             <a:r>
-              <a:t>Sources: progress/E.1/sprint_E.1_assessment.md; ROADMAP.md</a:t>
+              <a:t>Sources: progress/E.1/sprint_E.1_design.md; docs/test-profile.md</a:t>
             </a:r>
           </a:p>
           <a:p xmlns:a="http://schemas.openxmlformats.org/drawingml/2006/main">
             <a:r>
               <a:t>E.1 handover snapshot, 18 October 2026. PLAN: Progress; PROGRESS_BOARD: under_construction. No sprint closure or full quality-gate acceptance is implied.</a:t>
+            </a:r>
+          </a:p>
+          <a:p xmlns:a="http://schemas.openxmlformats.org/drawingml/2006/main">
+            <a:r>
+              <a:t>Existing scope: PBI-011.2/.5/.7/.8, validation under PBI-012; original IT-6/7/8/9/12. These are registered child definitions, not newly scheduled sprints. Dedicated measurements and all full-suite gates remain incomplete.</a:t>
             </a:r>
           </a:p>
         </p:txBody>
@@ -2299,6 +2305,81 @@
           <a:lstStyle xmlns:a="http://schemas.openxmlformats.org/drawingml/2006/main"/>
           <a:p xmlns:a="http://schemas.openxmlformats.org/drawingml/2006/main">
             <a:r>
+              <a:t>Sources: progress/E.1/sprint_E.1_assessment.md; ROADMAP.md</a:t>
+            </a:r>
+          </a:p>
+          <a:p xmlns:a="http://schemas.openxmlformats.org/drawingml/2006/main">
+            <a:r>
+              <a:t>E.1 handover snapshot, 18 October 2026. PLAN: Progress; PROGRESS_BOARD: under_construction. No sprint closure or full quality-gate acceptance is implied.</a:t>
+            </a:r>
+          </a:p>
+        </p:txBody>
+      </p:sp>
+      <p:sp>
+        <p:nvSpPr>
+          <p:cNvPr id="4" name="Slide Number Placeholder 3"/>
+          <p:cNvSpPr>
+            <a:spLocks xmlns:a="http://schemas.openxmlformats.org/drawingml/2006/main" noGrp="1"/>
+          </p:cNvSpPr>
+          <p:nvPr>
+            <p:ph type="sldNum" idx="5"/>
+          </p:nvPr>
+        </p:nvSpPr>
+        <p:spPr/>
+        <p:txBody>
+          <a:bodyPr xmlns:a="http://schemas.openxmlformats.org/drawingml/2006/main"/>
+          <a:lstStyle xmlns:a="http://schemas.openxmlformats.org/drawingml/2006/main"/>
+          <a:p xmlns:a="http://schemas.openxmlformats.org/drawingml/2006/main"/>
+        </p:txBody>
+      </p:sp>
+    </p:spTree>
+  </p:cSld>
+  <p:clrMapOvr>
+    <a:masterClrMapping xmlns:a="http://schemas.openxmlformats.org/drawingml/2006/main"/>
+  </p:clrMapOvr>
+</p:notes>
+</file>
+
+<file path=ppt/notesSlides/notesSlide29.xml><?xml version="1.0" encoding="utf-8"?>
+<p:notes xmlns:p="http://schemas.openxmlformats.org/presentationml/2006/main">
+  <p:cSld>
+    <p:spTree>
+      <p:nvGrpSpPr>
+        <p:cNvPr id="1" name=""/>
+        <p:cNvGrpSpPr/>
+        <p:nvPr/>
+      </p:nvGrpSpPr>
+      <p:grpSpPr>
+        <a:xfrm xmlns:a="http://schemas.openxmlformats.org/drawingml/2006/main"/>
+      </p:grpSpPr>
+      <p:sp>
+        <p:nvSpPr>
+          <p:cNvPr id="2" name="Slide Image Placeholder 1"/>
+          <p:cNvSpPr>
+            <a:spLocks xmlns:a="http://schemas.openxmlformats.org/drawingml/2006/main" noGrp="1"/>
+          </p:cNvSpPr>
+          <p:nvPr>
+            <p:ph type="sldImg" idx="0"/>
+          </p:nvPr>
+        </p:nvSpPr>
+        <p:spPr/>
+      </p:sp>
+      <p:sp>
+        <p:nvSpPr>
+          <p:cNvPr id="3" name="Notes Placeholder 2"/>
+          <p:cNvSpPr>
+            <a:spLocks xmlns:a="http://schemas.openxmlformats.org/drawingml/2006/main" noGrp="1"/>
+          </p:cNvSpPr>
+          <p:nvPr>
+            <p:ph type="body" idx="1"/>
+          </p:nvPr>
+        </p:nvSpPr>
+        <p:spPr/>
+        <p:txBody>
+          <a:bodyPr xmlns:a="http://schemas.openxmlformats.org/drawingml/2006/main"/>
+          <a:lstStyle xmlns:a="http://schemas.openxmlformats.org/drawingml/2006/main"/>
+          <a:p xmlns:a="http://schemas.openxmlformats.org/drawingml/2006/main">
+            <a:r>
               <a:t>Sources: progress/E.1/sprint_E.1_handover.md</a:t>
             </a:r>
           </a:p>
@@ -2981,7 +3062,7 @@
           <p:cNvPr id="3" name="Title">
             <a:extLst xmlns:a="http://schemas.openxmlformats.org/drawingml/2006/main">
               <a:ext uri="{FF2B5EF4-FFF2-40B4-BE49-F238E27FC236}">
-                <a16:creationId xmlns:a16="http://schemas.microsoft.com/office/drawing/2014/main" id="{8DB05F9A-FA88-4E03-BC9B-71948956B47F}"/>
+                <a16:creationId xmlns:a16="http://schemas.microsoft.com/office/drawing/2014/main" id="{8D0E3409-6E01-40DF-9010-450EE4598DDC}"/>
               </a:ext>
             </a:extLst>
           </p:cNvPr>
@@ -3138,7 +3219,7 @@
           <p:cNvPr id="2" name="Subtitle">
             <a:extLst xmlns:a="http://schemas.openxmlformats.org/drawingml/2006/main">
               <a:ext uri="{FF2B5EF4-FFF2-40B4-BE49-F238E27FC236}">
-                <a16:creationId xmlns:a16="http://schemas.microsoft.com/office/drawing/2014/main" id="{197953BB-D4ED-48C9-B65B-7199DEA457D1}"/>
+                <a16:creationId xmlns:a16="http://schemas.microsoft.com/office/drawing/2014/main" id="{0570FD6A-FE8A-45FA-8B44-66386189834B}"/>
               </a:ext>
             </a:extLst>
           </p:cNvPr>
@@ -3312,7 +3393,7 @@
           <p:cNvPr id="2" name="Section title">
             <a:extLst xmlns:a="http://schemas.openxmlformats.org/drawingml/2006/main">
               <a:ext uri="{FF2B5EF4-FFF2-40B4-BE49-F238E27FC236}">
-                <a16:creationId xmlns:a16="http://schemas.microsoft.com/office/drawing/2014/main" id="{CAE307FE-75E2-43F9-9AF3-D08865B90D22}"/>
+                <a16:creationId xmlns:a16="http://schemas.microsoft.com/office/drawing/2014/main" id="{7AD6F097-001E-45B6-8764-68219404066E}"/>
               </a:ext>
             </a:extLst>
           </p:cNvPr>
@@ -3486,7 +3567,7 @@
           <p:cNvPr id="3" name="Title">
             <a:extLst xmlns:a="http://schemas.openxmlformats.org/drawingml/2006/main">
               <a:ext uri="{FF2B5EF4-FFF2-40B4-BE49-F238E27FC236}">
-                <a16:creationId xmlns:a16="http://schemas.microsoft.com/office/drawing/2014/main" id="{34B317AA-78DB-416E-857A-E85C56D00E68}"/>
+                <a16:creationId xmlns:a16="http://schemas.microsoft.com/office/drawing/2014/main" id="{C202DAFF-45DE-40DC-A155-4B4838EB67DA}"/>
               </a:ext>
             </a:extLst>
           </p:cNvPr>
@@ -3643,7 +3724,7 @@
           <p:cNvPr id="2" name="Body">
             <a:extLst xmlns:a="http://schemas.openxmlformats.org/drawingml/2006/main">
               <a:ext uri="{FF2B5EF4-FFF2-40B4-BE49-F238E27FC236}">
-                <a16:creationId xmlns:a16="http://schemas.microsoft.com/office/drawing/2014/main" id="{D45A2558-E0CE-4D8C-AF5C-668FB8D06FA6}"/>
+                <a16:creationId xmlns:a16="http://schemas.microsoft.com/office/drawing/2014/main" id="{AD2C52FE-CA0B-4E8C-BC9B-FB434109E0E7}"/>
               </a:ext>
             </a:extLst>
           </p:cNvPr>
@@ -3817,7 +3898,7 @@
           <p:cNvPr id="4" name="Title">
             <a:extLst xmlns:a="http://schemas.openxmlformats.org/drawingml/2006/main">
               <a:ext uri="{FF2B5EF4-FFF2-40B4-BE49-F238E27FC236}">
-                <a16:creationId xmlns:a16="http://schemas.microsoft.com/office/drawing/2014/main" id="{7F2C22E5-D261-463F-8C3D-E51935075469}"/>
+                <a16:creationId xmlns:a16="http://schemas.microsoft.com/office/drawing/2014/main" id="{BB2DDCAF-9003-42AB-87CF-B49F620D6E36}"/>
               </a:ext>
             </a:extLst>
           </p:cNvPr>
@@ -3974,7 +4055,7 @@
           <p:cNvPr id="2" name="Left column">
             <a:extLst xmlns:a="http://schemas.openxmlformats.org/drawingml/2006/main">
               <a:ext uri="{FF2B5EF4-FFF2-40B4-BE49-F238E27FC236}">
-                <a16:creationId xmlns:a16="http://schemas.microsoft.com/office/drawing/2014/main" id="{3726C602-88E9-45DF-A934-C24BA39C9F2C}"/>
+                <a16:creationId xmlns:a16="http://schemas.microsoft.com/office/drawing/2014/main" id="{259DDA23-0B82-4216-AC8C-4588E90AF25B}"/>
               </a:ext>
             </a:extLst>
           </p:cNvPr>
@@ -4131,7 +4212,7 @@
           <p:cNvPr id="3" name="Right column">
             <a:extLst xmlns:a="http://schemas.openxmlformats.org/drawingml/2006/main">
               <a:ext uri="{FF2B5EF4-FFF2-40B4-BE49-F238E27FC236}">
-                <a16:creationId xmlns:a16="http://schemas.microsoft.com/office/drawing/2014/main" id="{8E9DB20B-6588-49D2-A63B-E9AFE995D892}"/>
+                <a16:creationId xmlns:a16="http://schemas.microsoft.com/office/drawing/2014/main" id="{672733B5-AA37-494A-BDE6-B1B3449B27A7}"/>
               </a:ext>
             </a:extLst>
           </p:cNvPr>
@@ -4305,7 +4386,7 @@
           <p:cNvPr id="3" name="Title">
             <a:extLst xmlns:a="http://schemas.openxmlformats.org/drawingml/2006/main">
               <a:ext uri="{FF2B5EF4-FFF2-40B4-BE49-F238E27FC236}">
-                <a16:creationId xmlns:a16="http://schemas.microsoft.com/office/drawing/2014/main" id="{67387682-2F58-4123-847E-11ED82DCA8A9}"/>
+                <a16:creationId xmlns:a16="http://schemas.microsoft.com/office/drawing/2014/main" id="{DBE0C380-19C5-47EE-8762-1145924973DD}"/>
               </a:ext>
             </a:extLst>
           </p:cNvPr>
@@ -4462,7 +4543,7 @@
           <p:cNvPr id="2" name="Left column">
             <a:extLst xmlns:a="http://schemas.openxmlformats.org/drawingml/2006/main">
               <a:ext uri="{FF2B5EF4-FFF2-40B4-BE49-F238E27FC236}">
-                <a16:creationId xmlns:a16="http://schemas.microsoft.com/office/drawing/2014/main" id="{3866BA53-554E-4BAC-9498-60A190170520}"/>
+                <a16:creationId xmlns:a16="http://schemas.microsoft.com/office/drawing/2014/main" id="{EFC0A641-BC5F-4113-AFF0-BF2E56B6B204}"/>
               </a:ext>
             </a:extLst>
           </p:cNvPr>
@@ -4657,12 +4738,12 @@
   </p:cSld>
   <p:clrMap bg1="lt1" tx1="dk1" bg2="lt2" tx2="dk2" accent1="accent1" accent2="accent2" accent3="accent3" accent4="accent4" accent5="accent5" accent6="accent6" hlink="hlink" folHlink="folHlink"/>
   <p:sldLayoutIdLst>
-    <p:sldLayoutId xmlns:r="http://schemas.openxmlformats.org/officeDocument/2006/relationships" id="2147483649" r:id="R0791b98bdbab4d1a"/>
-    <p:sldLayoutId xmlns:r="http://schemas.openxmlformats.org/officeDocument/2006/relationships" id="2147483650" r:id="R9e458f20082c4241"/>
-    <p:sldLayoutId xmlns:r="http://schemas.openxmlformats.org/officeDocument/2006/relationships" id="2147483651" r:id="R40df21aa0fe940cc"/>
-    <p:sldLayoutId xmlns:r="http://schemas.openxmlformats.org/officeDocument/2006/relationships" id="2147483652" r:id="Re0efc1f59d7c4920"/>
-    <p:sldLayoutId xmlns:r="http://schemas.openxmlformats.org/officeDocument/2006/relationships" id="2147483653" r:id="R3b4bfd77d380443b"/>
-    <p:sldLayoutId xmlns:r="http://schemas.openxmlformats.org/officeDocument/2006/relationships" id="2147483654" r:id="R2e66ccc9919b4d23"/>
+    <p:sldLayoutId xmlns:r="http://schemas.openxmlformats.org/officeDocument/2006/relationships" id="2147483649" r:id="R9933d1266b444a80"/>
+    <p:sldLayoutId xmlns:r="http://schemas.openxmlformats.org/officeDocument/2006/relationships" id="2147483650" r:id="R597af760d45847de"/>
+    <p:sldLayoutId xmlns:r="http://schemas.openxmlformats.org/officeDocument/2006/relationships" id="2147483651" r:id="Rcd9fe068f9d74cce"/>
+    <p:sldLayoutId xmlns:r="http://schemas.openxmlformats.org/officeDocument/2006/relationships" id="2147483652" r:id="R645b0b42cb1b4be8"/>
+    <p:sldLayoutId xmlns:r="http://schemas.openxmlformats.org/officeDocument/2006/relationships" id="2147483653" r:id="R98c2af7b8a1c4665"/>
+    <p:sldLayoutId xmlns:r="http://schemas.openxmlformats.org/officeDocument/2006/relationships" id="2147483654" r:id="R9cca21633a1544a1"/>
   </p:sldLayoutIdLst>
   <p:txStyles>
     <p:titleStyle>
@@ -5213,7 +5294,7 @@
           <p:cNvPr id="6" name="">
             <a:extLst xmlns:a="http://schemas.openxmlformats.org/drawingml/2006/main">
               <a:ext uri="{FF2B5EF4-FFF2-40B4-BE49-F238E27FC236}">
-                <a16:creationId xmlns:a16="http://schemas.microsoft.com/office/drawing/2014/main" id="{FD009604-5407-40AF-A313-E191449F738A}"/>
+                <a16:creationId xmlns:a16="http://schemas.microsoft.com/office/drawing/2014/main" id="{65CA2EA9-8AFA-49BC-B367-73EF1A780DC7}"/>
               </a:ext>
             </a:extLst>
           </p:cNvPr>
@@ -5281,7 +5362,7 @@
           <p:cNvPr id="2" name="">
             <a:extLst xmlns:a="http://schemas.openxmlformats.org/drawingml/2006/main">
               <a:ext uri="{FF2B5EF4-FFF2-40B4-BE49-F238E27FC236}">
-                <a16:creationId xmlns:a16="http://schemas.microsoft.com/office/drawing/2014/main" id="{05B3EE82-7DC9-438D-A16E-C46511CEE9F9}"/>
+                <a16:creationId xmlns:a16="http://schemas.microsoft.com/office/drawing/2014/main" id="{2A8BCF38-B28B-499F-8AEC-4252CED2B118}"/>
               </a:ext>
             </a:extLst>
           </p:cNvPr>
@@ -5349,7 +5430,7 @@
           <p:cNvPr id="3" name="">
             <a:extLst xmlns:a="http://schemas.openxmlformats.org/drawingml/2006/main">
               <a:ext uri="{FF2B5EF4-FFF2-40B4-BE49-F238E27FC236}">
-                <a16:creationId xmlns:a16="http://schemas.microsoft.com/office/drawing/2014/main" id="{688E8B7B-24E6-492C-B994-7F4CBBF05A0D}"/>
+                <a16:creationId xmlns:a16="http://schemas.microsoft.com/office/drawing/2014/main" id="{0BEF8098-EBC0-4F74-A6D8-FD7FCE5CF273}"/>
               </a:ext>
             </a:extLst>
           </p:cNvPr>
@@ -5440,7 +5521,7 @@
           <p:cNvPr id="4" name="">
             <a:extLst xmlns:a="http://schemas.openxmlformats.org/drawingml/2006/main">
               <a:ext uri="{FF2B5EF4-FFF2-40B4-BE49-F238E27FC236}">
-                <a16:creationId xmlns:a16="http://schemas.microsoft.com/office/drawing/2014/main" id="{F1B1CA6A-34F7-4496-92F5-5923E9ABF917}"/>
+                <a16:creationId xmlns:a16="http://schemas.microsoft.com/office/drawing/2014/main" id="{735B1A64-2CD4-4DCC-ABCE-AE5B98114BC3}"/>
               </a:ext>
             </a:extLst>
           </p:cNvPr>
@@ -5531,7 +5612,7 @@
           <p:cNvPr id="5" name="">
             <a:extLst xmlns:a="http://schemas.openxmlformats.org/drawingml/2006/main">
               <a:ext uri="{FF2B5EF4-FFF2-40B4-BE49-F238E27FC236}">
-                <a16:creationId xmlns:a16="http://schemas.microsoft.com/office/drawing/2014/main" id="{20511D61-E33A-4951-AF84-5BCBF3B6DF16}"/>
+                <a16:creationId xmlns:a16="http://schemas.microsoft.com/office/drawing/2014/main" id="{10176779-3DB3-4366-963D-9B92BF67FCAB}"/>
               </a:ext>
             </a:extLst>
           </p:cNvPr>
@@ -5597,7 +5678,7 @@
     </p:spTree>
     <p:extLst>
       <p:ext uri="{BB962C8B-B14F-4D97-AF65-F5344CB8AC3E}">
-        <p14:creationId xmlns:p14="http://schemas.microsoft.com/office/powerpoint/2010/main" val="496579479"/>
+        <p14:creationId xmlns:p14="http://schemas.microsoft.com/office/powerpoint/2010/main" val="768332825"/>
       </p:ext>
     </p:extLst>
   </p:cSld>
@@ -5628,7 +5709,7 @@
           <p:cNvPr id="9" name="">
             <a:extLst xmlns:a="http://schemas.openxmlformats.org/drawingml/2006/main">
               <a:ext uri="{FF2B5EF4-FFF2-40B4-BE49-F238E27FC236}">
-                <a16:creationId xmlns:a16="http://schemas.microsoft.com/office/drawing/2014/main" id="{A6C38EF6-F464-47E7-985E-5C7B9F95DEB6}"/>
+                <a16:creationId xmlns:a16="http://schemas.microsoft.com/office/drawing/2014/main" id="{1A3EC5BD-DE0C-45A2-8643-1EB3BA817870}"/>
               </a:ext>
             </a:extLst>
           </p:cNvPr>
@@ -5696,7 +5777,7 @@
           <p:cNvPr id="2" name="">
             <a:extLst xmlns:a="http://schemas.openxmlformats.org/drawingml/2006/main">
               <a:ext uri="{FF2B5EF4-FFF2-40B4-BE49-F238E27FC236}">
-                <a16:creationId xmlns:a16="http://schemas.microsoft.com/office/drawing/2014/main" id="{E68EBB4C-743B-4CFC-91D9-74B404993737}"/>
+                <a16:creationId xmlns:a16="http://schemas.microsoft.com/office/drawing/2014/main" id="{0E63E70E-1768-461E-9923-E5509C92BB80}"/>
               </a:ext>
             </a:extLst>
           </p:cNvPr>
@@ -5764,7 +5845,7 @@
           <p:cNvPr id="3" name="">
             <a:extLst xmlns:a="http://schemas.openxmlformats.org/drawingml/2006/main">
               <a:ext uri="{FF2B5EF4-FFF2-40B4-BE49-F238E27FC236}">
-                <a16:creationId xmlns:a16="http://schemas.microsoft.com/office/drawing/2014/main" id="{8EA75A05-6EC3-4FAC-AAA4-CF38493112D8}"/>
+                <a16:creationId xmlns:a16="http://schemas.microsoft.com/office/drawing/2014/main" id="{287B42B1-8D01-4783-9E4B-135BF769615E}"/>
               </a:ext>
             </a:extLst>
           </p:cNvPr>
@@ -5832,7 +5913,7 @@
           <p:cNvPr id="4" name="">
             <a:extLst xmlns:a="http://schemas.openxmlformats.org/drawingml/2006/main">
               <a:ext uri="{FF2B5EF4-FFF2-40B4-BE49-F238E27FC236}">
-                <a16:creationId xmlns:a16="http://schemas.microsoft.com/office/drawing/2014/main" id="{2D48D185-E96E-45F5-9D4D-D292B4B757A9}"/>
+                <a16:creationId xmlns:a16="http://schemas.microsoft.com/office/drawing/2014/main" id="{C9ACDA7E-8CA4-42C7-A61C-AA623FD63364}"/>
               </a:ext>
             </a:extLst>
           </p:cNvPr>
@@ -5900,7 +5981,7 @@
           <p:cNvPr id="5" name="">
             <a:extLst xmlns:a="http://schemas.openxmlformats.org/drawingml/2006/main">
               <a:ext uri="{FF2B5EF4-FFF2-40B4-BE49-F238E27FC236}">
-                <a16:creationId xmlns:a16="http://schemas.microsoft.com/office/drawing/2014/main" id="{65DB4BB1-3646-4A35-BB3F-F1DBBB8386DA}"/>
+                <a16:creationId xmlns:a16="http://schemas.microsoft.com/office/drawing/2014/main" id="{D629D6F0-0654-4B98-ACED-C81D286463AC}"/>
               </a:ext>
             </a:extLst>
           </p:cNvPr>
@@ -5968,7 +6049,7 @@
           <p:cNvPr id="6" name="">
             <a:extLst xmlns:a="http://schemas.openxmlformats.org/drawingml/2006/main">
               <a:ext uri="{FF2B5EF4-FFF2-40B4-BE49-F238E27FC236}">
-                <a16:creationId xmlns:a16="http://schemas.microsoft.com/office/drawing/2014/main" id="{8B554A56-BD20-4C26-BD48-5CA221C1A000}"/>
+                <a16:creationId xmlns:a16="http://schemas.microsoft.com/office/drawing/2014/main" id="{49BE8878-0A66-4788-8ADC-6A5A0D517604}"/>
               </a:ext>
             </a:extLst>
           </p:cNvPr>
@@ -6036,7 +6117,7 @@
           <p:cNvPr id="7" name="">
             <a:extLst xmlns:a="http://schemas.openxmlformats.org/drawingml/2006/main">
               <a:ext uri="{FF2B5EF4-FFF2-40B4-BE49-F238E27FC236}">
-                <a16:creationId xmlns:a16="http://schemas.microsoft.com/office/drawing/2014/main" id="{10A73224-73ED-4D16-AA12-04B324EBC67A}"/>
+                <a16:creationId xmlns:a16="http://schemas.microsoft.com/office/drawing/2014/main" id="{F0AC3F56-4DEB-43B9-B496-AA2B3E6649AD}"/>
               </a:ext>
             </a:extLst>
           </p:cNvPr>
@@ -6104,7 +6185,7 @@
           <p:cNvPr id="8" name="">
             <a:extLst xmlns:a="http://schemas.openxmlformats.org/drawingml/2006/main">
               <a:ext uri="{FF2B5EF4-FFF2-40B4-BE49-F238E27FC236}">
-                <a16:creationId xmlns:a16="http://schemas.microsoft.com/office/drawing/2014/main" id="{8EB324A2-099D-494B-933E-25E63DC781F7}"/>
+                <a16:creationId xmlns:a16="http://schemas.microsoft.com/office/drawing/2014/main" id="{E3CB5385-4E53-44AD-8E42-8464CAD18B12}"/>
               </a:ext>
             </a:extLst>
           </p:cNvPr>
@@ -6170,7 +6251,7 @@
     </p:spTree>
     <p:extLst>
       <p:ext uri="{BB962C8B-B14F-4D97-AF65-F5344CB8AC3E}">
-        <p14:creationId xmlns:p14="http://schemas.microsoft.com/office/powerpoint/2010/main" val="296754552"/>
+        <p14:creationId xmlns:p14="http://schemas.microsoft.com/office/powerpoint/2010/main" val="149907207"/>
       </p:ext>
     </p:extLst>
   </p:cSld>
@@ -6201,7 +6282,7 @@
           <p:cNvPr id="13" name="">
             <a:extLst xmlns:a="http://schemas.openxmlformats.org/drawingml/2006/main">
               <a:ext uri="{FF2B5EF4-FFF2-40B4-BE49-F238E27FC236}">
-                <a16:creationId xmlns:a16="http://schemas.microsoft.com/office/drawing/2014/main" id="{B35B9CC6-3874-45AF-B9C6-09DBFF806988}"/>
+                <a16:creationId xmlns:a16="http://schemas.microsoft.com/office/drawing/2014/main" id="{082B58DD-ADD7-4322-A0A9-51AFB062EE56}"/>
               </a:ext>
             </a:extLst>
           </p:cNvPr>
@@ -6232,7 +6313,7 @@
           <p:cNvPr id="12" name="">
             <a:extLst xmlns:a="http://schemas.openxmlformats.org/drawingml/2006/main">
               <a:ext uri="{FF2B5EF4-FFF2-40B4-BE49-F238E27FC236}">
-                <a16:creationId xmlns:a16="http://schemas.microsoft.com/office/drawing/2014/main" id="{DDFE0FB2-410B-4EE6-8D37-15CF2DE7FB20}"/>
+                <a16:creationId xmlns:a16="http://schemas.microsoft.com/office/drawing/2014/main" id="{CD8EA256-3DA7-41B8-9E80-60F1FFDF7E35}"/>
               </a:ext>
             </a:extLst>
           </p:cNvPr>
@@ -6263,7 +6344,7 @@
           <p:cNvPr id="11" name="">
             <a:extLst xmlns:a="http://schemas.openxmlformats.org/drawingml/2006/main">
               <a:ext uri="{FF2B5EF4-FFF2-40B4-BE49-F238E27FC236}">
-                <a16:creationId xmlns:a16="http://schemas.microsoft.com/office/drawing/2014/main" id="{E7AB3588-53F5-4BD9-888D-DDE13E1BE208}"/>
+                <a16:creationId xmlns:a16="http://schemas.microsoft.com/office/drawing/2014/main" id="{4D866AE7-11AA-47B0-8FE0-BC2F750E85BE}"/>
               </a:ext>
             </a:extLst>
           </p:cNvPr>
@@ -6294,7 +6375,7 @@
           <p:cNvPr id="15" name="">
             <a:extLst xmlns:a="http://schemas.openxmlformats.org/drawingml/2006/main">
               <a:ext uri="{FF2B5EF4-FFF2-40B4-BE49-F238E27FC236}">
-                <a16:creationId xmlns:a16="http://schemas.microsoft.com/office/drawing/2014/main" id="{56E0342B-7156-45FF-A971-B95E0BDE01E7}"/>
+                <a16:creationId xmlns:a16="http://schemas.microsoft.com/office/drawing/2014/main" id="{633CB109-CA7A-4740-BD0D-E3FAE78A45E5}"/>
               </a:ext>
             </a:extLst>
           </p:cNvPr>
@@ -6362,7 +6443,7 @@
           <p:cNvPr id="2" name="">
             <a:extLst xmlns:a="http://schemas.openxmlformats.org/drawingml/2006/main">
               <a:ext uri="{FF2B5EF4-FFF2-40B4-BE49-F238E27FC236}">
-                <a16:creationId xmlns:a16="http://schemas.microsoft.com/office/drawing/2014/main" id="{7B09D84A-5EBD-4BDE-9C49-C0BE9FCF39FD}"/>
+                <a16:creationId xmlns:a16="http://schemas.microsoft.com/office/drawing/2014/main" id="{B68B70CD-0C9A-4B0D-B434-7B348AD3EA27}"/>
               </a:ext>
             </a:extLst>
           </p:cNvPr>
@@ -6430,7 +6511,7 @@
           <p:cNvPr id="3" name="">
             <a:extLst xmlns:a="http://schemas.openxmlformats.org/drawingml/2006/main">
               <a:ext uri="{FF2B5EF4-FFF2-40B4-BE49-F238E27FC236}">
-                <a16:creationId xmlns:a16="http://schemas.microsoft.com/office/drawing/2014/main" id="{9724BFD7-2DA8-458A-95EE-3ECCDBF32732}"/>
+                <a16:creationId xmlns:a16="http://schemas.microsoft.com/office/drawing/2014/main" id="{4EE578DC-17E4-4545-A11B-3877F38E9FCD}"/>
               </a:ext>
             </a:extLst>
           </p:cNvPr>
@@ -6498,7 +6579,7 @@
           <p:cNvPr id="4" name="">
             <a:extLst xmlns:a="http://schemas.openxmlformats.org/drawingml/2006/main">
               <a:ext uri="{FF2B5EF4-FFF2-40B4-BE49-F238E27FC236}">
-                <a16:creationId xmlns:a16="http://schemas.microsoft.com/office/drawing/2014/main" id="{85C1003E-04DE-4BDC-868E-FF48A73AB564}"/>
+                <a16:creationId xmlns:a16="http://schemas.microsoft.com/office/drawing/2014/main" id="{2FB43295-B4D2-49EC-BC8E-321323C63E40}"/>
               </a:ext>
             </a:extLst>
           </p:cNvPr>
@@ -6616,7 +6697,7 @@
           <p:cNvPr id="5" name="">
             <a:extLst xmlns:a="http://schemas.openxmlformats.org/drawingml/2006/main">
               <a:ext uri="{FF2B5EF4-FFF2-40B4-BE49-F238E27FC236}">
-                <a16:creationId xmlns:a16="http://schemas.microsoft.com/office/drawing/2014/main" id="{AF4D2787-8C7C-4720-AFEC-80ECE7FA9F36}"/>
+                <a16:creationId xmlns:a16="http://schemas.microsoft.com/office/drawing/2014/main" id="{596921B4-CB41-45F5-9838-7A1DF572E634}"/>
               </a:ext>
             </a:extLst>
           </p:cNvPr>
@@ -6684,7 +6765,7 @@
           <p:cNvPr id="6" name="">
             <a:extLst xmlns:a="http://schemas.openxmlformats.org/drawingml/2006/main">
               <a:ext uri="{FF2B5EF4-FFF2-40B4-BE49-F238E27FC236}">
-                <a16:creationId xmlns:a16="http://schemas.microsoft.com/office/drawing/2014/main" id="{8DE07712-05D9-4E3A-99BE-CA7AD5E34E9D}"/>
+                <a16:creationId xmlns:a16="http://schemas.microsoft.com/office/drawing/2014/main" id="{5CBF7871-D4C1-4539-B6D8-F45657981CE6}"/>
               </a:ext>
             </a:extLst>
           </p:cNvPr>
@@ -6802,7 +6883,7 @@
           <p:cNvPr id="7" name="">
             <a:extLst xmlns:a="http://schemas.openxmlformats.org/drawingml/2006/main">
               <a:ext uri="{FF2B5EF4-FFF2-40B4-BE49-F238E27FC236}">
-                <a16:creationId xmlns:a16="http://schemas.microsoft.com/office/drawing/2014/main" id="{67AF68B1-2258-4D6B-B5ED-30A1E3052CC7}"/>
+                <a16:creationId xmlns:a16="http://schemas.microsoft.com/office/drawing/2014/main" id="{D8F19BD0-C26A-4AA5-9B2D-C57E16287C0C}"/>
               </a:ext>
             </a:extLst>
           </p:cNvPr>
@@ -6870,7 +6951,7 @@
           <p:cNvPr id="8" name="">
             <a:extLst xmlns:a="http://schemas.openxmlformats.org/drawingml/2006/main">
               <a:ext uri="{FF2B5EF4-FFF2-40B4-BE49-F238E27FC236}">
-                <a16:creationId xmlns:a16="http://schemas.microsoft.com/office/drawing/2014/main" id="{4BB1A8C2-AD2A-48BB-84BE-60BBE99B9034}"/>
+                <a16:creationId xmlns:a16="http://schemas.microsoft.com/office/drawing/2014/main" id="{D54BD649-0B78-44A5-9B97-D1F8D3F79560}"/>
               </a:ext>
             </a:extLst>
           </p:cNvPr>
@@ -6988,7 +7069,7 @@
           <p:cNvPr id="9" name="">
             <a:extLst xmlns:a="http://schemas.openxmlformats.org/drawingml/2006/main">
               <a:ext uri="{FF2B5EF4-FFF2-40B4-BE49-F238E27FC236}">
-                <a16:creationId xmlns:a16="http://schemas.microsoft.com/office/drawing/2014/main" id="{6382F87A-3E85-463D-B866-E054F7857123}"/>
+                <a16:creationId xmlns:a16="http://schemas.microsoft.com/office/drawing/2014/main" id="{F2B4F833-D8BF-4648-9328-18603DDF1525}"/>
               </a:ext>
             </a:extLst>
           </p:cNvPr>
@@ -7056,7 +7137,7 @@
           <p:cNvPr id="10" name="">
             <a:extLst xmlns:a="http://schemas.openxmlformats.org/drawingml/2006/main">
               <a:ext uri="{FF2B5EF4-FFF2-40B4-BE49-F238E27FC236}">
-                <a16:creationId xmlns:a16="http://schemas.microsoft.com/office/drawing/2014/main" id="{DC6A8A2A-D4D7-429B-8970-A336B8987182}"/>
+                <a16:creationId xmlns:a16="http://schemas.microsoft.com/office/drawing/2014/main" id="{29255473-1577-4208-8FFF-24EE48C691D9}"/>
               </a:ext>
             </a:extLst>
           </p:cNvPr>
@@ -7174,7 +7255,7 @@
           <p:cNvPr id="14" name="">
             <a:extLst xmlns:a="http://schemas.openxmlformats.org/drawingml/2006/main">
               <a:ext uri="{FF2B5EF4-FFF2-40B4-BE49-F238E27FC236}">
-                <a16:creationId xmlns:a16="http://schemas.microsoft.com/office/drawing/2014/main" id="{CDF1FC66-B3BF-4CE3-B534-AE6392A406AB}"/>
+                <a16:creationId xmlns:a16="http://schemas.microsoft.com/office/drawing/2014/main" id="{403933EE-AE99-4102-8095-32B4686E8CF1}"/>
               </a:ext>
             </a:extLst>
           </p:cNvPr>
@@ -7240,7 +7321,7 @@
     </p:spTree>
     <p:extLst>
       <p:ext uri="{BB962C8B-B14F-4D97-AF65-F5344CB8AC3E}">
-        <p14:creationId xmlns:p14="http://schemas.microsoft.com/office/powerpoint/2010/main" val="1467397348"/>
+        <p14:creationId xmlns:p14="http://schemas.microsoft.com/office/powerpoint/2010/main" val="1884313945"/>
       </p:ext>
     </p:extLst>
   </p:cSld>
@@ -7271,7 +7352,7 @@
           <p:cNvPr id="5" name="">
             <a:extLst xmlns:a="http://schemas.openxmlformats.org/drawingml/2006/main">
               <a:ext uri="{FF2B5EF4-FFF2-40B4-BE49-F238E27FC236}">
-                <a16:creationId xmlns:a16="http://schemas.microsoft.com/office/drawing/2014/main" id="{24077B89-293F-403A-9186-502D46162A90}"/>
+                <a16:creationId xmlns:a16="http://schemas.microsoft.com/office/drawing/2014/main" id="{A54D7AF5-3468-489B-8C45-C1DF943183A6}"/>
               </a:ext>
             </a:extLst>
           </p:cNvPr>
@@ -7339,7 +7420,7 @@
           <p:cNvPr id="2" name="">
             <a:extLst xmlns:a="http://schemas.openxmlformats.org/drawingml/2006/main">
               <a:ext uri="{FF2B5EF4-FFF2-40B4-BE49-F238E27FC236}">
-                <a16:creationId xmlns:a16="http://schemas.microsoft.com/office/drawing/2014/main" id="{619F0669-1015-4C5C-83B2-5D15A3C88A52}"/>
+                <a16:creationId xmlns:a16="http://schemas.microsoft.com/office/drawing/2014/main" id="{9A0A3421-1086-4F8E-A539-EC2A92AE5E5A}"/>
               </a:ext>
             </a:extLst>
           </p:cNvPr>
@@ -7407,7 +7488,7 @@
           <p:cNvPr id="3" name="">
             <a:extLst xmlns:a="http://schemas.openxmlformats.org/drawingml/2006/main">
               <a:ext uri="{FF2B5EF4-FFF2-40B4-BE49-F238E27FC236}">
-                <a16:creationId xmlns:a16="http://schemas.microsoft.com/office/drawing/2014/main" id="{A9D3375A-59CC-4281-9518-23691BD691C7}"/>
+                <a16:creationId xmlns:a16="http://schemas.microsoft.com/office/drawing/2014/main" id="{27184430-1F43-4C39-AD91-4ADADF165A63}"/>
               </a:ext>
             </a:extLst>
           </p:cNvPr>
@@ -7498,7 +7579,7 @@
           <p:cNvPr id="4" name="">
             <a:extLst xmlns:a="http://schemas.openxmlformats.org/drawingml/2006/main">
               <a:ext uri="{FF2B5EF4-FFF2-40B4-BE49-F238E27FC236}">
-                <a16:creationId xmlns:a16="http://schemas.microsoft.com/office/drawing/2014/main" id="{58BE3FD2-7253-4E9F-90DA-C8E24B5A03C7}"/>
+                <a16:creationId xmlns:a16="http://schemas.microsoft.com/office/drawing/2014/main" id="{974CC9D2-1E49-4F0C-8D44-C727846B7A67}"/>
               </a:ext>
             </a:extLst>
           </p:cNvPr>
@@ -7556,7 +7637,7 @@
                 <a:ea typeface="Arial"/>
                 <a:cs typeface="Arial"/>
               </a:rPr>
-              <a:t>The following slides follow the implemented A–H journey</a:t>
+              <a:t>The following slides follow the implemented A–I journey</a:t>
             </a:r>
           </a:p>
         </p:txBody>
@@ -7564,7 +7645,7 @@
     </p:spTree>
     <p:extLst>
       <p:ext uri="{BB962C8B-B14F-4D97-AF65-F5344CB8AC3E}">
-        <p14:creationId xmlns:p14="http://schemas.microsoft.com/office/powerpoint/2010/main" val="388173731"/>
+        <p14:creationId xmlns:p14="http://schemas.microsoft.com/office/powerpoint/2010/main" val="1732154174"/>
       </p:ext>
     </p:extLst>
   </p:cSld>
@@ -7592,10 +7673,10 @@
       </p:grpSpPr>
       <p:sp>
         <p:nvSpPr>
-          <p:cNvPr id="10" name="">
-            <a:extLst xmlns:a="http://schemas.openxmlformats.org/drawingml/2006/main">
-              <a:ext uri="{FF2B5EF4-FFF2-40B4-BE49-F238E27FC236}">
-                <a16:creationId xmlns:a16="http://schemas.microsoft.com/office/drawing/2014/main" id="{EE96604D-60F6-4473-BCA9-96BAF2FF8B84}"/>
+          <p:cNvPr id="11" name="">
+            <a:extLst xmlns:a="http://schemas.openxmlformats.org/drawingml/2006/main">
+              <a:ext uri="{FF2B5EF4-FFF2-40B4-BE49-F238E27FC236}">
+                <a16:creationId xmlns:a16="http://schemas.microsoft.com/office/drawing/2014/main" id="{3CF9C974-8460-443E-81BD-9559C43A3C9A}"/>
               </a:ext>
             </a:extLst>
           </p:cNvPr>
@@ -7663,7 +7744,7 @@
           <p:cNvPr id="2" name="">
             <a:extLst xmlns:a="http://schemas.openxmlformats.org/drawingml/2006/main">
               <a:ext uri="{FF2B5EF4-FFF2-40B4-BE49-F238E27FC236}">
-                <a16:creationId xmlns:a16="http://schemas.microsoft.com/office/drawing/2014/main" id="{ADF4248B-F40D-49FA-84A3-9219BAF59522}"/>
+                <a16:creationId xmlns:a16="http://schemas.microsoft.com/office/drawing/2014/main" id="{887A8D11-1B31-4C39-BD6C-2E55359560D4}"/>
               </a:ext>
             </a:extLst>
           </p:cNvPr>
@@ -7731,7 +7812,7 @@
           <p:cNvPr id="3" name="">
             <a:extLst xmlns:a="http://schemas.openxmlformats.org/drawingml/2006/main">
               <a:ext uri="{FF2B5EF4-FFF2-40B4-BE49-F238E27FC236}">
-                <a16:creationId xmlns:a16="http://schemas.microsoft.com/office/drawing/2014/main" id="{5E13C158-8D50-417C-A59A-CCDE22B56F21}"/>
+                <a16:creationId xmlns:a16="http://schemas.microsoft.com/office/drawing/2014/main" id="{96DA6072-8673-4A94-9904-2217775367FC}"/>
               </a:ext>
             </a:extLst>
           </p:cNvPr>
@@ -7799,18 +7880,18 @@
           <p:cNvPr id="4" name="">
             <a:extLst xmlns:a="http://schemas.openxmlformats.org/drawingml/2006/main">
               <a:ext uri="{FF2B5EF4-FFF2-40B4-BE49-F238E27FC236}">
-                <a16:creationId xmlns:a16="http://schemas.microsoft.com/office/drawing/2014/main" id="{C0CF5CE6-0720-4E39-B171-24AB9C1A0A0F}"/>
-              </a:ext>
-            </a:extLst>
-          </p:cNvPr>
-          <p:cNvSpPr>
-            <a:spLocks xmlns:a="http://schemas.openxmlformats.org/drawingml/2006/main" noGrp="1"/>
-          </p:cNvSpPr>
-          <p:nvPr/>
-        </p:nvSpPr>
-        <p:spPr>
-          <a:xfrm xmlns:a="http://schemas.openxmlformats.org/drawingml/2006/main">
-            <a:off x="619125" y="2333625"/>
+                <a16:creationId xmlns:a16="http://schemas.microsoft.com/office/drawing/2014/main" id="{C4584837-4E68-4F01-AB17-CE0150E7CD27}"/>
+              </a:ext>
+            </a:extLst>
+          </p:cNvPr>
+          <p:cNvSpPr>
+            <a:spLocks xmlns:a="http://schemas.openxmlformats.org/drawingml/2006/main" noGrp="1"/>
+          </p:cNvSpPr>
+          <p:nvPr/>
+        </p:nvSpPr>
+        <p:spPr>
+          <a:xfrm xmlns:a="http://schemas.openxmlformats.org/drawingml/2006/main">
+            <a:off x="619125" y="2143125"/>
             <a:ext cx="10858500" cy="762000"/>
           </a:xfrm>
           <a:prstGeom xmlns:a="http://schemas.openxmlformats.org/drawingml/2006/main" prst="rect">
@@ -7857,7 +7938,7 @@
                 <a:ea typeface="Arial"/>
                 <a:cs typeface="Arial"/>
               </a:rPr>
-              <a:t>bash scripts/cicd-walkthrough-prerequisites.sh</a:t>
+              <a:t>python3 scripts/cicd-release-inputs.py</a:t>
             </a:r>
           </a:p>
         </p:txBody>
@@ -7867,18 +7948,18 @@
           <p:cNvPr id="5" name="">
             <a:extLst xmlns:a="http://schemas.openxmlformats.org/drawingml/2006/main">
               <a:ext uri="{FF2B5EF4-FFF2-40B4-BE49-F238E27FC236}">
-                <a16:creationId xmlns:a16="http://schemas.microsoft.com/office/drawing/2014/main" id="{9FA118E9-85CD-4517-9D21-8BB7391AEF93}"/>
-              </a:ext>
-            </a:extLst>
-          </p:cNvPr>
-          <p:cNvSpPr>
-            <a:spLocks xmlns:a="http://schemas.openxmlformats.org/drawingml/2006/main" noGrp="1"/>
-          </p:cNvSpPr>
-          <p:nvPr/>
-        </p:nvSpPr>
-        <p:spPr>
-          <a:xfrm xmlns:a="http://schemas.openxmlformats.org/drawingml/2006/main">
-            <a:off x="619125" y="2905125"/>
+                <a16:creationId xmlns:a16="http://schemas.microsoft.com/office/drawing/2014/main" id="{01C6BC54-9202-472D-9CEE-23213B81836D}"/>
+              </a:ext>
+            </a:extLst>
+          </p:cNvPr>
+          <p:cNvSpPr>
+            <a:spLocks xmlns:a="http://schemas.openxmlformats.org/drawingml/2006/main" noGrp="1"/>
+          </p:cNvSpPr>
+          <p:nvPr/>
+        </p:nvSpPr>
+        <p:spPr>
+          <a:xfrm xmlns:a="http://schemas.openxmlformats.org/drawingml/2006/main">
+            <a:off x="619125" y="2667000"/>
             <a:ext cx="10858500" cy="762000"/>
           </a:xfrm>
           <a:prstGeom xmlns:a="http://schemas.openxmlformats.org/drawingml/2006/main" prst="rect">
@@ -7925,7 +8006,7 @@
                 <a:ea typeface="Arial"/>
                 <a:cs typeface="Arial"/>
               </a:rPr>
-              <a:t>bash scripts/cicd-walkthrough-host.sh</a:t>
+              <a:t>bash scripts/cicd-walkthrough-prerequisites.sh</a:t>
             </a:r>
           </a:p>
         </p:txBody>
@@ -7935,18 +8016,18 @@
           <p:cNvPr id="6" name="">
             <a:extLst xmlns:a="http://schemas.openxmlformats.org/drawingml/2006/main">
               <a:ext uri="{FF2B5EF4-FFF2-40B4-BE49-F238E27FC236}">
-                <a16:creationId xmlns:a16="http://schemas.microsoft.com/office/drawing/2014/main" id="{E67737FB-3D51-4C8C-B6FB-270DCD9C274D}"/>
-              </a:ext>
-            </a:extLst>
-          </p:cNvPr>
-          <p:cNvSpPr>
-            <a:spLocks xmlns:a="http://schemas.openxmlformats.org/drawingml/2006/main" noGrp="1"/>
-          </p:cNvSpPr>
-          <p:nvPr/>
-        </p:nvSpPr>
-        <p:spPr>
-          <a:xfrm xmlns:a="http://schemas.openxmlformats.org/drawingml/2006/main">
-            <a:off x="619125" y="3476625"/>
+                <a16:creationId xmlns:a16="http://schemas.microsoft.com/office/drawing/2014/main" id="{10AD92DE-682A-4877-967A-AEE2DEFD8C0C}"/>
+              </a:ext>
+            </a:extLst>
+          </p:cNvPr>
+          <p:cNvSpPr>
+            <a:spLocks xmlns:a="http://schemas.openxmlformats.org/drawingml/2006/main" noGrp="1"/>
+          </p:cNvSpPr>
+          <p:nvPr/>
+        </p:nvSpPr>
+        <p:spPr>
+          <a:xfrm xmlns:a="http://schemas.openxmlformats.org/drawingml/2006/main">
+            <a:off x="619125" y="3190875"/>
             <a:ext cx="10858500" cy="762000"/>
           </a:xfrm>
           <a:prstGeom xmlns:a="http://schemas.openxmlformats.org/drawingml/2006/main" prst="rect">
@@ -7993,7 +8074,7 @@
                 <a:ea typeface="Arial"/>
                 <a:cs typeface="Arial"/>
               </a:rPr>
-              <a:t>bash scripts/apex-destroy.sh</a:t>
+              <a:t>bash scripts/cicd-walkthrough-host.sh</a:t>
             </a:r>
           </a:p>
         </p:txBody>
@@ -8003,18 +8084,18 @@
           <p:cNvPr id="7" name="">
             <a:extLst xmlns:a="http://schemas.openxmlformats.org/drawingml/2006/main">
               <a:ext uri="{FF2B5EF4-FFF2-40B4-BE49-F238E27FC236}">
-                <a16:creationId xmlns:a16="http://schemas.microsoft.com/office/drawing/2014/main" id="{0149564A-602F-4BE5-8AC1-717AC9C3B1CB}"/>
-              </a:ext>
-            </a:extLst>
-          </p:cNvPr>
-          <p:cNvSpPr>
-            <a:spLocks xmlns:a="http://schemas.openxmlformats.org/drawingml/2006/main" noGrp="1"/>
-          </p:cNvSpPr>
-          <p:nvPr/>
-        </p:nvSpPr>
-        <p:spPr>
-          <a:xfrm xmlns:a="http://schemas.openxmlformats.org/drawingml/2006/main">
-            <a:off x="619125" y="4048125"/>
+                <a16:creationId xmlns:a16="http://schemas.microsoft.com/office/drawing/2014/main" id="{D0FF7CCB-859F-4643-8082-06D3F1E4CF16}"/>
+              </a:ext>
+            </a:extLst>
+          </p:cNvPr>
+          <p:cNvSpPr>
+            <a:spLocks xmlns:a="http://schemas.openxmlformats.org/drawingml/2006/main" noGrp="1"/>
+          </p:cNvSpPr>
+          <p:nvPr/>
+        </p:nvSpPr>
+        <p:spPr>
+          <a:xfrm xmlns:a="http://schemas.openxmlformats.org/drawingml/2006/main">
+            <a:off x="619125" y="3714750"/>
             <a:ext cx="10858500" cy="762000"/>
           </a:xfrm>
           <a:prstGeom xmlns:a="http://schemas.openxmlformats.org/drawingml/2006/main" prst="rect">
@@ -8061,6 +8142,74 @@
                 <a:ea typeface="Arial"/>
                 <a:cs typeface="Arial"/>
               </a:rPr>
+              <a:t>bash scripts/apex-destroy.sh</a:t>
+            </a:r>
+          </a:p>
+        </p:txBody>
+      </p:sp>
+      <p:sp>
+        <p:nvSpPr>
+          <p:cNvPr id="8" name="">
+            <a:extLst xmlns:a="http://schemas.openxmlformats.org/drawingml/2006/main">
+              <a:ext uri="{FF2B5EF4-FFF2-40B4-BE49-F238E27FC236}">
+                <a16:creationId xmlns:a16="http://schemas.microsoft.com/office/drawing/2014/main" id="{78797655-89F2-4B45-B33E-21BD17626437}"/>
+              </a:ext>
+            </a:extLst>
+          </p:cNvPr>
+          <p:cNvSpPr>
+            <a:spLocks xmlns:a="http://schemas.openxmlformats.org/drawingml/2006/main" noGrp="1"/>
+          </p:cNvSpPr>
+          <p:nvPr/>
+        </p:nvSpPr>
+        <p:spPr>
+          <a:xfrm xmlns:a="http://schemas.openxmlformats.org/drawingml/2006/main">
+            <a:off x="619125" y="4238625"/>
+            <a:ext cx="10858500" cy="762000"/>
+          </a:xfrm>
+          <a:prstGeom xmlns:a="http://schemas.openxmlformats.org/drawingml/2006/main" prst="rect">
+            <a:avLst/>
+          </a:prstGeom>
+          <a:noFill xmlns:a="http://schemas.openxmlformats.org/drawingml/2006/main"/>
+          <a:ln xmlns:a="http://schemas.openxmlformats.org/drawingml/2006/main" w="0">
+            <a:noFill/>
+          </a:ln>
+        </p:spPr>
+        <p:txBody>
+          <a:bodyPr xmlns:a="http://schemas.openxmlformats.org/drawingml/2006/main" lIns="0" tIns="0" rIns="0" bIns="0" anchor="t">
+            <a:noAutofit/>
+          </a:bodyPr>
+          <a:lstStyle xmlns:a="http://schemas.openxmlformats.org/drawingml/2006/main">
+            <a:defPPr>
+              <a:defRPr sz="1875" b="1">
+                <a:solidFill>
+                  <a:srgbClr val="235F63"/>
+                </a:solidFill>
+                <a:latin typeface="Arial"/>
+                <a:ea typeface="Arial"/>
+                <a:cs typeface="Arial"/>
+              </a:defRPr>
+            </a:defPPr>
+          </a:lstStyle>
+          <a:p xmlns:a="http://schemas.openxmlformats.org/drawingml/2006/main">
+            <a:pPr>
+              <a:defRPr sz="1875" b="1">
+                <a:solidFill>
+                  <a:srgbClr val="235F63"/>
+                </a:solidFill>
+                <a:latin typeface="Arial"/>
+                <a:ea typeface="Arial"/>
+                <a:cs typeface="Arial"/>
+              </a:defRPr>
+            </a:pPr>
+            <a:r>
+              <a:rPr sz="1875" b="1">
+                <a:solidFill>
+                  <a:srgbClr val="235F63"/>
+                </a:solidFill>
+                <a:latin typeface="Arial"/>
+                <a:ea typeface="Arial"/>
+                <a:cs typeface="Arial"/>
+              </a:rPr>
               <a:t>bash scripts/cicd-walkthrough-apex-init.sh</a:t>
             </a:r>
           </a:p>
@@ -8068,10 +8217,10 @@
       </p:sp>
       <p:sp>
         <p:nvSpPr>
-          <p:cNvPr id="8" name="">
-            <a:extLst xmlns:a="http://schemas.openxmlformats.org/drawingml/2006/main">
-              <a:ext uri="{FF2B5EF4-FFF2-40B4-BE49-F238E27FC236}">
-                <a16:creationId xmlns:a16="http://schemas.microsoft.com/office/drawing/2014/main" id="{EBE1ED0B-6FDD-41D3-BA37-88F6EE096BE0}"/>
+          <p:cNvPr id="9" name="">
+            <a:extLst xmlns:a="http://schemas.openxmlformats.org/drawingml/2006/main">
+              <a:ext uri="{FF2B5EF4-FFF2-40B4-BE49-F238E27FC236}">
+                <a16:creationId xmlns:a16="http://schemas.microsoft.com/office/drawing/2014/main" id="{550ECE9E-FD09-42E8-A7E4-346D13A01C52}"/>
               </a:ext>
             </a:extLst>
           </p:cNvPr>
@@ -8136,10 +8285,10 @@
       </p:sp>
       <p:sp>
         <p:nvSpPr>
-          <p:cNvPr id="9" name="">
-            <a:extLst xmlns:a="http://schemas.openxmlformats.org/drawingml/2006/main">
-              <a:ext uri="{FF2B5EF4-FFF2-40B4-BE49-F238E27FC236}">
-                <a16:creationId xmlns:a16="http://schemas.microsoft.com/office/drawing/2014/main" id="{B7C9EC1B-D8C4-4F9A-B5C4-839040982C93}"/>
+          <p:cNvPr id="10" name="">
+            <a:extLst xmlns:a="http://schemas.openxmlformats.org/drawingml/2006/main">
+              <a:ext uri="{FF2B5EF4-FFF2-40B4-BE49-F238E27FC236}">
+                <a16:creationId xmlns:a16="http://schemas.microsoft.com/office/drawing/2014/main" id="{69EE397F-4AB2-4374-808E-67BFBABDDE68}"/>
               </a:ext>
             </a:extLst>
           </p:cNvPr>
@@ -8205,7 +8354,7 @@
     </p:spTree>
     <p:extLst>
       <p:ext uri="{BB962C8B-B14F-4D97-AF65-F5344CB8AC3E}">
-        <p14:creationId xmlns:p14="http://schemas.microsoft.com/office/powerpoint/2010/main" val="376231340"/>
+        <p14:creationId xmlns:p14="http://schemas.microsoft.com/office/powerpoint/2010/main" val="1214818493"/>
       </p:ext>
     </p:extLst>
   </p:cSld>
@@ -8236,7 +8385,7 @@
           <p:cNvPr id="10" name="">
             <a:extLst xmlns:a="http://schemas.openxmlformats.org/drawingml/2006/main">
               <a:ext uri="{FF2B5EF4-FFF2-40B4-BE49-F238E27FC236}">
-                <a16:creationId xmlns:a16="http://schemas.microsoft.com/office/drawing/2014/main" id="{3F795FDE-C6EA-4FD9-BA2C-9CB6BCF0F6C0}"/>
+                <a16:creationId xmlns:a16="http://schemas.microsoft.com/office/drawing/2014/main" id="{970EAD4D-DC55-49E5-9567-FB18498E151E}"/>
               </a:ext>
             </a:extLst>
           </p:cNvPr>
@@ -8267,7 +8416,7 @@
           <p:cNvPr id="9" name="">
             <a:extLst xmlns:a="http://schemas.openxmlformats.org/drawingml/2006/main">
               <a:ext uri="{FF2B5EF4-FFF2-40B4-BE49-F238E27FC236}">
-                <a16:creationId xmlns:a16="http://schemas.microsoft.com/office/drawing/2014/main" id="{9C7CABE4-96BD-4F66-AA05-991C2B2D2425}"/>
+                <a16:creationId xmlns:a16="http://schemas.microsoft.com/office/drawing/2014/main" id="{151D645C-DABA-421D-B91F-A928FC5CD5E3}"/>
               </a:ext>
             </a:extLst>
           </p:cNvPr>
@@ -8298,7 +8447,7 @@
           <p:cNvPr id="12" name="">
             <a:extLst xmlns:a="http://schemas.openxmlformats.org/drawingml/2006/main">
               <a:ext uri="{FF2B5EF4-FFF2-40B4-BE49-F238E27FC236}">
-                <a16:creationId xmlns:a16="http://schemas.microsoft.com/office/drawing/2014/main" id="{FB6DCD6F-58F5-4E48-8C0A-E93A70712439}"/>
+                <a16:creationId xmlns:a16="http://schemas.microsoft.com/office/drawing/2014/main" id="{C03514B1-1030-4D70-8CC1-D15CB8E4AD5B}"/>
               </a:ext>
             </a:extLst>
           </p:cNvPr>
@@ -8366,7 +8515,7 @@
           <p:cNvPr id="2" name="">
             <a:extLst xmlns:a="http://schemas.openxmlformats.org/drawingml/2006/main">
               <a:ext uri="{FF2B5EF4-FFF2-40B4-BE49-F238E27FC236}">
-                <a16:creationId xmlns:a16="http://schemas.microsoft.com/office/drawing/2014/main" id="{0E042127-9A5E-42F9-A2BD-39069B428249}"/>
+                <a16:creationId xmlns:a16="http://schemas.microsoft.com/office/drawing/2014/main" id="{FC6803CC-3E27-4828-9499-826868B55D56}"/>
               </a:ext>
             </a:extLst>
           </p:cNvPr>
@@ -8434,7 +8583,7 @@
           <p:cNvPr id="3" name="">
             <a:extLst xmlns:a="http://schemas.openxmlformats.org/drawingml/2006/main">
               <a:ext uri="{FF2B5EF4-FFF2-40B4-BE49-F238E27FC236}">
-                <a16:creationId xmlns:a16="http://schemas.microsoft.com/office/drawing/2014/main" id="{92D10481-99A7-4B90-892B-612F1E06FC9A}"/>
+                <a16:creationId xmlns:a16="http://schemas.microsoft.com/office/drawing/2014/main" id="{9CCD87D6-F0C1-489D-AF65-DAED41517500}"/>
               </a:ext>
             </a:extLst>
           </p:cNvPr>
@@ -8502,7 +8651,7 @@
           <p:cNvPr id="4" name="">
             <a:extLst xmlns:a="http://schemas.openxmlformats.org/drawingml/2006/main">
               <a:ext uri="{FF2B5EF4-FFF2-40B4-BE49-F238E27FC236}">
-                <a16:creationId xmlns:a16="http://schemas.microsoft.com/office/drawing/2014/main" id="{87FBA0B5-D94E-4EC5-9635-EBE2FB7C8A70}"/>
+                <a16:creationId xmlns:a16="http://schemas.microsoft.com/office/drawing/2014/main" id="{C4F1E86F-02CF-47D4-871E-B05CC8B4DC5A}"/>
               </a:ext>
             </a:extLst>
           </p:cNvPr>
@@ -8570,7 +8719,7 @@
           <p:cNvPr id="5" name="">
             <a:extLst xmlns:a="http://schemas.openxmlformats.org/drawingml/2006/main">
               <a:ext uri="{FF2B5EF4-FFF2-40B4-BE49-F238E27FC236}">
-                <a16:creationId xmlns:a16="http://schemas.microsoft.com/office/drawing/2014/main" id="{99AA7E6E-7D92-4123-BE73-67F663920CCA}"/>
+                <a16:creationId xmlns:a16="http://schemas.microsoft.com/office/drawing/2014/main" id="{3DBC5BB0-9EB5-46D3-92EA-637F3FE5D9CF}"/>
               </a:ext>
             </a:extLst>
           </p:cNvPr>
@@ -8638,7 +8787,7 @@
           <p:cNvPr id="6" name="">
             <a:extLst xmlns:a="http://schemas.openxmlformats.org/drawingml/2006/main">
               <a:ext uri="{FF2B5EF4-FFF2-40B4-BE49-F238E27FC236}">
-                <a16:creationId xmlns:a16="http://schemas.microsoft.com/office/drawing/2014/main" id="{97B07C67-20F1-4629-BB4E-9E47AE1F8680}"/>
+                <a16:creationId xmlns:a16="http://schemas.microsoft.com/office/drawing/2014/main" id="{3AFCAACF-F09B-4D53-B10C-72EAB998A88B}"/>
               </a:ext>
             </a:extLst>
           </p:cNvPr>
@@ -8756,7 +8905,7 @@
           <p:cNvPr id="7" name="">
             <a:extLst xmlns:a="http://schemas.openxmlformats.org/drawingml/2006/main">
               <a:ext uri="{FF2B5EF4-FFF2-40B4-BE49-F238E27FC236}">
-                <a16:creationId xmlns:a16="http://schemas.microsoft.com/office/drawing/2014/main" id="{6AF20F33-8941-4068-8E91-2ADA81601121}"/>
+                <a16:creationId xmlns:a16="http://schemas.microsoft.com/office/drawing/2014/main" id="{872A0D7D-B28D-4274-9CE1-03F616C46E7A}"/>
               </a:ext>
             </a:extLst>
           </p:cNvPr>
@@ -8874,7 +9023,7 @@
           <p:cNvPr id="8" name="">
             <a:extLst xmlns:a="http://schemas.openxmlformats.org/drawingml/2006/main">
               <a:ext uri="{FF2B5EF4-FFF2-40B4-BE49-F238E27FC236}">
-                <a16:creationId xmlns:a16="http://schemas.microsoft.com/office/drawing/2014/main" id="{29F702BE-C54F-4A97-88DE-1691D5A1C82B}"/>
+                <a16:creationId xmlns:a16="http://schemas.microsoft.com/office/drawing/2014/main" id="{F3FDB6E7-3DE7-4C09-B65F-A04161F831FB}"/>
               </a:ext>
             </a:extLst>
           </p:cNvPr>
@@ -8992,7 +9141,7 @@
           <p:cNvPr id="11" name="">
             <a:extLst xmlns:a="http://schemas.openxmlformats.org/drawingml/2006/main">
               <a:ext uri="{FF2B5EF4-FFF2-40B4-BE49-F238E27FC236}">
-                <a16:creationId xmlns:a16="http://schemas.microsoft.com/office/drawing/2014/main" id="{61859F85-5464-4C54-93A6-9AD1943DA656}"/>
+                <a16:creationId xmlns:a16="http://schemas.microsoft.com/office/drawing/2014/main" id="{F80E575D-DAB1-49F0-A205-E726335DAD53}"/>
               </a:ext>
             </a:extLst>
           </p:cNvPr>
@@ -9058,7 +9207,7 @@
     </p:spTree>
     <p:extLst>
       <p:ext uri="{BB962C8B-B14F-4D97-AF65-F5344CB8AC3E}">
-        <p14:creationId xmlns:p14="http://schemas.microsoft.com/office/powerpoint/2010/main" val="1927774438"/>
+        <p14:creationId xmlns:p14="http://schemas.microsoft.com/office/powerpoint/2010/main" val="311783291"/>
       </p:ext>
     </p:extLst>
   </p:cSld>
@@ -9089,7 +9238,7 @@
           <p:cNvPr id="10" name="">
             <a:extLst xmlns:a="http://schemas.openxmlformats.org/drawingml/2006/main">
               <a:ext uri="{FF2B5EF4-FFF2-40B4-BE49-F238E27FC236}">
-                <a16:creationId xmlns:a16="http://schemas.microsoft.com/office/drawing/2014/main" id="{6E4B69CC-939E-49AD-8EC3-E60C74F6293E}"/>
+                <a16:creationId xmlns:a16="http://schemas.microsoft.com/office/drawing/2014/main" id="{299A59AB-F1D6-422C-8DE9-32EF10C9D112}"/>
               </a:ext>
             </a:extLst>
           </p:cNvPr>
@@ -9120,7 +9269,7 @@
           <p:cNvPr id="9" name="">
             <a:extLst xmlns:a="http://schemas.openxmlformats.org/drawingml/2006/main">
               <a:ext uri="{FF2B5EF4-FFF2-40B4-BE49-F238E27FC236}">
-                <a16:creationId xmlns:a16="http://schemas.microsoft.com/office/drawing/2014/main" id="{B365E1E1-FFBB-437E-B3D5-6F9F1E1C3B09}"/>
+                <a16:creationId xmlns:a16="http://schemas.microsoft.com/office/drawing/2014/main" id="{A49256B5-FDB3-487B-9CD6-5E80DDF1C810}"/>
               </a:ext>
             </a:extLst>
           </p:cNvPr>
@@ -9154,7 +9303,7 @@
           <p:cNvPr id="8" name="">
             <a:extLst xmlns:a="http://schemas.openxmlformats.org/drawingml/2006/main">
               <a:ext uri="{FF2B5EF4-FFF2-40B4-BE49-F238E27FC236}">
-                <a16:creationId xmlns:a16="http://schemas.microsoft.com/office/drawing/2014/main" id="{B72D437C-8BBD-4697-AB96-9B10C18E91DF}"/>
+                <a16:creationId xmlns:a16="http://schemas.microsoft.com/office/drawing/2014/main" id="{E257CE5E-DFCC-4A64-85FF-10B020DCB632}"/>
               </a:ext>
             </a:extLst>
           </p:cNvPr>
@@ -9185,7 +9334,7 @@
           <p:cNvPr id="12" name="">
             <a:extLst xmlns:a="http://schemas.openxmlformats.org/drawingml/2006/main">
               <a:ext uri="{FF2B5EF4-FFF2-40B4-BE49-F238E27FC236}">
-                <a16:creationId xmlns:a16="http://schemas.microsoft.com/office/drawing/2014/main" id="{29E6233C-53D0-48BE-BAE4-DDE4579F919B}"/>
+                <a16:creationId xmlns:a16="http://schemas.microsoft.com/office/drawing/2014/main" id="{34CB1912-0C13-4EA5-A467-EE7D3FAA337A}"/>
               </a:ext>
             </a:extLst>
           </p:cNvPr>
@@ -9253,7 +9402,7 @@
           <p:cNvPr id="2" name="">
             <a:extLst xmlns:a="http://schemas.openxmlformats.org/drawingml/2006/main">
               <a:ext uri="{FF2B5EF4-FFF2-40B4-BE49-F238E27FC236}">
-                <a16:creationId xmlns:a16="http://schemas.microsoft.com/office/drawing/2014/main" id="{581B4E1A-B282-4FAE-9DBB-855216DEDA2A}"/>
+                <a16:creationId xmlns:a16="http://schemas.microsoft.com/office/drawing/2014/main" id="{BB7A53C6-926C-4263-AA0C-9CA994AC1C4C}"/>
               </a:ext>
             </a:extLst>
           </p:cNvPr>
@@ -9321,7 +9470,7 @@
           <p:cNvPr id="3" name="">
             <a:extLst xmlns:a="http://schemas.openxmlformats.org/drawingml/2006/main">
               <a:ext uri="{FF2B5EF4-FFF2-40B4-BE49-F238E27FC236}">
-                <a16:creationId xmlns:a16="http://schemas.microsoft.com/office/drawing/2014/main" id="{70D2C299-6B2A-4438-8A82-416F0D289E61}"/>
+                <a16:creationId xmlns:a16="http://schemas.microsoft.com/office/drawing/2014/main" id="{E3858D83-B9AB-45C1-AA9F-49C210ACE4BF}"/>
               </a:ext>
             </a:extLst>
           </p:cNvPr>
@@ -9389,7 +9538,7 @@
           <p:cNvPr id="4" name="">
             <a:extLst xmlns:a="http://schemas.openxmlformats.org/drawingml/2006/main">
               <a:ext uri="{FF2B5EF4-FFF2-40B4-BE49-F238E27FC236}">
-                <a16:creationId xmlns:a16="http://schemas.microsoft.com/office/drawing/2014/main" id="{3BC52410-269C-4CEF-B18E-0200A7F2D787}"/>
+                <a16:creationId xmlns:a16="http://schemas.microsoft.com/office/drawing/2014/main" id="{78AC1089-40E3-495A-9B6F-48CDFE601BAF}"/>
               </a:ext>
             </a:extLst>
           </p:cNvPr>
@@ -9484,7 +9633,7 @@
           <p:cNvPr id="5" name="">
             <a:extLst xmlns:a="http://schemas.openxmlformats.org/drawingml/2006/main">
               <a:ext uri="{FF2B5EF4-FFF2-40B4-BE49-F238E27FC236}">
-                <a16:creationId xmlns:a16="http://schemas.microsoft.com/office/drawing/2014/main" id="{40BB31EE-4712-41CC-9A4B-E4A1B951A90E}"/>
+                <a16:creationId xmlns:a16="http://schemas.microsoft.com/office/drawing/2014/main" id="{20F84FFC-8010-4BFE-9C1B-A32D85D5429E}"/>
               </a:ext>
             </a:extLst>
           </p:cNvPr>
@@ -9579,7 +9728,7 @@
           <p:cNvPr id="6" name="">
             <a:extLst xmlns:a="http://schemas.openxmlformats.org/drawingml/2006/main">
               <a:ext uri="{FF2B5EF4-FFF2-40B4-BE49-F238E27FC236}">
-                <a16:creationId xmlns:a16="http://schemas.microsoft.com/office/drawing/2014/main" id="{9725B35D-9520-4A32-AC82-7B6FAECB5A9C}"/>
+                <a16:creationId xmlns:a16="http://schemas.microsoft.com/office/drawing/2014/main" id="{0305CF1B-9EF9-446C-80F6-636A06D7B8E0}"/>
               </a:ext>
             </a:extLst>
           </p:cNvPr>
@@ -9674,7 +9823,7 @@
           <p:cNvPr id="7" name="">
             <a:extLst xmlns:a="http://schemas.openxmlformats.org/drawingml/2006/main">
               <a:ext uri="{FF2B5EF4-FFF2-40B4-BE49-F238E27FC236}">
-                <a16:creationId xmlns:a16="http://schemas.microsoft.com/office/drawing/2014/main" id="{47069EB2-10F7-4676-9D59-6D08A472B4CE}"/>
+                <a16:creationId xmlns:a16="http://schemas.microsoft.com/office/drawing/2014/main" id="{9EE930E5-3A58-4796-A027-8CEF22D417BC}"/>
               </a:ext>
             </a:extLst>
           </p:cNvPr>
@@ -9769,7 +9918,7 @@
           <p:cNvPr id="11" name="">
             <a:extLst xmlns:a="http://schemas.openxmlformats.org/drawingml/2006/main">
               <a:ext uri="{FF2B5EF4-FFF2-40B4-BE49-F238E27FC236}">
-                <a16:creationId xmlns:a16="http://schemas.microsoft.com/office/drawing/2014/main" id="{5CEF0BC5-464D-423A-B54D-EAEA464C7B9F}"/>
+                <a16:creationId xmlns:a16="http://schemas.microsoft.com/office/drawing/2014/main" id="{080A435B-15EA-4BDC-B550-1D860D2658BD}"/>
               </a:ext>
             </a:extLst>
           </p:cNvPr>
@@ -9835,7 +9984,7 @@
     </p:spTree>
     <p:extLst>
       <p:ext uri="{BB962C8B-B14F-4D97-AF65-F5344CB8AC3E}">
-        <p14:creationId xmlns:p14="http://schemas.microsoft.com/office/powerpoint/2010/main" val="1630635786"/>
+        <p14:creationId xmlns:p14="http://schemas.microsoft.com/office/powerpoint/2010/main" val="317055632"/>
       </p:ext>
     </p:extLst>
   </p:cSld>
@@ -9866,7 +10015,7 @@
           <p:cNvPr id="7" name="">
             <a:extLst xmlns:a="http://schemas.openxmlformats.org/drawingml/2006/main">
               <a:ext uri="{FF2B5EF4-FFF2-40B4-BE49-F238E27FC236}">
-                <a16:creationId xmlns:a16="http://schemas.microsoft.com/office/drawing/2014/main" id="{E7A82FD4-7D59-4647-8B00-AFBE03F2D070}"/>
+                <a16:creationId xmlns:a16="http://schemas.microsoft.com/office/drawing/2014/main" id="{F67CDCF4-279B-4C39-AC36-3CFF5E4567A8}"/>
               </a:ext>
             </a:extLst>
           </p:cNvPr>
@@ -9897,7 +10046,7 @@
           <p:cNvPr id="6" name="">
             <a:extLst xmlns:a="http://schemas.openxmlformats.org/drawingml/2006/main">
               <a:ext uri="{FF2B5EF4-FFF2-40B4-BE49-F238E27FC236}">
-                <a16:creationId xmlns:a16="http://schemas.microsoft.com/office/drawing/2014/main" id="{6405B47E-4B10-4D3B-ABB4-7444C2AF1B51}"/>
+                <a16:creationId xmlns:a16="http://schemas.microsoft.com/office/drawing/2014/main" id="{DC017F2E-739D-4528-BE98-AF38F2B11D12}"/>
               </a:ext>
             </a:extLst>
           </p:cNvPr>
@@ -9928,7 +10077,7 @@
           <p:cNvPr id="12" name="">
             <a:extLst xmlns:a="http://schemas.openxmlformats.org/drawingml/2006/main">
               <a:ext uri="{FF2B5EF4-FFF2-40B4-BE49-F238E27FC236}">
-                <a16:creationId xmlns:a16="http://schemas.microsoft.com/office/drawing/2014/main" id="{4C3DDDA6-4055-452C-9126-A01E00C5A92E}"/>
+                <a16:creationId xmlns:a16="http://schemas.microsoft.com/office/drawing/2014/main" id="{FB7B0017-EF42-4310-BB23-ECBA45365522}"/>
               </a:ext>
             </a:extLst>
           </p:cNvPr>
@@ -9996,7 +10145,7 @@
           <p:cNvPr id="2" name="">
             <a:extLst xmlns:a="http://schemas.openxmlformats.org/drawingml/2006/main">
               <a:ext uri="{FF2B5EF4-FFF2-40B4-BE49-F238E27FC236}">
-                <a16:creationId xmlns:a16="http://schemas.microsoft.com/office/drawing/2014/main" id="{707158A3-FB0C-40BC-9B99-DFB7BA3C327D}"/>
+                <a16:creationId xmlns:a16="http://schemas.microsoft.com/office/drawing/2014/main" id="{E58B02A6-2D09-4D46-8979-E4C4A3DBC93B}"/>
               </a:ext>
             </a:extLst>
           </p:cNvPr>
@@ -10064,7 +10213,7 @@
           <p:cNvPr id="3" name="">
             <a:extLst xmlns:a="http://schemas.openxmlformats.org/drawingml/2006/main">
               <a:ext uri="{FF2B5EF4-FFF2-40B4-BE49-F238E27FC236}">
-                <a16:creationId xmlns:a16="http://schemas.microsoft.com/office/drawing/2014/main" id="{9ED6A32E-50BD-4ECE-BA76-9B9F9C22206D}"/>
+                <a16:creationId xmlns:a16="http://schemas.microsoft.com/office/drawing/2014/main" id="{AC45A321-A940-4C69-A578-0643769E67C2}"/>
               </a:ext>
             </a:extLst>
           </p:cNvPr>
@@ -10159,7 +10308,7 @@
           <p:cNvPr id="4" name="">
             <a:extLst xmlns:a="http://schemas.openxmlformats.org/drawingml/2006/main">
               <a:ext uri="{FF2B5EF4-FFF2-40B4-BE49-F238E27FC236}">
-                <a16:creationId xmlns:a16="http://schemas.microsoft.com/office/drawing/2014/main" id="{CBDA3D8B-8FD8-4DE3-BCBF-98910BD47F32}"/>
+                <a16:creationId xmlns:a16="http://schemas.microsoft.com/office/drawing/2014/main" id="{C7D3D8E4-30D8-4481-8366-62F54ED18F1E}"/>
               </a:ext>
             </a:extLst>
           </p:cNvPr>
@@ -10254,7 +10403,7 @@
           <p:cNvPr id="5" name="">
             <a:extLst xmlns:a="http://schemas.openxmlformats.org/drawingml/2006/main">
               <a:ext uri="{FF2B5EF4-FFF2-40B4-BE49-F238E27FC236}">
-                <a16:creationId xmlns:a16="http://schemas.microsoft.com/office/drawing/2014/main" id="{496CE9C5-1474-433A-9BA6-32AB5F3CDDD9}"/>
+                <a16:creationId xmlns:a16="http://schemas.microsoft.com/office/drawing/2014/main" id="{0FA39E79-5921-4D5C-97BC-CBFC6F3472B8}"/>
               </a:ext>
             </a:extLst>
           </p:cNvPr>
@@ -10349,7 +10498,7 @@
           <p:cNvPr id="8" name="">
             <a:extLst xmlns:a="http://schemas.openxmlformats.org/drawingml/2006/main">
               <a:ext uri="{FF2B5EF4-FFF2-40B4-BE49-F238E27FC236}">
-                <a16:creationId xmlns:a16="http://schemas.microsoft.com/office/drawing/2014/main" id="{792E9078-F365-49A9-A39A-DD02E9E43D8D}"/>
+                <a16:creationId xmlns:a16="http://schemas.microsoft.com/office/drawing/2014/main" id="{13BF60B2-CA1B-4A0E-9FAA-9120D83F9372}"/>
               </a:ext>
             </a:extLst>
           </p:cNvPr>
@@ -10417,7 +10566,7 @@
           <p:cNvPr id="9" name="">
             <a:extLst xmlns:a="http://schemas.openxmlformats.org/drawingml/2006/main">
               <a:ext uri="{FF2B5EF4-FFF2-40B4-BE49-F238E27FC236}">
-                <a16:creationId xmlns:a16="http://schemas.microsoft.com/office/drawing/2014/main" id="{6154053E-4F3A-47B9-BC5C-E0FF738A6145}"/>
+                <a16:creationId xmlns:a16="http://schemas.microsoft.com/office/drawing/2014/main" id="{52D77F7F-6118-43CD-8898-3AA6D4D1441B}"/>
               </a:ext>
             </a:extLst>
           </p:cNvPr>
@@ -10485,7 +10634,7 @@
           <p:cNvPr id="10" name="">
             <a:extLst xmlns:a="http://schemas.openxmlformats.org/drawingml/2006/main">
               <a:ext uri="{FF2B5EF4-FFF2-40B4-BE49-F238E27FC236}">
-                <a16:creationId xmlns:a16="http://schemas.microsoft.com/office/drawing/2014/main" id="{48A82A91-2C46-41D1-B2A0-6F055AAAF31A}"/>
+                <a16:creationId xmlns:a16="http://schemas.microsoft.com/office/drawing/2014/main" id="{60635FF5-49DA-48F3-ACA9-2491271F8F4B}"/>
               </a:ext>
             </a:extLst>
           </p:cNvPr>
@@ -10553,7 +10702,7 @@
           <p:cNvPr id="11" name="">
             <a:extLst xmlns:a="http://schemas.openxmlformats.org/drawingml/2006/main">
               <a:ext uri="{FF2B5EF4-FFF2-40B4-BE49-F238E27FC236}">
-                <a16:creationId xmlns:a16="http://schemas.microsoft.com/office/drawing/2014/main" id="{B3D74E32-2AF2-410F-80AB-CEE12311A5A5}"/>
+                <a16:creationId xmlns:a16="http://schemas.microsoft.com/office/drawing/2014/main" id="{5439C463-16B6-45C2-A171-F5068A578C60}"/>
               </a:ext>
             </a:extLst>
           </p:cNvPr>
@@ -10619,7 +10768,7 @@
     </p:spTree>
     <p:extLst>
       <p:ext uri="{BB962C8B-B14F-4D97-AF65-F5344CB8AC3E}">
-        <p14:creationId xmlns:p14="http://schemas.microsoft.com/office/powerpoint/2010/main" val="1266982190"/>
+        <p14:creationId xmlns:p14="http://schemas.microsoft.com/office/powerpoint/2010/main" val="78555022"/>
       </p:ext>
     </p:extLst>
   </p:cSld>
@@ -10650,7 +10799,7 @@
           <p:cNvPr id="6" name="">
             <a:extLst xmlns:a="http://schemas.openxmlformats.org/drawingml/2006/main">
               <a:ext uri="{FF2B5EF4-FFF2-40B4-BE49-F238E27FC236}">
-                <a16:creationId xmlns:a16="http://schemas.microsoft.com/office/drawing/2014/main" id="{9FE036B5-654A-45F4-8D1C-6CFF87E4861E}"/>
+                <a16:creationId xmlns:a16="http://schemas.microsoft.com/office/drawing/2014/main" id="{BBEE2914-46C5-4D12-9F9E-3CBDB1E1439F}"/>
               </a:ext>
             </a:extLst>
           </p:cNvPr>
@@ -10681,7 +10830,7 @@
           <p:cNvPr id="9" name="">
             <a:extLst xmlns:a="http://schemas.openxmlformats.org/drawingml/2006/main">
               <a:ext uri="{FF2B5EF4-FFF2-40B4-BE49-F238E27FC236}">
-                <a16:creationId xmlns:a16="http://schemas.microsoft.com/office/drawing/2014/main" id="{7A20176B-4BEB-44C1-9B69-ECD70E4A8764}"/>
+                <a16:creationId xmlns:a16="http://schemas.microsoft.com/office/drawing/2014/main" id="{0B2F2979-E114-4437-820F-E1036D8B546A}"/>
               </a:ext>
             </a:extLst>
           </p:cNvPr>
@@ -10749,7 +10898,7 @@
           <p:cNvPr id="2" name="">
             <a:extLst xmlns:a="http://schemas.openxmlformats.org/drawingml/2006/main">
               <a:ext uri="{FF2B5EF4-FFF2-40B4-BE49-F238E27FC236}">
-                <a16:creationId xmlns:a16="http://schemas.microsoft.com/office/drawing/2014/main" id="{A210C4D7-F9F6-4A12-BF44-056147D85C07}"/>
+                <a16:creationId xmlns:a16="http://schemas.microsoft.com/office/drawing/2014/main" id="{69BDEAFD-B624-42D1-AC85-19B59BB0DC09}"/>
               </a:ext>
             </a:extLst>
           </p:cNvPr>
@@ -10817,7 +10966,7 @@
           <p:cNvPr id="3" name="">
             <a:extLst xmlns:a="http://schemas.openxmlformats.org/drawingml/2006/main">
               <a:ext uri="{FF2B5EF4-FFF2-40B4-BE49-F238E27FC236}">
-                <a16:creationId xmlns:a16="http://schemas.microsoft.com/office/drawing/2014/main" id="{7FE91ACF-C589-4892-929E-2D727FFD459C}"/>
+                <a16:creationId xmlns:a16="http://schemas.microsoft.com/office/drawing/2014/main" id="{E0C6FC66-AE18-41F6-8D8E-FEFC7D45FA70}"/>
               </a:ext>
             </a:extLst>
           </p:cNvPr>
@@ -10885,7 +11034,7 @@
           <p:cNvPr id="4" name="">
             <a:extLst xmlns:a="http://schemas.openxmlformats.org/drawingml/2006/main">
               <a:ext uri="{FF2B5EF4-FFF2-40B4-BE49-F238E27FC236}">
-                <a16:creationId xmlns:a16="http://schemas.microsoft.com/office/drawing/2014/main" id="{DB7CF836-AB60-4229-B45D-29365F442621}"/>
+                <a16:creationId xmlns:a16="http://schemas.microsoft.com/office/drawing/2014/main" id="{69F8378A-F5FE-4901-A82C-76A4C456D584}"/>
               </a:ext>
             </a:extLst>
           </p:cNvPr>
@@ -10980,7 +11129,7 @@
           <p:cNvPr id="5" name="">
             <a:extLst xmlns:a="http://schemas.openxmlformats.org/drawingml/2006/main">
               <a:ext uri="{FF2B5EF4-FFF2-40B4-BE49-F238E27FC236}">
-                <a16:creationId xmlns:a16="http://schemas.microsoft.com/office/drawing/2014/main" id="{1D8FD152-9C65-4DAA-A1F4-1EBA955FCA21}"/>
+                <a16:creationId xmlns:a16="http://schemas.microsoft.com/office/drawing/2014/main" id="{5725D469-D76C-4577-8AF2-F865D7840F1D}"/>
               </a:ext>
             </a:extLst>
           </p:cNvPr>
@@ -11075,7 +11224,7 @@
           <p:cNvPr id="7" name="">
             <a:extLst xmlns:a="http://schemas.openxmlformats.org/drawingml/2006/main">
               <a:ext uri="{FF2B5EF4-FFF2-40B4-BE49-F238E27FC236}">
-                <a16:creationId xmlns:a16="http://schemas.microsoft.com/office/drawing/2014/main" id="{06EFFDCC-F70C-4DDC-89EE-FCFAFECADF1D}"/>
+                <a16:creationId xmlns:a16="http://schemas.microsoft.com/office/drawing/2014/main" id="{A6C17DBF-F7D0-4D04-BB49-70C97255FC70}"/>
               </a:ext>
             </a:extLst>
           </p:cNvPr>
@@ -11143,7 +11292,7 @@
           <p:cNvPr id="8" name="">
             <a:extLst xmlns:a="http://schemas.openxmlformats.org/drawingml/2006/main">
               <a:ext uri="{FF2B5EF4-FFF2-40B4-BE49-F238E27FC236}">
-                <a16:creationId xmlns:a16="http://schemas.microsoft.com/office/drawing/2014/main" id="{7BA543F2-FD34-493E-BBA5-CACC11FD3CD9}"/>
+                <a16:creationId xmlns:a16="http://schemas.microsoft.com/office/drawing/2014/main" id="{D360DB0A-4B86-4009-A3B9-518457A93DE4}"/>
               </a:ext>
             </a:extLst>
           </p:cNvPr>
@@ -11209,7 +11358,7 @@
     </p:spTree>
     <p:extLst>
       <p:ext uri="{BB962C8B-B14F-4D97-AF65-F5344CB8AC3E}">
-        <p14:creationId xmlns:p14="http://schemas.microsoft.com/office/powerpoint/2010/main" val="245964422"/>
+        <p14:creationId xmlns:p14="http://schemas.microsoft.com/office/powerpoint/2010/main" val="1346025191"/>
       </p:ext>
     </p:extLst>
   </p:cSld>
@@ -11240,7 +11389,7 @@
           <p:cNvPr id="7" name="">
             <a:extLst xmlns:a="http://schemas.openxmlformats.org/drawingml/2006/main">
               <a:ext uri="{FF2B5EF4-FFF2-40B4-BE49-F238E27FC236}">
-                <a16:creationId xmlns:a16="http://schemas.microsoft.com/office/drawing/2014/main" id="{B9222B08-D497-46E1-BF2F-D0F6B9633B5E}"/>
+                <a16:creationId xmlns:a16="http://schemas.microsoft.com/office/drawing/2014/main" id="{0B5BEEA8-7451-4D1B-A925-ED55E9C01ADC}"/>
               </a:ext>
             </a:extLst>
           </p:cNvPr>
@@ -11308,7 +11457,7 @@
           <p:cNvPr id="2" name="">
             <a:extLst xmlns:a="http://schemas.openxmlformats.org/drawingml/2006/main">
               <a:ext uri="{FF2B5EF4-FFF2-40B4-BE49-F238E27FC236}">
-                <a16:creationId xmlns:a16="http://schemas.microsoft.com/office/drawing/2014/main" id="{8E729639-CAD3-4CE0-94DD-444A390710FA}"/>
+                <a16:creationId xmlns:a16="http://schemas.microsoft.com/office/drawing/2014/main" id="{32228FB2-C6A6-46FA-883E-4759891F5E73}"/>
               </a:ext>
             </a:extLst>
           </p:cNvPr>
@@ -11376,7 +11525,7 @@
           <p:cNvPr id="3" name="">
             <a:extLst xmlns:a="http://schemas.openxmlformats.org/drawingml/2006/main">
               <a:ext uri="{FF2B5EF4-FFF2-40B4-BE49-F238E27FC236}">
-                <a16:creationId xmlns:a16="http://schemas.microsoft.com/office/drawing/2014/main" id="{C6F319F9-C0AA-43B4-B9D2-23F55D449886}"/>
+                <a16:creationId xmlns:a16="http://schemas.microsoft.com/office/drawing/2014/main" id="{A10A9430-C13F-469F-A6EB-AD8623D94469}"/>
               </a:ext>
             </a:extLst>
           </p:cNvPr>
@@ -11444,7 +11593,7 @@
           <p:cNvPr id="4" name="">
             <a:extLst xmlns:a="http://schemas.openxmlformats.org/drawingml/2006/main">
               <a:ext uri="{FF2B5EF4-FFF2-40B4-BE49-F238E27FC236}">
-                <a16:creationId xmlns:a16="http://schemas.microsoft.com/office/drawing/2014/main" id="{AB349F77-CE2D-48AF-BD12-9FDC1F17E34B}"/>
+                <a16:creationId xmlns:a16="http://schemas.microsoft.com/office/drawing/2014/main" id="{D14AB271-E0CE-4E69-8A28-0A1EFE73A58C}"/>
               </a:ext>
             </a:extLst>
           </p:cNvPr>
@@ -11955,7 +12104,7 @@
           <p:cNvPr id="5" name="">
             <a:extLst xmlns:a="http://schemas.openxmlformats.org/drawingml/2006/main">
               <a:ext uri="{FF2B5EF4-FFF2-40B4-BE49-F238E27FC236}">
-                <a16:creationId xmlns:a16="http://schemas.microsoft.com/office/drawing/2014/main" id="{A5AF40A9-EA78-41FA-BD92-A26BECE629E9}"/>
+                <a16:creationId xmlns:a16="http://schemas.microsoft.com/office/drawing/2014/main" id="{616B8A10-D0BF-4FB1-9E06-1B4CAC417A6B}"/>
               </a:ext>
             </a:extLst>
           </p:cNvPr>
@@ -12023,7 +12172,7 @@
           <p:cNvPr id="6" name="">
             <a:extLst xmlns:a="http://schemas.openxmlformats.org/drawingml/2006/main">
               <a:ext uri="{FF2B5EF4-FFF2-40B4-BE49-F238E27FC236}">
-                <a16:creationId xmlns:a16="http://schemas.microsoft.com/office/drawing/2014/main" id="{F50B1252-CC05-4D8B-AFBF-67DFFCAC53A8}"/>
+                <a16:creationId xmlns:a16="http://schemas.microsoft.com/office/drawing/2014/main" id="{E710A624-DA3B-48DF-B99B-BE3D6162D980}"/>
               </a:ext>
             </a:extLst>
           </p:cNvPr>
@@ -12089,7 +12238,7 @@
     </p:spTree>
     <p:extLst>
       <p:ext uri="{BB962C8B-B14F-4D97-AF65-F5344CB8AC3E}">
-        <p14:creationId xmlns:p14="http://schemas.microsoft.com/office/powerpoint/2010/main" val="1461155363"/>
+        <p14:creationId xmlns:p14="http://schemas.microsoft.com/office/powerpoint/2010/main" val="475178385"/>
       </p:ext>
     </p:extLst>
   </p:cSld>
@@ -12120,7 +12269,7 @@
           <p:cNvPr id="8" name="">
             <a:extLst xmlns:a="http://schemas.openxmlformats.org/drawingml/2006/main">
               <a:ext uri="{FF2B5EF4-FFF2-40B4-BE49-F238E27FC236}">
-                <a16:creationId xmlns:a16="http://schemas.microsoft.com/office/drawing/2014/main" id="{34BF63F1-117C-47EA-B702-4FF94AA6A23E}"/>
+                <a16:creationId xmlns:a16="http://schemas.microsoft.com/office/drawing/2014/main" id="{A7FE2CCB-2DD0-4156-902D-8407945B63E1}"/>
               </a:ext>
             </a:extLst>
           </p:cNvPr>
@@ -12188,7 +12337,7 @@
           <p:cNvPr id="2" name="">
             <a:extLst xmlns:a="http://schemas.openxmlformats.org/drawingml/2006/main">
               <a:ext uri="{FF2B5EF4-FFF2-40B4-BE49-F238E27FC236}">
-                <a16:creationId xmlns:a16="http://schemas.microsoft.com/office/drawing/2014/main" id="{2D42AC2D-B4A5-4590-A849-8E64C558D1BC}"/>
+                <a16:creationId xmlns:a16="http://schemas.microsoft.com/office/drawing/2014/main" id="{C5DA401C-F82B-481E-9434-09E924490975}"/>
               </a:ext>
             </a:extLst>
           </p:cNvPr>
@@ -12256,7 +12405,7 @@
           <p:cNvPr id="3" name="">
             <a:extLst xmlns:a="http://schemas.openxmlformats.org/drawingml/2006/main">
               <a:ext uri="{FF2B5EF4-FFF2-40B4-BE49-F238E27FC236}">
-                <a16:creationId xmlns:a16="http://schemas.microsoft.com/office/drawing/2014/main" id="{003A1128-7218-4879-BD34-4261A1351BAC}"/>
+                <a16:creationId xmlns:a16="http://schemas.microsoft.com/office/drawing/2014/main" id="{A1582109-68D2-4D70-82DE-846D7E979516}"/>
               </a:ext>
             </a:extLst>
           </p:cNvPr>
@@ -12324,7 +12473,7 @@
           <p:cNvPr id="4" name="">
             <a:extLst xmlns:a="http://schemas.openxmlformats.org/drawingml/2006/main">
               <a:ext uri="{FF2B5EF4-FFF2-40B4-BE49-F238E27FC236}">
-                <a16:creationId xmlns:a16="http://schemas.microsoft.com/office/drawing/2014/main" id="{83B84620-A4AF-4531-AABD-28FAE7162ADC}"/>
+                <a16:creationId xmlns:a16="http://schemas.microsoft.com/office/drawing/2014/main" id="{D52DB6DC-660B-4364-8D57-99BB93FB720A}"/>
               </a:ext>
             </a:extLst>
           </p:cNvPr>
@@ -12392,7 +12541,7 @@
           <p:cNvPr id="5" name="">
             <a:extLst xmlns:a="http://schemas.openxmlformats.org/drawingml/2006/main">
               <a:ext uri="{FF2B5EF4-FFF2-40B4-BE49-F238E27FC236}">
-                <a16:creationId xmlns:a16="http://schemas.microsoft.com/office/drawing/2014/main" id="{416CC7BD-986E-4D73-8A34-F80E691540E5}"/>
+                <a16:creationId xmlns:a16="http://schemas.microsoft.com/office/drawing/2014/main" id="{D9861210-4931-46D2-8DF4-7EA5579673AF}"/>
               </a:ext>
             </a:extLst>
           </p:cNvPr>
@@ -12460,7 +12609,7 @@
           <p:cNvPr id="6" name="">
             <a:extLst xmlns:a="http://schemas.openxmlformats.org/drawingml/2006/main">
               <a:ext uri="{FF2B5EF4-FFF2-40B4-BE49-F238E27FC236}">
-                <a16:creationId xmlns:a16="http://schemas.microsoft.com/office/drawing/2014/main" id="{B6500DF9-C446-4B1E-BD8F-447FAFAE9305}"/>
+                <a16:creationId xmlns:a16="http://schemas.microsoft.com/office/drawing/2014/main" id="{071CC898-764C-4A61-B49D-7C27299E6D52}"/>
               </a:ext>
             </a:extLst>
           </p:cNvPr>
@@ -12551,7 +12700,7 @@
           <p:cNvPr id="7" name="">
             <a:extLst xmlns:a="http://schemas.openxmlformats.org/drawingml/2006/main">
               <a:ext uri="{FF2B5EF4-FFF2-40B4-BE49-F238E27FC236}">
-                <a16:creationId xmlns:a16="http://schemas.microsoft.com/office/drawing/2014/main" id="{14270B4B-8EE9-4083-8335-153E26CCF38A}"/>
+                <a16:creationId xmlns:a16="http://schemas.microsoft.com/office/drawing/2014/main" id="{37D898D1-6101-41A3-84FC-6A46184BBA6E}"/>
               </a:ext>
             </a:extLst>
           </p:cNvPr>
@@ -12617,7 +12766,7 @@
     </p:spTree>
     <p:extLst>
       <p:ext uri="{BB962C8B-B14F-4D97-AF65-F5344CB8AC3E}">
-        <p14:creationId xmlns:p14="http://schemas.microsoft.com/office/powerpoint/2010/main" val="515608461"/>
+        <p14:creationId xmlns:p14="http://schemas.microsoft.com/office/powerpoint/2010/main" val="1038374626"/>
       </p:ext>
     </p:extLst>
   </p:cSld>
@@ -12648,7 +12797,7 @@
           <p:cNvPr id="7" name="">
             <a:extLst xmlns:a="http://schemas.openxmlformats.org/drawingml/2006/main">
               <a:ext uri="{FF2B5EF4-FFF2-40B4-BE49-F238E27FC236}">
-                <a16:creationId xmlns:a16="http://schemas.microsoft.com/office/drawing/2014/main" id="{3BBF407F-D380-425E-9C3D-11CE17738C3F}"/>
+                <a16:creationId xmlns:a16="http://schemas.microsoft.com/office/drawing/2014/main" id="{2D9E754D-A276-462C-AC71-7D73363C32DA}"/>
               </a:ext>
             </a:extLst>
           </p:cNvPr>
@@ -12716,7 +12865,7 @@
           <p:cNvPr id="2" name="">
             <a:extLst xmlns:a="http://schemas.openxmlformats.org/drawingml/2006/main">
               <a:ext uri="{FF2B5EF4-FFF2-40B4-BE49-F238E27FC236}">
-                <a16:creationId xmlns:a16="http://schemas.microsoft.com/office/drawing/2014/main" id="{54602C69-E715-4AB9-9604-748772A83C60}"/>
+                <a16:creationId xmlns:a16="http://schemas.microsoft.com/office/drawing/2014/main" id="{C0B059C7-D000-4AEA-967D-FEEAB6ED9A7A}"/>
               </a:ext>
             </a:extLst>
           </p:cNvPr>
@@ -12784,7 +12933,7 @@
           <p:cNvPr id="3" name="">
             <a:extLst xmlns:a="http://schemas.openxmlformats.org/drawingml/2006/main">
               <a:ext uri="{FF2B5EF4-FFF2-40B4-BE49-F238E27FC236}">
-                <a16:creationId xmlns:a16="http://schemas.microsoft.com/office/drawing/2014/main" id="{5FE2E3C6-8BD8-47ED-894B-5A8F5713801E}"/>
+                <a16:creationId xmlns:a16="http://schemas.microsoft.com/office/drawing/2014/main" id="{FC643C8F-711C-42F4-96B5-A46B89E4EF8F}"/>
               </a:ext>
             </a:extLst>
           </p:cNvPr>
@@ -12852,7 +13001,7 @@
           <p:cNvPr id="4" name="">
             <a:extLst xmlns:a="http://schemas.openxmlformats.org/drawingml/2006/main">
               <a:ext uri="{FF2B5EF4-FFF2-40B4-BE49-F238E27FC236}">
-                <a16:creationId xmlns:a16="http://schemas.microsoft.com/office/drawing/2014/main" id="{5F1A5A30-ACAD-42C0-871B-39F1BBD7B9C0}"/>
+                <a16:creationId xmlns:a16="http://schemas.microsoft.com/office/drawing/2014/main" id="{D4728313-5639-4813-8B16-5C0E577F0FE2}"/>
               </a:ext>
             </a:extLst>
           </p:cNvPr>
@@ -12920,7 +13069,7 @@
           <p:cNvPr id="5" name="">
             <a:extLst xmlns:a="http://schemas.openxmlformats.org/drawingml/2006/main">
               <a:ext uri="{FF2B5EF4-FFF2-40B4-BE49-F238E27FC236}">
-                <a16:creationId xmlns:a16="http://schemas.microsoft.com/office/drawing/2014/main" id="{CDE3E2B7-C2C4-47E4-A039-15051CEF475F}"/>
+                <a16:creationId xmlns:a16="http://schemas.microsoft.com/office/drawing/2014/main" id="{E9986DA9-51A7-4B46-962E-A072BCE29220}"/>
               </a:ext>
             </a:extLst>
           </p:cNvPr>
@@ -12978,7 +13127,7 @@
                 <a:ea typeface="Arial"/>
                 <a:cs typeface="Arial"/>
               </a:rPr>
-              <a:t>3. G–H: incompatible upgrade and live drift</a:t>
+              <a:t>3. G–I: incompatibility, drift and forward repair</a:t>
             </a:r>
           </a:p>
         </p:txBody>
@@ -12988,7 +13137,7 @@
           <p:cNvPr id="6" name="">
             <a:extLst xmlns:a="http://schemas.openxmlformats.org/drawingml/2006/main">
               <a:ext uri="{FF2B5EF4-FFF2-40B4-BE49-F238E27FC236}">
-                <a16:creationId xmlns:a16="http://schemas.microsoft.com/office/drawing/2014/main" id="{50E7AEBA-2BC8-4850-A331-BFDB8550F54E}"/>
+                <a16:creationId xmlns:a16="http://schemas.microsoft.com/office/drawing/2014/main" id="{F074D7F1-6F15-43DB-A7BA-ECF921668DD3}"/>
               </a:ext>
             </a:extLst>
           </p:cNvPr>
@@ -13054,7 +13203,7 @@
     </p:spTree>
     <p:extLst>
       <p:ext uri="{BB962C8B-B14F-4D97-AF65-F5344CB8AC3E}">
-        <p14:creationId xmlns:p14="http://schemas.microsoft.com/office/powerpoint/2010/main" val="2060729499"/>
+        <p14:creationId xmlns:p14="http://schemas.microsoft.com/office/powerpoint/2010/main" val="2139689001"/>
       </p:ext>
     </p:extLst>
   </p:cSld>
@@ -13085,7 +13234,7 @@
           <p:cNvPr id="8" name="">
             <a:extLst xmlns:a="http://schemas.openxmlformats.org/drawingml/2006/main">
               <a:ext uri="{FF2B5EF4-FFF2-40B4-BE49-F238E27FC236}">
-                <a16:creationId xmlns:a16="http://schemas.microsoft.com/office/drawing/2014/main" id="{6476C9DE-D1AB-4677-B6DB-31B1501D4050}"/>
+                <a16:creationId xmlns:a16="http://schemas.microsoft.com/office/drawing/2014/main" id="{C0893C32-F02C-4A52-957A-BCE39B92A83A}"/>
               </a:ext>
             </a:extLst>
           </p:cNvPr>
@@ -13153,7 +13302,7 @@
           <p:cNvPr id="2" name="">
             <a:extLst xmlns:a="http://schemas.openxmlformats.org/drawingml/2006/main">
               <a:ext uri="{FF2B5EF4-FFF2-40B4-BE49-F238E27FC236}">
-                <a16:creationId xmlns:a16="http://schemas.microsoft.com/office/drawing/2014/main" id="{8C144181-2ED7-40FA-8910-50738F1FC478}"/>
+                <a16:creationId xmlns:a16="http://schemas.microsoft.com/office/drawing/2014/main" id="{4E227810-0894-4DAC-B714-95B56EC1A729}"/>
               </a:ext>
             </a:extLst>
           </p:cNvPr>
@@ -13221,7 +13370,7 @@
           <p:cNvPr id="3" name="">
             <a:extLst xmlns:a="http://schemas.openxmlformats.org/drawingml/2006/main">
               <a:ext uri="{FF2B5EF4-FFF2-40B4-BE49-F238E27FC236}">
-                <a16:creationId xmlns:a16="http://schemas.microsoft.com/office/drawing/2014/main" id="{1903CE3A-FF68-4A49-B984-842EE11264DC}"/>
+                <a16:creationId xmlns:a16="http://schemas.microsoft.com/office/drawing/2014/main" id="{256988ED-92F4-4AD8-8FFA-7DA31DA2250F}"/>
               </a:ext>
             </a:extLst>
           </p:cNvPr>
@@ -13289,7 +13438,7 @@
           <p:cNvPr id="4" name="">
             <a:extLst xmlns:a="http://schemas.openxmlformats.org/drawingml/2006/main">
               <a:ext uri="{FF2B5EF4-FFF2-40B4-BE49-F238E27FC236}">
-                <a16:creationId xmlns:a16="http://schemas.microsoft.com/office/drawing/2014/main" id="{9A502099-450B-4CFE-A52E-593F7EF5F696}"/>
+                <a16:creationId xmlns:a16="http://schemas.microsoft.com/office/drawing/2014/main" id="{FC06A22D-0DF7-4C19-8157-4A722E9B5D8B}"/>
               </a:ext>
             </a:extLst>
           </p:cNvPr>
@@ -13357,7 +13506,7 @@
           <p:cNvPr id="5" name="">
             <a:extLst xmlns:a="http://schemas.openxmlformats.org/drawingml/2006/main">
               <a:ext uri="{FF2B5EF4-FFF2-40B4-BE49-F238E27FC236}">
-                <a16:creationId xmlns:a16="http://schemas.microsoft.com/office/drawing/2014/main" id="{CE589824-74F3-483B-87E6-84653EB17B55}"/>
+                <a16:creationId xmlns:a16="http://schemas.microsoft.com/office/drawing/2014/main" id="{43CBAA71-3A5E-4333-B64A-E4EA7E1B665C}"/>
               </a:ext>
             </a:extLst>
           </p:cNvPr>
@@ -13425,7 +13574,7 @@
           <p:cNvPr id="6" name="">
             <a:extLst xmlns:a="http://schemas.openxmlformats.org/drawingml/2006/main">
               <a:ext uri="{FF2B5EF4-FFF2-40B4-BE49-F238E27FC236}">
-                <a16:creationId xmlns:a16="http://schemas.microsoft.com/office/drawing/2014/main" id="{10002F2E-45B0-4487-80F2-4D1D44155432}"/>
+                <a16:creationId xmlns:a16="http://schemas.microsoft.com/office/drawing/2014/main" id="{7A4E7FDB-0C02-47B3-AC9A-4B823128928A}"/>
               </a:ext>
             </a:extLst>
           </p:cNvPr>
@@ -13493,7 +13642,7 @@
           <p:cNvPr id="7" name="">
             <a:extLst xmlns:a="http://schemas.openxmlformats.org/drawingml/2006/main">
               <a:ext uri="{FF2B5EF4-FFF2-40B4-BE49-F238E27FC236}">
-                <a16:creationId xmlns:a16="http://schemas.microsoft.com/office/drawing/2014/main" id="{AB32C8D7-78D1-41B9-A458-5F36F434687A}"/>
+                <a16:creationId xmlns:a16="http://schemas.microsoft.com/office/drawing/2014/main" id="{D82FFE16-1B9B-4B61-9325-10A11622ECCB}"/>
               </a:ext>
             </a:extLst>
           </p:cNvPr>
@@ -13559,7 +13708,7 @@
     </p:spTree>
     <p:extLst>
       <p:ext uri="{BB962C8B-B14F-4D97-AF65-F5344CB8AC3E}">
-        <p14:creationId xmlns:p14="http://schemas.microsoft.com/office/powerpoint/2010/main" val="82923162"/>
+        <p14:creationId xmlns:p14="http://schemas.microsoft.com/office/powerpoint/2010/main" val="1326243292"/>
       </p:ext>
     </p:extLst>
   </p:cSld>
@@ -13590,7 +13739,7 @@
           <p:cNvPr id="9" name="">
             <a:extLst xmlns:a="http://schemas.openxmlformats.org/drawingml/2006/main">
               <a:ext uri="{FF2B5EF4-FFF2-40B4-BE49-F238E27FC236}">
-                <a16:creationId xmlns:a16="http://schemas.microsoft.com/office/drawing/2014/main" id="{33A46286-461D-47E2-99F3-F6BC6E4B51CB}"/>
+                <a16:creationId xmlns:a16="http://schemas.microsoft.com/office/drawing/2014/main" id="{1B5556CF-3D67-4B64-85B3-3EAF94685119}"/>
               </a:ext>
             </a:extLst>
           </p:cNvPr>
@@ -13658,7 +13807,7 @@
           <p:cNvPr id="2" name="">
             <a:extLst xmlns:a="http://schemas.openxmlformats.org/drawingml/2006/main">
               <a:ext uri="{FF2B5EF4-FFF2-40B4-BE49-F238E27FC236}">
-                <a16:creationId xmlns:a16="http://schemas.microsoft.com/office/drawing/2014/main" id="{E2334B7A-B933-44C4-9488-332A2A7009A6}"/>
+                <a16:creationId xmlns:a16="http://schemas.microsoft.com/office/drawing/2014/main" id="{A27F6D63-6151-442A-B78A-DD654C4E651B}"/>
               </a:ext>
             </a:extLst>
           </p:cNvPr>
@@ -13726,7 +13875,7 @@
           <p:cNvPr id="3" name="">
             <a:extLst xmlns:a="http://schemas.openxmlformats.org/drawingml/2006/main">
               <a:ext uri="{FF2B5EF4-FFF2-40B4-BE49-F238E27FC236}">
-                <a16:creationId xmlns:a16="http://schemas.microsoft.com/office/drawing/2014/main" id="{F4676A6A-674A-4EA6-A15C-C6A8322F563F}"/>
+                <a16:creationId xmlns:a16="http://schemas.microsoft.com/office/drawing/2014/main" id="{DF8FE42E-ACD7-4156-9B26-3B3D410B8D79}"/>
               </a:ext>
             </a:extLst>
           </p:cNvPr>
@@ -13794,7 +13943,7 @@
           <p:cNvPr id="4" name="">
             <a:extLst xmlns:a="http://schemas.openxmlformats.org/drawingml/2006/main">
               <a:ext uri="{FF2B5EF4-FFF2-40B4-BE49-F238E27FC236}">
-                <a16:creationId xmlns:a16="http://schemas.microsoft.com/office/drawing/2014/main" id="{279AF568-BC18-4FDF-9D19-8510F6DBC963}"/>
+                <a16:creationId xmlns:a16="http://schemas.microsoft.com/office/drawing/2014/main" id="{98FDAD09-1A8B-4DA1-AAAB-FC0B443F8B08}"/>
               </a:ext>
             </a:extLst>
           </p:cNvPr>
@@ -13862,7 +14011,7 @@
           <p:cNvPr id="5" name="">
             <a:extLst xmlns:a="http://schemas.openxmlformats.org/drawingml/2006/main">
               <a:ext uri="{FF2B5EF4-FFF2-40B4-BE49-F238E27FC236}">
-                <a16:creationId xmlns:a16="http://schemas.microsoft.com/office/drawing/2014/main" id="{B60298AD-9CD9-42F0-93E7-5ADB4F74D47A}"/>
+                <a16:creationId xmlns:a16="http://schemas.microsoft.com/office/drawing/2014/main" id="{E444FD9B-7013-4FEC-A224-E4C694FC5479}"/>
               </a:ext>
             </a:extLst>
           </p:cNvPr>
@@ -13930,7 +14079,7 @@
           <p:cNvPr id="6" name="">
             <a:extLst xmlns:a="http://schemas.openxmlformats.org/drawingml/2006/main">
               <a:ext uri="{FF2B5EF4-FFF2-40B4-BE49-F238E27FC236}">
-                <a16:creationId xmlns:a16="http://schemas.microsoft.com/office/drawing/2014/main" id="{2074CD13-ED62-4B01-A7C0-96B36ACBE936}"/>
+                <a16:creationId xmlns:a16="http://schemas.microsoft.com/office/drawing/2014/main" id="{C0A29541-9697-4CF1-80ED-7072170FB15F}"/>
               </a:ext>
             </a:extLst>
           </p:cNvPr>
@@ -14072,7 +14221,7 @@
           <p:cNvPr id="7" name="">
             <a:extLst xmlns:a="http://schemas.openxmlformats.org/drawingml/2006/main">
               <a:ext uri="{FF2B5EF4-FFF2-40B4-BE49-F238E27FC236}">
-                <a16:creationId xmlns:a16="http://schemas.microsoft.com/office/drawing/2014/main" id="{31DF337C-C955-4A78-952A-E0002060D1E9}"/>
+                <a16:creationId xmlns:a16="http://schemas.microsoft.com/office/drawing/2014/main" id="{846187B6-31E4-44F9-A0D3-35ECCE40EF49}"/>
               </a:ext>
             </a:extLst>
           </p:cNvPr>
@@ -14214,7 +14363,7 @@
           <p:cNvPr id="8" name="">
             <a:extLst xmlns:a="http://schemas.openxmlformats.org/drawingml/2006/main">
               <a:ext uri="{FF2B5EF4-FFF2-40B4-BE49-F238E27FC236}">
-                <a16:creationId xmlns:a16="http://schemas.microsoft.com/office/drawing/2014/main" id="{42FBFCB9-FA1D-4117-84BA-76AE7919931E}"/>
+                <a16:creationId xmlns:a16="http://schemas.microsoft.com/office/drawing/2014/main" id="{10B5AA50-650D-46A4-A3B9-16492C03BBED}"/>
               </a:ext>
             </a:extLst>
           </p:cNvPr>
@@ -14280,7 +14429,7 @@
     </p:spTree>
     <p:extLst>
       <p:ext uri="{BB962C8B-B14F-4D97-AF65-F5344CB8AC3E}">
-        <p14:creationId xmlns:p14="http://schemas.microsoft.com/office/powerpoint/2010/main" val="1969795549"/>
+        <p14:creationId xmlns:p14="http://schemas.microsoft.com/office/powerpoint/2010/main" val="1408950849"/>
       </p:ext>
     </p:extLst>
   </p:cSld>
@@ -14311,7 +14460,7 @@
           <p:cNvPr id="8" name="">
             <a:extLst xmlns:a="http://schemas.openxmlformats.org/drawingml/2006/main">
               <a:ext uri="{FF2B5EF4-FFF2-40B4-BE49-F238E27FC236}">
-                <a16:creationId xmlns:a16="http://schemas.microsoft.com/office/drawing/2014/main" id="{AA06F6C1-9A97-426E-B1FC-A5B4608B1E0C}"/>
+                <a16:creationId xmlns:a16="http://schemas.microsoft.com/office/drawing/2014/main" id="{23D3F80F-9697-4470-85CD-A5DC1DDF6648}"/>
               </a:ext>
             </a:extLst>
           </p:cNvPr>
@@ -14379,7 +14528,7 @@
           <p:cNvPr id="2" name="">
             <a:extLst xmlns:a="http://schemas.openxmlformats.org/drawingml/2006/main">
               <a:ext uri="{FF2B5EF4-FFF2-40B4-BE49-F238E27FC236}">
-                <a16:creationId xmlns:a16="http://schemas.microsoft.com/office/drawing/2014/main" id="{0E40B26E-29A3-4D10-B290-4491C4576A2E}"/>
+                <a16:creationId xmlns:a16="http://schemas.microsoft.com/office/drawing/2014/main" id="{3436C3D1-96FE-45F7-A15C-2ABBF9F963D2}"/>
               </a:ext>
             </a:extLst>
           </p:cNvPr>
@@ -14447,7 +14596,7 @@
           <p:cNvPr id="3" name="">
             <a:extLst xmlns:a="http://schemas.openxmlformats.org/drawingml/2006/main">
               <a:ext uri="{FF2B5EF4-FFF2-40B4-BE49-F238E27FC236}">
-                <a16:creationId xmlns:a16="http://schemas.microsoft.com/office/drawing/2014/main" id="{FEA3239E-5900-4428-89F8-4C712125BDE5}"/>
+                <a16:creationId xmlns:a16="http://schemas.microsoft.com/office/drawing/2014/main" id="{4200E263-0944-4A89-A1DE-7FAB095E85E9}"/>
               </a:ext>
             </a:extLst>
           </p:cNvPr>
@@ -14515,7 +14664,7 @@
           <p:cNvPr id="4" name="">
             <a:extLst xmlns:a="http://schemas.openxmlformats.org/drawingml/2006/main">
               <a:ext uri="{FF2B5EF4-FFF2-40B4-BE49-F238E27FC236}">
-                <a16:creationId xmlns:a16="http://schemas.microsoft.com/office/drawing/2014/main" id="{6CFCA252-9EB3-4B10-BCAF-9754B6451DBF}"/>
+                <a16:creationId xmlns:a16="http://schemas.microsoft.com/office/drawing/2014/main" id="{0DFADC5E-C8D6-4DAA-B0D9-09BE0F1944F0}"/>
               </a:ext>
             </a:extLst>
           </p:cNvPr>
@@ -14583,7 +14732,7 @@
           <p:cNvPr id="5" name="">
             <a:extLst xmlns:a="http://schemas.openxmlformats.org/drawingml/2006/main">
               <a:ext uri="{FF2B5EF4-FFF2-40B4-BE49-F238E27FC236}">
-                <a16:creationId xmlns:a16="http://schemas.microsoft.com/office/drawing/2014/main" id="{71EFCBA4-C527-4203-889E-896CA46008B5}"/>
+                <a16:creationId xmlns:a16="http://schemas.microsoft.com/office/drawing/2014/main" id="{2DEF86F1-F53A-4EEE-8F05-111CD5F9DB2E}"/>
               </a:ext>
             </a:extLst>
           </p:cNvPr>
@@ -14651,7 +14800,7 @@
           <p:cNvPr id="6" name="">
             <a:extLst xmlns:a="http://schemas.openxmlformats.org/drawingml/2006/main">
               <a:ext uri="{FF2B5EF4-FFF2-40B4-BE49-F238E27FC236}">
-                <a16:creationId xmlns:a16="http://schemas.microsoft.com/office/drawing/2014/main" id="{EFB4A69F-3022-4A26-9AB9-3C1454D2C071}"/>
+                <a16:creationId xmlns:a16="http://schemas.microsoft.com/office/drawing/2014/main" id="{109B736E-AB6A-4EB4-8E35-77D739D22650}"/>
               </a:ext>
             </a:extLst>
           </p:cNvPr>
@@ -14719,7 +14868,7 @@
           <p:cNvPr id="7" name="">
             <a:extLst xmlns:a="http://schemas.openxmlformats.org/drawingml/2006/main">
               <a:ext uri="{FF2B5EF4-FFF2-40B4-BE49-F238E27FC236}">
-                <a16:creationId xmlns:a16="http://schemas.microsoft.com/office/drawing/2014/main" id="{40E26C8F-900E-491C-86F9-EE11FDD39675}"/>
+                <a16:creationId xmlns:a16="http://schemas.microsoft.com/office/drawing/2014/main" id="{863BFCA8-96BD-49EE-B4C8-E628842FE063}"/>
               </a:ext>
             </a:extLst>
           </p:cNvPr>
@@ -14785,7 +14934,7 @@
     </p:spTree>
     <p:extLst>
       <p:ext uri="{BB962C8B-B14F-4D97-AF65-F5344CB8AC3E}">
-        <p14:creationId xmlns:p14="http://schemas.microsoft.com/office/powerpoint/2010/main" val="164395760"/>
+        <p14:creationId xmlns:p14="http://schemas.microsoft.com/office/powerpoint/2010/main" val="1715544052"/>
       </p:ext>
     </p:extLst>
   </p:cSld>
@@ -14816,7 +14965,7 @@
           <p:cNvPr id="8" name="">
             <a:extLst xmlns:a="http://schemas.openxmlformats.org/drawingml/2006/main">
               <a:ext uri="{FF2B5EF4-FFF2-40B4-BE49-F238E27FC236}">
-                <a16:creationId xmlns:a16="http://schemas.microsoft.com/office/drawing/2014/main" id="{A20B1117-8B25-4844-9A8D-AF4CA7A463BD}"/>
+                <a16:creationId xmlns:a16="http://schemas.microsoft.com/office/drawing/2014/main" id="{1FC1D074-F3CD-4A51-A7F4-B19B093671ED}"/>
               </a:ext>
             </a:extLst>
           </p:cNvPr>
@@ -14884,7 +15033,7 @@
           <p:cNvPr id="2" name="">
             <a:extLst xmlns:a="http://schemas.openxmlformats.org/drawingml/2006/main">
               <a:ext uri="{FF2B5EF4-FFF2-40B4-BE49-F238E27FC236}">
-                <a16:creationId xmlns:a16="http://schemas.microsoft.com/office/drawing/2014/main" id="{C6317540-0C89-420C-9AE9-6A8E777E1355}"/>
+                <a16:creationId xmlns:a16="http://schemas.microsoft.com/office/drawing/2014/main" id="{383E6EB6-F0F1-4142-85F3-97DFE089B61B}"/>
               </a:ext>
             </a:extLst>
           </p:cNvPr>
@@ -14952,7 +15101,7 @@
           <p:cNvPr id="3" name="">
             <a:extLst xmlns:a="http://schemas.openxmlformats.org/drawingml/2006/main">
               <a:ext uri="{FF2B5EF4-FFF2-40B4-BE49-F238E27FC236}">
-                <a16:creationId xmlns:a16="http://schemas.microsoft.com/office/drawing/2014/main" id="{1DBF5845-BBD6-473F-A447-DA706B089FFC}"/>
+                <a16:creationId xmlns:a16="http://schemas.microsoft.com/office/drawing/2014/main" id="{A7E8E325-572B-49F2-A707-C07E030FAF55}"/>
               </a:ext>
             </a:extLst>
           </p:cNvPr>
@@ -15020,7 +15169,7 @@
           <p:cNvPr id="4" name="">
             <a:extLst xmlns:a="http://schemas.openxmlformats.org/drawingml/2006/main">
               <a:ext uri="{FF2B5EF4-FFF2-40B4-BE49-F238E27FC236}">
-                <a16:creationId xmlns:a16="http://schemas.microsoft.com/office/drawing/2014/main" id="{3D5AC690-53F8-4043-BDC0-AC08A6D325C4}"/>
+                <a16:creationId xmlns:a16="http://schemas.microsoft.com/office/drawing/2014/main" id="{EE6A061A-0CB4-46DC-99C2-61A31C366CEC}"/>
               </a:ext>
             </a:extLst>
           </p:cNvPr>
@@ -15088,7 +15237,7 @@
           <p:cNvPr id="5" name="">
             <a:extLst xmlns:a="http://schemas.openxmlformats.org/drawingml/2006/main">
               <a:ext uri="{FF2B5EF4-FFF2-40B4-BE49-F238E27FC236}">
-                <a16:creationId xmlns:a16="http://schemas.microsoft.com/office/drawing/2014/main" id="{946E6FFB-26DB-4C3F-A999-8D968607CCCB}"/>
+                <a16:creationId xmlns:a16="http://schemas.microsoft.com/office/drawing/2014/main" id="{E1EEDDBD-3DAB-4BDC-B2D1-B099F37E790A}"/>
               </a:ext>
             </a:extLst>
           </p:cNvPr>
@@ -15156,7 +15305,7 @@
           <p:cNvPr id="6" name="">
             <a:extLst xmlns:a="http://schemas.openxmlformats.org/drawingml/2006/main">
               <a:ext uri="{FF2B5EF4-FFF2-40B4-BE49-F238E27FC236}">
-                <a16:creationId xmlns:a16="http://schemas.microsoft.com/office/drawing/2014/main" id="{039FACBF-B678-419D-B624-878EA0470E97}"/>
+                <a16:creationId xmlns:a16="http://schemas.microsoft.com/office/drawing/2014/main" id="{440C8FBF-C96E-4358-9C26-E4BDD394AD28}"/>
               </a:ext>
             </a:extLst>
           </p:cNvPr>
@@ -15224,7 +15373,7 @@
           <p:cNvPr id="7" name="">
             <a:extLst xmlns:a="http://schemas.openxmlformats.org/drawingml/2006/main">
               <a:ext uri="{FF2B5EF4-FFF2-40B4-BE49-F238E27FC236}">
-                <a16:creationId xmlns:a16="http://schemas.microsoft.com/office/drawing/2014/main" id="{6124D8D3-BC9D-4F5E-9628-2D52E05411FC}"/>
+                <a16:creationId xmlns:a16="http://schemas.microsoft.com/office/drawing/2014/main" id="{D3A142AA-56DE-4372-AC69-9D430FF62401}"/>
               </a:ext>
             </a:extLst>
           </p:cNvPr>
@@ -15282,7 +15431,7 @@
                 <a:ea typeface="Arial"/>
                 <a:cs typeface="Arial"/>
               </a:rPr>
-              <a:t>These operator continuations do not prove automated repair of a failed database migration.</a:t>
+              <a:t>Checkpoint continuation is distinct from the additive-DDL repair shown next.</a:t>
             </a:r>
           </a:p>
         </p:txBody>
@@ -15290,7 +15439,7 @@
     </p:spTree>
     <p:extLst>
       <p:ext uri="{BB962C8B-B14F-4D97-AF65-F5344CB8AC3E}">
-        <p14:creationId xmlns:p14="http://schemas.microsoft.com/office/powerpoint/2010/main" val="1975051537"/>
+        <p14:creationId xmlns:p14="http://schemas.microsoft.com/office/powerpoint/2010/main" val="425502297"/>
       </p:ext>
     </p:extLst>
   </p:cSld>
@@ -15298,6 +15447,790 @@
 </file>
 
 <file path=ppt/slides/slide24.xml><?xml version="1.0" encoding="utf-8"?>
+<p:sld xmlns:p="http://schemas.openxmlformats.org/presentationml/2006/main">
+  <p:cSld>
+    <p:bg>
+      <p:bgPr>
+        <a:solidFill xmlns:a="http://schemas.openxmlformats.org/drawingml/2006/main">
+          <a:srgbClr val="FFFFFF"/>
+        </a:solidFill>
+      </p:bgPr>
+    </p:bg>
+    <p:spTree>
+      <p:nvGrpSpPr>
+        <p:cNvPr id="1" name=""/>
+        <p:cNvGrpSpPr/>
+        <p:nvPr/>
+      </p:nvGrpSpPr>
+      <p:grpSpPr>
+        <a:xfrm xmlns:a="http://schemas.openxmlformats.org/drawingml/2006/main"/>
+      </p:grpSpPr>
+      <p:cxnSp>
+        <p:nvCxnSpPr>
+          <p:cNvPr id="7" name="">
+            <a:extLst xmlns:a="http://schemas.openxmlformats.org/drawingml/2006/main">
+              <a:ext uri="{FF2B5EF4-FFF2-40B4-BE49-F238E27FC236}">
+                <a16:creationId xmlns:a16="http://schemas.microsoft.com/office/drawing/2014/main" id="{ADB6536D-8A98-4A76-9246-14A5B63F9087}"/>
+              </a:ext>
+            </a:extLst>
+          </p:cNvPr>
+          <p:cNvCxnSpPr>
+            <a:stCxn xmlns:a="http://schemas.openxmlformats.org/drawingml/2006/main" id="4" idx="3"/>
+            <a:endCxn xmlns:a="http://schemas.openxmlformats.org/drawingml/2006/main" id="5" idx="1"/>
+          </p:cNvCxnSpPr>
+          <p:nvPr/>
+        </p:nvCxnSpPr>
+        <p:spPr>
+          <a:xfrm xmlns:a="http://schemas.openxmlformats.org/drawingml/2006/main">
+            <a:off x="7667625" y="2333625"/>
+            <a:ext cx="762000" cy="0"/>
+          </a:xfrm>
+          <a:prstGeom xmlns:a="http://schemas.openxmlformats.org/drawingml/2006/main" prst="straightConnector1">
+            <a:avLst/>
+          </a:prstGeom>
+          <a:ln xmlns:a="http://schemas.openxmlformats.org/drawingml/2006/main" w="23813">
+            <a:solidFill>
+              <a:srgbClr val="235F63"/>
+            </a:solidFill>
+            <a:tailEnd type="triangle" w="med" len="med"/>
+          </a:ln>
+        </p:spPr>
+      </p:cxnSp>
+      <p:cxnSp>
+        <p:nvCxnSpPr>
+          <p:cNvPr id="6" name="">
+            <a:extLst xmlns:a="http://schemas.openxmlformats.org/drawingml/2006/main">
+              <a:ext uri="{FF2B5EF4-FFF2-40B4-BE49-F238E27FC236}">
+                <a16:creationId xmlns:a16="http://schemas.microsoft.com/office/drawing/2014/main" id="{F8CF76AB-D4F3-4670-927E-EBD23384A952}"/>
+              </a:ext>
+            </a:extLst>
+          </p:cNvPr>
+          <p:cNvCxnSpPr>
+            <a:stCxn xmlns:a="http://schemas.openxmlformats.org/drawingml/2006/main" id="3" idx="3"/>
+            <a:endCxn xmlns:a="http://schemas.openxmlformats.org/drawingml/2006/main" id="4" idx="1"/>
+          </p:cNvCxnSpPr>
+          <p:nvPr/>
+        </p:nvCxnSpPr>
+        <p:spPr>
+          <a:xfrm xmlns:a="http://schemas.openxmlformats.org/drawingml/2006/main">
+            <a:off x="3762375" y="2333625"/>
+            <a:ext cx="762000" cy="0"/>
+          </a:xfrm>
+          <a:prstGeom xmlns:a="http://schemas.openxmlformats.org/drawingml/2006/main" prst="straightConnector1">
+            <a:avLst/>
+          </a:prstGeom>
+          <a:ln xmlns:a="http://schemas.openxmlformats.org/drawingml/2006/main" w="23813">
+            <a:solidFill>
+              <a:srgbClr val="235F63"/>
+            </a:solidFill>
+            <a:tailEnd type="triangle" w="med" len="med"/>
+          </a:ln>
+        </p:spPr>
+      </p:cxnSp>
+      <p:sp>
+        <p:nvSpPr>
+          <p:cNvPr id="12" name="">
+            <a:extLst xmlns:a="http://schemas.openxmlformats.org/drawingml/2006/main">
+              <a:ext uri="{FF2B5EF4-FFF2-40B4-BE49-F238E27FC236}">
+                <a16:creationId xmlns:a16="http://schemas.microsoft.com/office/drawing/2014/main" id="{B4DB3B65-1906-4820-973E-F1235B417460}"/>
+              </a:ext>
+            </a:extLst>
+          </p:cNvPr>
+          <p:cNvSpPr>
+            <a:spLocks xmlns:a="http://schemas.openxmlformats.org/drawingml/2006/main" noGrp="1"/>
+          </p:cNvSpPr>
+          <p:nvPr/>
+        </p:nvSpPr>
+        <p:spPr>
+          <a:xfrm xmlns:a="http://schemas.openxmlformats.org/drawingml/2006/main">
+            <a:off x="571500" y="428625"/>
+            <a:ext cx="11049000" cy="952500"/>
+          </a:xfrm>
+          <a:prstGeom xmlns:a="http://schemas.openxmlformats.org/drawingml/2006/main" prst="rect">
+            <a:avLst/>
+          </a:prstGeom>
+          <a:noFill xmlns:a="http://schemas.openxmlformats.org/drawingml/2006/main"/>
+          <a:ln xmlns:a="http://schemas.openxmlformats.org/drawingml/2006/main" w="0">
+            <a:noFill/>
+          </a:ln>
+        </p:spPr>
+        <p:txBody>
+          <a:bodyPr xmlns:a="http://schemas.openxmlformats.org/drawingml/2006/main" lIns="0" tIns="0" rIns="0" bIns="0" anchor="t">
+            <a:noAutofit/>
+          </a:bodyPr>
+          <a:lstStyle xmlns:a="http://schemas.openxmlformats.org/drawingml/2006/main">
+            <a:defPPr>
+              <a:defRPr sz="3450" b="1">
+                <a:solidFill>
+                  <a:srgbClr val="172F3B"/>
+                </a:solidFill>
+                <a:latin typeface="Arial"/>
+                <a:ea typeface="Arial"/>
+                <a:cs typeface="Arial"/>
+              </a:defRPr>
+            </a:defPPr>
+          </a:lstStyle>
+          <a:p xmlns:a="http://schemas.openxmlformats.org/drawingml/2006/main">
+            <a:pPr>
+              <a:defRPr sz="3450" b="1">
+                <a:solidFill>
+                  <a:srgbClr val="172F3B"/>
+                </a:solidFill>
+                <a:latin typeface="Arial"/>
+                <a:ea typeface="Arial"/>
+                <a:cs typeface="Arial"/>
+              </a:defRPr>
+            </a:pPr>
+            <a:r>
+              <a:rPr sz="3450" b="1">
+                <a:solidFill>
+                  <a:srgbClr val="172F3B"/>
+                </a:solidFill>
+                <a:latin typeface="Arial"/>
+                <a:ea typeface="Arial"/>
+                <a:cs typeface="Arial"/>
+              </a:rPr>
+              <a:t>I: repair a failed additive deployment</a:t>
+            </a:r>
+          </a:p>
+        </p:txBody>
+      </p:sp>
+      <p:sp>
+        <p:nvSpPr>
+          <p:cNvPr id="2" name="">
+            <a:extLst xmlns:a="http://schemas.openxmlformats.org/drawingml/2006/main">
+              <a:ext uri="{FF2B5EF4-FFF2-40B4-BE49-F238E27FC236}">
+                <a16:creationId xmlns:a16="http://schemas.microsoft.com/office/drawing/2014/main" id="{585CC351-0976-49F8-8D16-308EBFF2F8B0}"/>
+              </a:ext>
+            </a:extLst>
+          </p:cNvPr>
+          <p:cNvSpPr>
+            <a:spLocks xmlns:a="http://schemas.openxmlformats.org/drawingml/2006/main" noGrp="1"/>
+          </p:cNvSpPr>
+          <p:nvPr/>
+        </p:nvSpPr>
+        <p:spPr>
+          <a:xfrm xmlns:a="http://schemas.openxmlformats.org/drawingml/2006/main">
+            <a:off x="11239500" y="6448425"/>
+            <a:ext cx="428625" cy="238125"/>
+          </a:xfrm>
+          <a:prstGeom xmlns:a="http://schemas.openxmlformats.org/drawingml/2006/main" prst="rect">
+            <a:avLst/>
+          </a:prstGeom>
+          <a:noFill xmlns:a="http://schemas.openxmlformats.org/drawingml/2006/main"/>
+          <a:ln xmlns:a="http://schemas.openxmlformats.org/drawingml/2006/main" w="0">
+            <a:noFill/>
+          </a:ln>
+        </p:spPr>
+        <p:txBody>
+          <a:bodyPr xmlns:a="http://schemas.openxmlformats.org/drawingml/2006/main" lIns="0" tIns="0" rIns="0" bIns="0" anchor="t">
+            <a:noAutofit/>
+          </a:bodyPr>
+          <a:lstStyle xmlns:a="http://schemas.openxmlformats.org/drawingml/2006/main">
+            <a:defPPr>
+              <a:defRPr sz="1350" b="0">
+                <a:solidFill>
+                  <a:srgbClr val="52636B"/>
+                </a:solidFill>
+                <a:latin typeface="Arial"/>
+                <a:ea typeface="Arial"/>
+                <a:cs typeface="Arial"/>
+              </a:defRPr>
+            </a:defPPr>
+          </a:lstStyle>
+          <a:p xmlns:a="http://schemas.openxmlformats.org/drawingml/2006/main">
+            <a:pPr>
+              <a:defRPr sz="1350" b="0">
+                <a:solidFill>
+                  <a:srgbClr val="52636B"/>
+                </a:solidFill>
+                <a:latin typeface="Arial"/>
+                <a:ea typeface="Arial"/>
+                <a:cs typeface="Arial"/>
+              </a:defRPr>
+            </a:pPr>
+            <a:r>
+              <a:rPr sz="1350" b="0">
+                <a:solidFill>
+                  <a:srgbClr val="52636B"/>
+                </a:solidFill>
+                <a:latin typeface="Arial"/>
+                <a:ea typeface="Arial"/>
+                <a:cs typeface="Arial"/>
+              </a:rPr>
+              <a:t>24</a:t>
+            </a:r>
+          </a:p>
+        </p:txBody>
+      </p:sp>
+      <p:sp>
+        <p:nvSpPr>
+          <p:cNvPr id="3" name="">
+            <a:extLst xmlns:a="http://schemas.openxmlformats.org/drawingml/2006/main">
+              <a:ext uri="{FF2B5EF4-FFF2-40B4-BE49-F238E27FC236}">
+                <a16:creationId xmlns:a16="http://schemas.microsoft.com/office/drawing/2014/main" id="{0D98FC0C-D695-4932-AF3C-A0EC48FC48C3}"/>
+              </a:ext>
+            </a:extLst>
+          </p:cNvPr>
+          <p:cNvSpPr>
+            <a:spLocks xmlns:a="http://schemas.openxmlformats.org/drawingml/2006/main" noGrp="1"/>
+          </p:cNvSpPr>
+          <p:nvPr/>
+        </p:nvSpPr>
+        <p:spPr>
+          <a:xfrm xmlns:a="http://schemas.openxmlformats.org/drawingml/2006/main">
+            <a:off x="619125" y="1762125"/>
+            <a:ext cx="3143250" cy="1143000"/>
+          </a:xfrm>
+          <a:prstGeom xmlns:a="http://schemas.openxmlformats.org/drawingml/2006/main" prst="rect">
+            <a:avLst/>
+          </a:prstGeom>
+          <a:solidFill xmlns:a="http://schemas.openxmlformats.org/drawingml/2006/main">
+            <a:srgbClr val="F2F5F5"/>
+          </a:solidFill>
+          <a:ln xmlns:a="http://schemas.openxmlformats.org/drawingml/2006/main" w="14288">
+            <a:solidFill>
+              <a:srgbClr val="AAB9BE"/>
+            </a:solidFill>
+          </a:ln>
+        </p:spPr>
+        <p:txBody>
+          <a:bodyPr xmlns:a="http://schemas.openxmlformats.org/drawingml/2006/main" lIns="114300" tIns="114300" rIns="114300" bIns="114300" anchor="ctr">
+            <a:noAutofit/>
+          </a:bodyPr>
+          <a:lstStyle xmlns:a="http://schemas.openxmlformats.org/drawingml/2006/main">
+            <a:defPPr algn="ctr">
+              <a:defRPr sz="2175">
+                <a:solidFill>
+                  <a:srgbClr val="172F3B"/>
+                </a:solidFill>
+                <a:latin typeface="Arial"/>
+                <a:ea typeface="Arial"/>
+                <a:cs typeface="Arial"/>
+              </a:defRPr>
+            </a:defPPr>
+          </a:lstStyle>
+          <a:p xmlns:a="http://schemas.openxmlformats.org/drawingml/2006/main">
+            <a:pPr algn="ctr">
+              <a:defRPr sz="2175">
+                <a:solidFill>
+                  <a:srgbClr val="172F3B"/>
+                </a:solidFill>
+                <a:latin typeface="Arial"/>
+                <a:ea typeface="Arial"/>
+                <a:cs typeface="Arial"/>
+              </a:defRPr>
+            </a:pPr>
+            <a:r>
+              <a:rPr sz="2175">
+                <a:solidFill>
+                  <a:srgbClr val="172F3B"/>
+                </a:solidFill>
+                <a:latin typeface="Arial"/>
+                <a:ea typeface="Arial"/>
+                <a:cs typeface="Arial"/>
+              </a:rPr>
+              <a:t>First DDL commits</a:t>
+            </a:r>
+          </a:p>
+          <a:p xmlns:a="http://schemas.openxmlformats.org/drawingml/2006/main">
+            <a:pPr algn="ctr">
+              <a:defRPr sz="2175">
+                <a:solidFill>
+                  <a:srgbClr val="172F3B"/>
+                </a:solidFill>
+                <a:latin typeface="Arial"/>
+                <a:ea typeface="Arial"/>
+                <a:cs typeface="Arial"/>
+              </a:defRPr>
+            </a:pPr>
+            <a:r>
+              <a:rPr sz="2175">
+                <a:solidFill>
+                  <a:srgbClr val="172F3B"/>
+                </a:solidFill>
+                <a:latin typeface="Arial"/>
+                <a:ea typeface="Arial"/>
+                <a:cs typeface="Arial"/>
+              </a:rPr>
+              <a:t>Second step fails</a:t>
+            </a:r>
+          </a:p>
+        </p:txBody>
+      </p:sp>
+      <p:sp>
+        <p:nvSpPr>
+          <p:cNvPr id="4" name="">
+            <a:extLst xmlns:a="http://schemas.openxmlformats.org/drawingml/2006/main">
+              <a:ext uri="{FF2B5EF4-FFF2-40B4-BE49-F238E27FC236}">
+                <a16:creationId xmlns:a16="http://schemas.microsoft.com/office/drawing/2014/main" id="{03BCE87F-BD15-4F42-AA97-A7765858B4E8}"/>
+              </a:ext>
+            </a:extLst>
+          </p:cNvPr>
+          <p:cNvSpPr>
+            <a:spLocks xmlns:a="http://schemas.openxmlformats.org/drawingml/2006/main" noGrp="1"/>
+          </p:cNvSpPr>
+          <p:nvPr/>
+        </p:nvSpPr>
+        <p:spPr>
+          <a:xfrm xmlns:a="http://schemas.openxmlformats.org/drawingml/2006/main">
+            <a:off x="4524375" y="1762125"/>
+            <a:ext cx="3143250" cy="1143000"/>
+          </a:xfrm>
+          <a:prstGeom xmlns:a="http://schemas.openxmlformats.org/drawingml/2006/main" prst="rect">
+            <a:avLst/>
+          </a:prstGeom>
+          <a:solidFill xmlns:a="http://schemas.openxmlformats.org/drawingml/2006/main">
+            <a:srgbClr val="F2F5F5"/>
+          </a:solidFill>
+          <a:ln xmlns:a="http://schemas.openxmlformats.org/drawingml/2006/main" w="14288">
+            <a:solidFill>
+              <a:srgbClr val="AAB9BE"/>
+            </a:solidFill>
+          </a:ln>
+        </p:spPr>
+        <p:txBody>
+          <a:bodyPr xmlns:a="http://schemas.openxmlformats.org/drawingml/2006/main" lIns="114300" tIns="114300" rIns="114300" bIns="114300" anchor="ctr">
+            <a:noAutofit/>
+          </a:bodyPr>
+          <a:lstStyle xmlns:a="http://schemas.openxmlformats.org/drawingml/2006/main">
+            <a:defPPr algn="ctr">
+              <a:defRPr sz="2175">
+                <a:solidFill>
+                  <a:srgbClr val="172F3B"/>
+                </a:solidFill>
+                <a:latin typeface="Arial"/>
+                <a:ea typeface="Arial"/>
+                <a:cs typeface="Arial"/>
+              </a:defRPr>
+            </a:defPPr>
+          </a:lstStyle>
+          <a:p xmlns:a="http://schemas.openxmlformats.org/drawingml/2006/main">
+            <a:pPr algn="ctr">
+              <a:defRPr sz="2175">
+                <a:solidFill>
+                  <a:srgbClr val="172F3B"/>
+                </a:solidFill>
+                <a:latin typeface="Arial"/>
+                <a:ea typeface="Arial"/>
+                <a:cs typeface="Arial"/>
+              </a:defRPr>
+            </a:pPr>
+            <a:r>
+              <a:rPr sz="2175">
+                <a:solidFill>
+                  <a:srgbClr val="172F3B"/>
+                </a:solidFill>
+                <a:latin typeface="Arial"/>
+                <a:ea typeface="Arial"/>
+                <a:cs typeface="Arial"/>
+              </a:rPr>
+              <a:t>Inspect retained state</a:t>
+            </a:r>
+          </a:p>
+          <a:p xmlns:a="http://schemas.openxmlformats.org/drawingml/2006/main">
+            <a:pPr algn="ctr">
+              <a:defRPr sz="2175">
+                <a:solidFill>
+                  <a:srgbClr val="172F3B"/>
+                </a:solidFill>
+                <a:latin typeface="Arial"/>
+                <a:ea typeface="Arial"/>
+                <a:cs typeface="Arial"/>
+              </a:defRPr>
+            </a:pPr>
+            <a:r>
+              <a:rPr sz="2175">
+                <a:solidFill>
+                  <a:srgbClr val="172F3B"/>
+                </a:solidFill>
+                <a:latin typeface="Arial"/>
+                <a:ea typeface="Arial"/>
+                <a:cs typeface="Arial"/>
+              </a:rPr>
+              <a:t>Approve its exact hash</a:t>
+            </a:r>
+          </a:p>
+        </p:txBody>
+      </p:sp>
+      <p:sp>
+        <p:nvSpPr>
+          <p:cNvPr id="5" name="">
+            <a:extLst xmlns:a="http://schemas.openxmlformats.org/drawingml/2006/main">
+              <a:ext uri="{FF2B5EF4-FFF2-40B4-BE49-F238E27FC236}">
+                <a16:creationId xmlns:a16="http://schemas.microsoft.com/office/drawing/2014/main" id="{FD8C3D43-7B0F-4A69-AEE6-8E6E79A651E3}"/>
+              </a:ext>
+            </a:extLst>
+          </p:cNvPr>
+          <p:cNvSpPr>
+            <a:spLocks xmlns:a="http://schemas.openxmlformats.org/drawingml/2006/main" noGrp="1"/>
+          </p:cNvSpPr>
+          <p:nvPr/>
+        </p:nvSpPr>
+        <p:spPr>
+          <a:xfrm xmlns:a="http://schemas.openxmlformats.org/drawingml/2006/main">
+            <a:off x="8429625" y="1762125"/>
+            <a:ext cx="3143250" cy="1143000"/>
+          </a:xfrm>
+          <a:prstGeom xmlns:a="http://schemas.openxmlformats.org/drawingml/2006/main" prst="rect">
+            <a:avLst/>
+          </a:prstGeom>
+          <a:solidFill xmlns:a="http://schemas.openxmlformats.org/drawingml/2006/main">
+            <a:srgbClr val="F2F5F5"/>
+          </a:solidFill>
+          <a:ln xmlns:a="http://schemas.openxmlformats.org/drawingml/2006/main" w="14288">
+            <a:solidFill>
+              <a:srgbClr val="AAB9BE"/>
+            </a:solidFill>
+          </a:ln>
+        </p:spPr>
+        <p:txBody>
+          <a:bodyPr xmlns:a="http://schemas.openxmlformats.org/drawingml/2006/main" lIns="114300" tIns="114300" rIns="114300" bIns="114300" anchor="ctr">
+            <a:noAutofit/>
+          </a:bodyPr>
+          <a:lstStyle xmlns:a="http://schemas.openxmlformats.org/drawingml/2006/main">
+            <a:defPPr algn="ctr">
+              <a:defRPr sz="2175">
+                <a:solidFill>
+                  <a:srgbClr val="172F3B"/>
+                </a:solidFill>
+                <a:latin typeface="Arial"/>
+                <a:ea typeface="Arial"/>
+                <a:cs typeface="Arial"/>
+              </a:defRPr>
+            </a:defPPr>
+          </a:lstStyle>
+          <a:p xmlns:a="http://schemas.openxmlformats.org/drawingml/2006/main">
+            <a:pPr algn="ctr">
+              <a:defRPr sz="2175">
+                <a:solidFill>
+                  <a:srgbClr val="172F3B"/>
+                </a:solidFill>
+                <a:latin typeface="Arial"/>
+                <a:ea typeface="Arial"/>
+                <a:cs typeface="Arial"/>
+              </a:defRPr>
+            </a:pPr>
+            <a:r>
+              <a:rPr sz="2175">
+                <a:solidFill>
+                  <a:srgbClr val="172F3B"/>
+                </a:solidFill>
+                <a:latin typeface="Arial"/>
+                <a:ea typeface="Arial"/>
+                <a:cs typeface="Arial"/>
+              </a:rPr>
+              <a:t>Apply reviewed repair</a:t>
+            </a:r>
+          </a:p>
+          <a:p xmlns:a="http://schemas.openxmlformats.org/drawingml/2006/main">
+            <a:pPr algn="ctr">
+              <a:defRPr sz="2175">
+                <a:solidFill>
+                  <a:srgbClr val="172F3B"/>
+                </a:solidFill>
+                <a:latin typeface="Arial"/>
+                <a:ea typeface="Arial"/>
+                <a:cs typeface="Arial"/>
+              </a:defRPr>
+            </a:pPr>
+            <a:r>
+              <a:rPr sz="2175">
+                <a:solidFill>
+                  <a:srgbClr val="172F3B"/>
+                </a:solidFill>
+                <a:latin typeface="Arial"/>
+                <a:ea typeface="Arial"/>
+                <a:cs typeface="Arial"/>
+              </a:rPr>
+              <a:t>Publish ready state</a:t>
+            </a:r>
+          </a:p>
+        </p:txBody>
+      </p:sp>
+      <p:sp>
+        <p:nvSpPr>
+          <p:cNvPr id="8" name="">
+            <a:extLst xmlns:a="http://schemas.openxmlformats.org/drawingml/2006/main">
+              <a:ext uri="{FF2B5EF4-FFF2-40B4-BE49-F238E27FC236}">
+                <a16:creationId xmlns:a16="http://schemas.microsoft.com/office/drawing/2014/main" id="{5427B6F8-8EFB-46FC-8E50-3F9D2315BDE1}"/>
+              </a:ext>
+            </a:extLst>
+          </p:cNvPr>
+          <p:cNvSpPr>
+            <a:spLocks xmlns:a="http://schemas.openxmlformats.org/drawingml/2006/main" noGrp="1"/>
+          </p:cNvSpPr>
+          <p:nvPr/>
+        </p:nvSpPr>
+        <p:spPr>
+          <a:xfrm xmlns:a="http://schemas.openxmlformats.org/drawingml/2006/main">
+            <a:off x="619125" y="3429000"/>
+            <a:ext cx="10858500" cy="571500"/>
+          </a:xfrm>
+          <a:prstGeom xmlns:a="http://schemas.openxmlformats.org/drawingml/2006/main" prst="rect">
+            <a:avLst/>
+          </a:prstGeom>
+          <a:noFill xmlns:a="http://schemas.openxmlformats.org/drawingml/2006/main"/>
+          <a:ln xmlns:a="http://schemas.openxmlformats.org/drawingml/2006/main" w="0">
+            <a:noFill/>
+          </a:ln>
+        </p:spPr>
+        <p:txBody>
+          <a:bodyPr xmlns:a="http://schemas.openxmlformats.org/drawingml/2006/main" lIns="0" tIns="0" rIns="0" bIns="0" anchor="t">
+            <a:noAutofit/>
+          </a:bodyPr>
+          <a:lstStyle xmlns:a="http://schemas.openxmlformats.org/drawingml/2006/main">
+            <a:defPPr>
+              <a:defRPr sz="2025" b="0">
+                <a:solidFill>
+                  <a:srgbClr val="172F3B"/>
+                </a:solidFill>
+                <a:latin typeface="Arial"/>
+                <a:ea typeface="Arial"/>
+                <a:cs typeface="Arial"/>
+              </a:defRPr>
+            </a:defPPr>
+          </a:lstStyle>
+          <a:p xmlns:a="http://schemas.openxmlformats.org/drawingml/2006/main">
+            <a:pPr>
+              <a:defRPr sz="2025" b="0">
+                <a:solidFill>
+                  <a:srgbClr val="172F3B"/>
+                </a:solidFill>
+                <a:latin typeface="Arial"/>
+                <a:ea typeface="Arial"/>
+                <a:cs typeface="Arial"/>
+              </a:defRPr>
+            </a:pPr>
+            <a:r>
+              <a:rPr sz="2025" b="0">
+                <a:solidFill>
+                  <a:srgbClr val="172F3B"/>
+                </a:solidFill>
+                <a:latin typeface="Arial"/>
+                <a:ea typeface="Arial"/>
+                <a:cs typeface="Arial"/>
+              </a:rPr>
+              <a:t>Failure keeps ownership and blocks ordinary runtime access.</a:t>
+            </a:r>
+          </a:p>
+        </p:txBody>
+      </p:sp>
+      <p:sp>
+        <p:nvSpPr>
+          <p:cNvPr id="9" name="">
+            <a:extLst xmlns:a="http://schemas.openxmlformats.org/drawingml/2006/main">
+              <a:ext uri="{FF2B5EF4-FFF2-40B4-BE49-F238E27FC236}">
+                <a16:creationId xmlns:a16="http://schemas.microsoft.com/office/drawing/2014/main" id="{423ABEB7-7B2F-4AD2-A19D-90ABB5BA675B}"/>
+              </a:ext>
+            </a:extLst>
+          </p:cNvPr>
+          <p:cNvSpPr>
+            <a:spLocks xmlns:a="http://schemas.openxmlformats.org/drawingml/2006/main" noGrp="1"/>
+          </p:cNvSpPr>
+          <p:nvPr/>
+        </p:nvSpPr>
+        <p:spPr>
+          <a:xfrm xmlns:a="http://schemas.openxmlformats.org/drawingml/2006/main">
+            <a:off x="619125" y="4114800"/>
+            <a:ext cx="10858500" cy="571500"/>
+          </a:xfrm>
+          <a:prstGeom xmlns:a="http://schemas.openxmlformats.org/drawingml/2006/main" prst="rect">
+            <a:avLst/>
+          </a:prstGeom>
+          <a:noFill xmlns:a="http://schemas.openxmlformats.org/drawingml/2006/main"/>
+          <a:ln xmlns:a="http://schemas.openxmlformats.org/drawingml/2006/main" w="0">
+            <a:noFill/>
+          </a:ln>
+        </p:spPr>
+        <p:txBody>
+          <a:bodyPr xmlns:a="http://schemas.openxmlformats.org/drawingml/2006/main" lIns="0" tIns="0" rIns="0" bIns="0" anchor="t">
+            <a:noAutofit/>
+          </a:bodyPr>
+          <a:lstStyle xmlns:a="http://schemas.openxmlformats.org/drawingml/2006/main">
+            <a:defPPr>
+              <a:defRPr sz="2025" b="0">
+                <a:solidFill>
+                  <a:srgbClr val="172F3B"/>
+                </a:solidFill>
+                <a:latin typeface="Arial"/>
+                <a:ea typeface="Arial"/>
+                <a:cs typeface="Arial"/>
+              </a:defRPr>
+            </a:defPPr>
+          </a:lstStyle>
+          <a:p xmlns:a="http://schemas.openxmlformats.org/drawingml/2006/main">
+            <a:pPr>
+              <a:defRPr sz="2025" b="0">
+                <a:solidFill>
+                  <a:srgbClr val="172F3B"/>
+                </a:solidFill>
+                <a:latin typeface="Arial"/>
+                <a:ea typeface="Arial"/>
+                <a:cs typeface="Arial"/>
+              </a:defRPr>
+            </a:pPr>
+            <a:r>
+              <a:rPr sz="2025" b="0">
+                <a:solidFill>
+                  <a:srgbClr val="172F3B"/>
+                </a:solidFill>
+                <a:latin typeface="Arial"/>
+                <a:ea typeface="Arial"/>
+                <a:cs typeface="Arial"/>
+              </a:rPr>
+              <a:t>Repair preserves prior DDL, all history and configuration.</a:t>
+            </a:r>
+          </a:p>
+        </p:txBody>
+      </p:sp>
+      <p:sp>
+        <p:nvSpPr>
+          <p:cNvPr id="10" name="">
+            <a:extLst xmlns:a="http://schemas.openxmlformats.org/drawingml/2006/main">
+              <a:ext uri="{FF2B5EF4-FFF2-40B4-BE49-F238E27FC236}">
+                <a16:creationId xmlns:a16="http://schemas.microsoft.com/office/drawing/2014/main" id="{7410DA17-2E64-4862-B6F7-B338A7DCAD00}"/>
+              </a:ext>
+            </a:extLst>
+          </p:cNvPr>
+          <p:cNvSpPr>
+            <a:spLocks xmlns:a="http://schemas.openxmlformats.org/drawingml/2006/main" noGrp="1"/>
+          </p:cNvSpPr>
+          <p:nvPr/>
+        </p:nvSpPr>
+        <p:spPr>
+          <a:xfrm xmlns:a="http://schemas.openxmlformats.org/drawingml/2006/main">
+            <a:off x="619125" y="4800600"/>
+            <a:ext cx="10858500" cy="571500"/>
+          </a:xfrm>
+          <a:prstGeom xmlns:a="http://schemas.openxmlformats.org/drawingml/2006/main" prst="rect">
+            <a:avLst/>
+          </a:prstGeom>
+          <a:noFill xmlns:a="http://schemas.openxmlformats.org/drawingml/2006/main"/>
+          <a:ln xmlns:a="http://schemas.openxmlformats.org/drawingml/2006/main" w="0">
+            <a:noFill/>
+          </a:ln>
+        </p:spPr>
+        <p:txBody>
+          <a:bodyPr xmlns:a="http://schemas.openxmlformats.org/drawingml/2006/main" lIns="0" tIns="0" rIns="0" bIns="0" anchor="t">
+            <a:noAutofit/>
+          </a:bodyPr>
+          <a:lstStyle xmlns:a="http://schemas.openxmlformats.org/drawingml/2006/main">
+            <a:defPPr>
+              <a:defRPr sz="2025" b="0">
+                <a:solidFill>
+                  <a:srgbClr val="172F3B"/>
+                </a:solidFill>
+                <a:latin typeface="Arial"/>
+                <a:ea typeface="Arial"/>
+                <a:cs typeface="Arial"/>
+              </a:defRPr>
+            </a:defPPr>
+          </a:lstStyle>
+          <a:p xmlns:a="http://schemas.openxmlformats.org/drawingml/2006/main">
+            <a:pPr>
+              <a:defRPr sz="2025" b="0">
+                <a:solidFill>
+                  <a:srgbClr val="172F3B"/>
+                </a:solidFill>
+                <a:latin typeface="Arial"/>
+                <a:ea typeface="Arial"/>
+                <a:cs typeface="Arial"/>
+              </a:defRPr>
+            </a:pPr>
+            <a:r>
+              <a:rPr sz="2025" b="0">
+                <a:solidFill>
+                  <a:srgbClr val="172F3B"/>
+                </a:solidFill>
+                <a:latin typeface="Arial"/>
+                <a:ea typeface="Arial"/>
+                <a:cs typeface="Arial"/>
+              </a:rPr>
+              <a:t>Repeated repair is a no-op; changed partial state is rejected.</a:t>
+            </a:r>
+          </a:p>
+        </p:txBody>
+      </p:sp>
+      <p:sp>
+        <p:nvSpPr>
+          <p:cNvPr id="11" name="">
+            <a:extLst xmlns:a="http://schemas.openxmlformats.org/drawingml/2006/main">
+              <a:ext uri="{FF2B5EF4-FFF2-40B4-BE49-F238E27FC236}">
+                <a16:creationId xmlns:a16="http://schemas.microsoft.com/office/drawing/2014/main" id="{ED1E005A-9971-4180-B49B-A40DBE6A2881}"/>
+              </a:ext>
+            </a:extLst>
+          </p:cNvPr>
+          <p:cNvSpPr>
+            <a:spLocks xmlns:a="http://schemas.openxmlformats.org/drawingml/2006/main" noGrp="1"/>
+          </p:cNvSpPr>
+          <p:nvPr/>
+        </p:nvSpPr>
+        <p:spPr>
+          <a:xfrm xmlns:a="http://schemas.openxmlformats.org/drawingml/2006/main">
+            <a:off x="619125" y="5762625"/>
+            <a:ext cx="10858500" cy="762000"/>
+          </a:xfrm>
+          <a:prstGeom xmlns:a="http://schemas.openxmlformats.org/drawingml/2006/main" prst="rect">
+            <a:avLst/>
+          </a:prstGeom>
+          <a:noFill xmlns:a="http://schemas.openxmlformats.org/drawingml/2006/main"/>
+          <a:ln xmlns:a="http://schemas.openxmlformats.org/drawingml/2006/main" w="0">
+            <a:noFill/>
+          </a:ln>
+        </p:spPr>
+        <p:txBody>
+          <a:bodyPr xmlns:a="http://schemas.openxmlformats.org/drawingml/2006/main" lIns="0" tIns="0" rIns="0" bIns="0" anchor="t">
+            <a:noAutofit/>
+          </a:bodyPr>
+          <a:lstStyle xmlns:a="http://schemas.openxmlformats.org/drawingml/2006/main">
+            <a:defPPr>
+              <a:defRPr sz="1875" b="1">
+                <a:solidFill>
+                  <a:srgbClr val="235F63"/>
+                </a:solidFill>
+                <a:latin typeface="Arial"/>
+                <a:ea typeface="Arial"/>
+                <a:cs typeface="Arial"/>
+              </a:defRPr>
+            </a:defPPr>
+          </a:lstStyle>
+          <a:p xmlns:a="http://schemas.openxmlformats.org/drawingml/2006/main">
+            <a:pPr>
+              <a:defRPr sz="1875" b="1">
+                <a:solidFill>
+                  <a:srgbClr val="235F63"/>
+                </a:solidFill>
+                <a:latin typeface="Arial"/>
+                <a:ea typeface="Arial"/>
+                <a:cs typeface="Arial"/>
+              </a:defRPr>
+            </a:pPr>
+            <a:r>
+              <a:rPr sz="1875" b="1">
+                <a:solidFill>
+                  <a:srgbClr val="235F63"/>
+                </a:solidFill>
+                <a:latin typeface="Arial"/>
+                <a:ea typeface="Arial"/>
+                <a:cs typeface="Arial"/>
+              </a:rPr>
+              <a:t>bash scripts/cicd-walkthrough-I_repair.sh</a:t>
+            </a:r>
+          </a:p>
+        </p:txBody>
+      </p:sp>
+    </p:spTree>
+    <p:extLst>
+      <p:ext uri="{BB962C8B-B14F-4D97-AF65-F5344CB8AC3E}">
+        <p14:creationId xmlns:p14="http://schemas.microsoft.com/office/powerpoint/2010/main" val="429397196"/>
+      </p:ext>
+    </p:extLst>
+  </p:cSld>
+</p:sld>
+</file>
+
+<file path=ppt/slides/slide25.xml><?xml version="1.0" encoding="utf-8"?>
 <p:sld xmlns:p="http://schemas.openxmlformats.org/presentationml/2006/main">
   <p:cSld>
     <p:bg>
@@ -15321,7 +16254,7 @@
           <p:cNvPr id="5" name="">
             <a:extLst xmlns:a="http://schemas.openxmlformats.org/drawingml/2006/main">
               <a:ext uri="{FF2B5EF4-FFF2-40B4-BE49-F238E27FC236}">
-                <a16:creationId xmlns:a16="http://schemas.microsoft.com/office/drawing/2014/main" id="{83BC6E00-50C8-4458-BA96-7D43A68ABF73}"/>
+                <a16:creationId xmlns:a16="http://schemas.microsoft.com/office/drawing/2014/main" id="{4337791E-41E9-4A36-AC04-139C8309BBB4}"/>
               </a:ext>
             </a:extLst>
           </p:cNvPr>
@@ -15389,7 +16322,7 @@
           <p:cNvPr id="2" name="">
             <a:extLst xmlns:a="http://schemas.openxmlformats.org/drawingml/2006/main">
               <a:ext uri="{FF2B5EF4-FFF2-40B4-BE49-F238E27FC236}">
-                <a16:creationId xmlns:a16="http://schemas.microsoft.com/office/drawing/2014/main" id="{28A21B22-FEE8-4F1E-BE80-DC59B26180A6}"/>
+                <a16:creationId xmlns:a16="http://schemas.microsoft.com/office/drawing/2014/main" id="{A5FD509C-2A8C-4FE9-A562-CA2D531EA51A}"/>
               </a:ext>
             </a:extLst>
           </p:cNvPr>
@@ -15447,7 +16380,7 @@
                 <a:ea typeface="Arial"/>
                 <a:cs typeface="Arial"/>
               </a:rPr>
-              <a:t>24</a:t>
+              <a:t>25</a:t>
             </a:r>
           </a:p>
         </p:txBody>
@@ -15457,7 +16390,7 @@
           <p:cNvPr id="3" name="">
             <a:extLst xmlns:a="http://schemas.openxmlformats.org/drawingml/2006/main">
               <a:ext uri="{FF2B5EF4-FFF2-40B4-BE49-F238E27FC236}">
-                <a16:creationId xmlns:a16="http://schemas.microsoft.com/office/drawing/2014/main" id="{16BCBE30-DC66-4D36-8E27-E5E0C787672F}"/>
+                <a16:creationId xmlns:a16="http://schemas.microsoft.com/office/drawing/2014/main" id="{6CE2FD06-7985-4D34-858C-03A9A04AF238}"/>
               </a:ext>
             </a:extLst>
           </p:cNvPr>
@@ -15548,7 +16481,7 @@
           <p:cNvPr id="4" name="">
             <a:extLst xmlns:a="http://schemas.openxmlformats.org/drawingml/2006/main">
               <a:ext uri="{FF2B5EF4-FFF2-40B4-BE49-F238E27FC236}">
-                <a16:creationId xmlns:a16="http://schemas.microsoft.com/office/drawing/2014/main" id="{5F65EF09-364F-4500-8AED-ED9D03168A76}"/>
+                <a16:creationId xmlns:a16="http://schemas.microsoft.com/office/drawing/2014/main" id="{B37E3C20-32FA-4D2F-93D9-5C3AD39E7F51}"/>
               </a:ext>
             </a:extLst>
           </p:cNvPr>
@@ -15614,512 +16547,7 @@
     </p:spTree>
     <p:extLst>
       <p:ext uri="{BB962C8B-B14F-4D97-AF65-F5344CB8AC3E}">
-        <p14:creationId xmlns:p14="http://schemas.microsoft.com/office/powerpoint/2010/main" val="2124964100"/>
-      </p:ext>
-    </p:extLst>
-  </p:cSld>
-</p:sld>
-</file>
-
-<file path=ppt/slides/slide25.xml><?xml version="1.0" encoding="utf-8"?>
-<p:sld xmlns:p="http://schemas.openxmlformats.org/presentationml/2006/main">
-  <p:cSld>
-    <p:bg>
-      <p:bgPr>
-        <a:solidFill xmlns:a="http://schemas.openxmlformats.org/drawingml/2006/main">
-          <a:srgbClr val="FFFFFF"/>
-        </a:solidFill>
-      </p:bgPr>
-    </p:bg>
-    <p:spTree>
-      <p:nvGrpSpPr>
-        <p:cNvPr id="1" name=""/>
-        <p:cNvGrpSpPr/>
-        <p:nvPr/>
-      </p:nvGrpSpPr>
-      <p:grpSpPr>
-        <a:xfrm xmlns:a="http://schemas.openxmlformats.org/drawingml/2006/main"/>
-      </p:grpSpPr>
-      <p:sp>
-        <p:nvSpPr>
-          <p:cNvPr id="8" name="">
-            <a:extLst xmlns:a="http://schemas.openxmlformats.org/drawingml/2006/main">
-              <a:ext uri="{FF2B5EF4-FFF2-40B4-BE49-F238E27FC236}">
-                <a16:creationId xmlns:a16="http://schemas.microsoft.com/office/drawing/2014/main" id="{8BA70A9F-5234-40E3-9BF5-357CB088F052}"/>
-              </a:ext>
-            </a:extLst>
-          </p:cNvPr>
-          <p:cNvSpPr>
-            <a:spLocks xmlns:a="http://schemas.openxmlformats.org/drawingml/2006/main" noGrp="1"/>
-          </p:cNvSpPr>
-          <p:nvPr/>
-        </p:nvSpPr>
-        <p:spPr>
-          <a:xfrm xmlns:a="http://schemas.openxmlformats.org/drawingml/2006/main">
-            <a:off x="571500" y="428625"/>
-            <a:ext cx="11049000" cy="952500"/>
-          </a:xfrm>
-          <a:prstGeom xmlns:a="http://schemas.openxmlformats.org/drawingml/2006/main" prst="rect">
-            <a:avLst/>
-          </a:prstGeom>
-          <a:noFill xmlns:a="http://schemas.openxmlformats.org/drawingml/2006/main"/>
-          <a:ln xmlns:a="http://schemas.openxmlformats.org/drawingml/2006/main" w="0">
-            <a:noFill/>
-          </a:ln>
-        </p:spPr>
-        <p:txBody>
-          <a:bodyPr xmlns:a="http://schemas.openxmlformats.org/drawingml/2006/main" lIns="0" tIns="0" rIns="0" bIns="0" anchor="t">
-            <a:noAutofit/>
-          </a:bodyPr>
-          <a:lstStyle xmlns:a="http://schemas.openxmlformats.org/drawingml/2006/main">
-            <a:defPPr>
-              <a:defRPr sz="3450" b="1">
-                <a:solidFill>
-                  <a:srgbClr val="172F3B"/>
-                </a:solidFill>
-                <a:latin typeface="Arial"/>
-                <a:ea typeface="Arial"/>
-                <a:cs typeface="Arial"/>
-              </a:defRPr>
-            </a:defPPr>
-          </a:lstStyle>
-          <a:p xmlns:a="http://schemas.openxmlformats.org/drawingml/2006/main">
-            <a:pPr>
-              <a:defRPr sz="3450" b="1">
-                <a:solidFill>
-                  <a:srgbClr val="172F3B"/>
-                </a:solidFill>
-                <a:latin typeface="Arial"/>
-                <a:ea typeface="Arial"/>
-                <a:cs typeface="Arial"/>
-              </a:defRPr>
-            </a:pPr>
-            <a:r>
-              <a:rPr sz="3450" b="1">
-                <a:solidFill>
-                  <a:srgbClr val="172F3B"/>
-                </a:solidFill>
-                <a:latin typeface="Arial"/>
-                <a:ea typeface="Arial"/>
-                <a:cs typeface="Arial"/>
-              </a:rPr>
-              <a:t>Delivered evidence and official status</a:t>
-            </a:r>
-          </a:p>
-        </p:txBody>
-      </p:sp>
-      <p:sp>
-        <p:nvSpPr>
-          <p:cNvPr id="2" name="">
-            <a:extLst xmlns:a="http://schemas.openxmlformats.org/drawingml/2006/main">
-              <a:ext uri="{FF2B5EF4-FFF2-40B4-BE49-F238E27FC236}">
-                <a16:creationId xmlns:a16="http://schemas.microsoft.com/office/drawing/2014/main" id="{80EEF2F6-224D-4745-8460-39F255831025}"/>
-              </a:ext>
-            </a:extLst>
-          </p:cNvPr>
-          <p:cNvSpPr>
-            <a:spLocks xmlns:a="http://schemas.openxmlformats.org/drawingml/2006/main" noGrp="1"/>
-          </p:cNvSpPr>
-          <p:nvPr/>
-        </p:nvSpPr>
-        <p:spPr>
-          <a:xfrm xmlns:a="http://schemas.openxmlformats.org/drawingml/2006/main">
-            <a:off x="11239500" y="6448425"/>
-            <a:ext cx="428625" cy="238125"/>
-          </a:xfrm>
-          <a:prstGeom xmlns:a="http://schemas.openxmlformats.org/drawingml/2006/main" prst="rect">
-            <a:avLst/>
-          </a:prstGeom>
-          <a:noFill xmlns:a="http://schemas.openxmlformats.org/drawingml/2006/main"/>
-          <a:ln xmlns:a="http://schemas.openxmlformats.org/drawingml/2006/main" w="0">
-            <a:noFill/>
-          </a:ln>
-        </p:spPr>
-        <p:txBody>
-          <a:bodyPr xmlns:a="http://schemas.openxmlformats.org/drawingml/2006/main" lIns="0" tIns="0" rIns="0" bIns="0" anchor="t">
-            <a:noAutofit/>
-          </a:bodyPr>
-          <a:lstStyle xmlns:a="http://schemas.openxmlformats.org/drawingml/2006/main">
-            <a:defPPr>
-              <a:defRPr sz="1350" b="0">
-                <a:solidFill>
-                  <a:srgbClr val="52636B"/>
-                </a:solidFill>
-                <a:latin typeface="Arial"/>
-                <a:ea typeface="Arial"/>
-                <a:cs typeface="Arial"/>
-              </a:defRPr>
-            </a:defPPr>
-          </a:lstStyle>
-          <a:p xmlns:a="http://schemas.openxmlformats.org/drawingml/2006/main">
-            <a:pPr>
-              <a:defRPr sz="1350" b="0">
-                <a:solidFill>
-                  <a:srgbClr val="52636B"/>
-                </a:solidFill>
-                <a:latin typeface="Arial"/>
-                <a:ea typeface="Arial"/>
-                <a:cs typeface="Arial"/>
-              </a:defRPr>
-            </a:pPr>
-            <a:r>
-              <a:rPr sz="1350" b="0">
-                <a:solidFill>
-                  <a:srgbClr val="52636B"/>
-                </a:solidFill>
-                <a:latin typeface="Arial"/>
-                <a:ea typeface="Arial"/>
-                <a:cs typeface="Arial"/>
-              </a:rPr>
-              <a:t>25</a:t>
-            </a:r>
-          </a:p>
-        </p:txBody>
-      </p:sp>
-      <p:sp>
-        <p:nvSpPr>
-          <p:cNvPr id="3" name="">
-            <a:extLst xmlns:a="http://schemas.openxmlformats.org/drawingml/2006/main">
-              <a:ext uri="{FF2B5EF4-FFF2-40B4-BE49-F238E27FC236}">
-                <a16:creationId xmlns:a16="http://schemas.microsoft.com/office/drawing/2014/main" id="{5DB3CCE7-F98A-4A58-90E5-0551183A227E}"/>
-              </a:ext>
-            </a:extLst>
-          </p:cNvPr>
-          <p:cNvSpPr>
-            <a:spLocks xmlns:a="http://schemas.openxmlformats.org/drawingml/2006/main" noGrp="1"/>
-          </p:cNvSpPr>
-          <p:nvPr/>
-        </p:nvSpPr>
-        <p:spPr>
-          <a:xfrm xmlns:a="http://schemas.openxmlformats.org/drawingml/2006/main">
-            <a:off x="619125" y="1619250"/>
-            <a:ext cx="10858500" cy="742950"/>
-          </a:xfrm>
-          <a:prstGeom xmlns:a="http://schemas.openxmlformats.org/drawingml/2006/main" prst="rect">
-            <a:avLst/>
-          </a:prstGeom>
-          <a:noFill xmlns:a="http://schemas.openxmlformats.org/drawingml/2006/main"/>
-          <a:ln xmlns:a="http://schemas.openxmlformats.org/drawingml/2006/main" w="0">
-            <a:noFill/>
-          </a:ln>
-        </p:spPr>
-        <p:txBody>
-          <a:bodyPr xmlns:a="http://schemas.openxmlformats.org/drawingml/2006/main" lIns="0" tIns="0" rIns="0" bIns="0" anchor="t">
-            <a:noAutofit/>
-          </a:bodyPr>
-          <a:lstStyle xmlns:a="http://schemas.openxmlformats.org/drawingml/2006/main">
-            <a:defPPr>
-              <a:defRPr sz="2100" b="0">
-                <a:solidFill>
-                  <a:srgbClr val="172F3B"/>
-                </a:solidFill>
-                <a:latin typeface="Arial"/>
-                <a:ea typeface="Arial"/>
-                <a:cs typeface="Arial"/>
-              </a:defRPr>
-            </a:defPPr>
-          </a:lstStyle>
-          <a:p xmlns:a="http://schemas.openxmlformats.org/drawingml/2006/main">
-            <a:pPr>
-              <a:defRPr sz="2100" b="0">
-                <a:solidFill>
-                  <a:srgbClr val="172F3B"/>
-                </a:solidFill>
-                <a:latin typeface="Arial"/>
-                <a:ea typeface="Arial"/>
-                <a:cs typeface="Arial"/>
-              </a:defRPr>
-            </a:pPr>
-            <a:r>
-              <a:rPr sz="2100" b="0">
-                <a:solidFill>
-                  <a:srgbClr val="172F3B"/>
-                </a:solidFill>
-                <a:latin typeface="Arial"/>
-                <a:ea typeface="Arial"/>
-                <a:cs typeface="Arial"/>
-              </a:rPr>
-              <a:t>PBI-011.1 and 011.3: tested on the board</a:t>
-            </a:r>
-          </a:p>
-        </p:txBody>
-      </p:sp>
-      <p:sp>
-        <p:nvSpPr>
-          <p:cNvPr id="4" name="">
-            <a:extLst xmlns:a="http://schemas.openxmlformats.org/drawingml/2006/main">
-              <a:ext uri="{FF2B5EF4-FFF2-40B4-BE49-F238E27FC236}">
-                <a16:creationId xmlns:a16="http://schemas.microsoft.com/office/drawing/2014/main" id="{E8DFBA9D-2860-47EE-9644-2C55D2836349}"/>
-              </a:ext>
-            </a:extLst>
-          </p:cNvPr>
-          <p:cNvSpPr>
-            <a:spLocks xmlns:a="http://schemas.openxmlformats.org/drawingml/2006/main" noGrp="1"/>
-          </p:cNvSpPr>
-          <p:nvPr/>
-        </p:nvSpPr>
-        <p:spPr>
-          <a:xfrm xmlns:a="http://schemas.openxmlformats.org/drawingml/2006/main">
-            <a:off x="619125" y="2476500"/>
-            <a:ext cx="10858500" cy="742950"/>
-          </a:xfrm>
-          <a:prstGeom xmlns:a="http://schemas.openxmlformats.org/drawingml/2006/main" prst="rect">
-            <a:avLst/>
-          </a:prstGeom>
-          <a:noFill xmlns:a="http://schemas.openxmlformats.org/drawingml/2006/main"/>
-          <a:ln xmlns:a="http://schemas.openxmlformats.org/drawingml/2006/main" w="0">
-            <a:noFill/>
-          </a:ln>
-        </p:spPr>
-        <p:txBody>
-          <a:bodyPr xmlns:a="http://schemas.openxmlformats.org/drawingml/2006/main" lIns="0" tIns="0" rIns="0" bIns="0" anchor="t">
-            <a:noAutofit/>
-          </a:bodyPr>
-          <a:lstStyle xmlns:a="http://schemas.openxmlformats.org/drawingml/2006/main">
-            <a:defPPr>
-              <a:defRPr sz="2100" b="0">
-                <a:solidFill>
-                  <a:srgbClr val="172F3B"/>
-                </a:solidFill>
-                <a:latin typeface="Arial"/>
-                <a:ea typeface="Arial"/>
-                <a:cs typeface="Arial"/>
-              </a:defRPr>
-            </a:defPPr>
-          </a:lstStyle>
-          <a:p xmlns:a="http://schemas.openxmlformats.org/drawingml/2006/main">
-            <a:pPr>
-              <a:defRPr sz="2100" b="0">
-                <a:solidFill>
-                  <a:srgbClr val="172F3B"/>
-                </a:solidFill>
-                <a:latin typeface="Arial"/>
-                <a:ea typeface="Arial"/>
-                <a:cs typeface="Arial"/>
-              </a:defRPr>
-            </a:pPr>
-            <a:r>
-              <a:rPr sz="2100" b="0">
-                <a:solidFill>
-                  <a:srgbClr val="172F3B"/>
-                </a:solidFill>
-                <a:latin typeface="Arial"/>
-                <a:ea typeface="Arial"/>
-                <a:cs typeface="Arial"/>
-              </a:rPr>
-              <a:t>PBI-011.2, 011.4, 011.6 and 011.7: under construction</a:t>
-            </a:r>
-          </a:p>
-        </p:txBody>
-      </p:sp>
-      <p:sp>
-        <p:nvSpPr>
-          <p:cNvPr id="5" name="">
-            <a:extLst xmlns:a="http://schemas.openxmlformats.org/drawingml/2006/main">
-              <a:ext uri="{FF2B5EF4-FFF2-40B4-BE49-F238E27FC236}">
-                <a16:creationId xmlns:a16="http://schemas.microsoft.com/office/drawing/2014/main" id="{A89A8CB5-1DB0-4ACC-88F1-C3DECFBEA9E3}"/>
-              </a:ext>
-            </a:extLst>
-          </p:cNvPr>
-          <p:cNvSpPr>
-            <a:spLocks xmlns:a="http://schemas.openxmlformats.org/drawingml/2006/main" noGrp="1"/>
-          </p:cNvSpPr>
-          <p:nvPr/>
-        </p:nvSpPr>
-        <p:spPr>
-          <a:xfrm xmlns:a="http://schemas.openxmlformats.org/drawingml/2006/main">
-            <a:off x="619125" y="3333750"/>
-            <a:ext cx="10858500" cy="742950"/>
-          </a:xfrm>
-          <a:prstGeom xmlns:a="http://schemas.openxmlformats.org/drawingml/2006/main" prst="rect">
-            <a:avLst/>
-          </a:prstGeom>
-          <a:noFill xmlns:a="http://schemas.openxmlformats.org/drawingml/2006/main"/>
-          <a:ln xmlns:a="http://schemas.openxmlformats.org/drawingml/2006/main" w="0">
-            <a:noFill/>
-          </a:ln>
-        </p:spPr>
-        <p:txBody>
-          <a:bodyPr xmlns:a="http://schemas.openxmlformats.org/drawingml/2006/main" lIns="0" tIns="0" rIns="0" bIns="0" anchor="t">
-            <a:noAutofit/>
-          </a:bodyPr>
-          <a:lstStyle xmlns:a="http://schemas.openxmlformats.org/drawingml/2006/main">
-            <a:defPPr>
-              <a:defRPr sz="2100" b="0">
-                <a:solidFill>
-                  <a:srgbClr val="172F3B"/>
-                </a:solidFill>
-                <a:latin typeface="Arial"/>
-                <a:ea typeface="Arial"/>
-                <a:cs typeface="Arial"/>
-              </a:defRPr>
-            </a:defPPr>
-          </a:lstStyle>
-          <a:p xmlns:a="http://schemas.openxmlformats.org/drawingml/2006/main">
-            <a:pPr>
-              <a:defRPr sz="2100" b="0">
-                <a:solidFill>
-                  <a:srgbClr val="172F3B"/>
-                </a:solidFill>
-                <a:latin typeface="Arial"/>
-                <a:ea typeface="Arial"/>
-                <a:cs typeface="Arial"/>
-              </a:defRPr>
-            </a:pPr>
-            <a:r>
-              <a:rPr sz="2100" b="0">
-                <a:solidFill>
-                  <a:srgbClr val="172F3B"/>
-                </a:solidFill>
-                <a:latin typeface="Arial"/>
-                <a:ea typeface="Arial"/>
-                <a:cs typeface="Arial"/>
-              </a:rPr>
-              <a:t>PBI-011.5: under construction, with concurrent integration still unproved</a:t>
-            </a:r>
-          </a:p>
-        </p:txBody>
-      </p:sp>
-      <p:sp>
-        <p:nvSpPr>
-          <p:cNvPr id="6" name="">
-            <a:extLst xmlns:a="http://schemas.openxmlformats.org/drawingml/2006/main">
-              <a:ext uri="{FF2B5EF4-FFF2-40B4-BE49-F238E27FC236}">
-                <a16:creationId xmlns:a16="http://schemas.microsoft.com/office/drawing/2014/main" id="{2A668E88-D6D2-45F8-986C-1FABCCF30B5D}"/>
-              </a:ext>
-            </a:extLst>
-          </p:cNvPr>
-          <p:cNvSpPr>
-            <a:spLocks xmlns:a="http://schemas.openxmlformats.org/drawingml/2006/main" noGrp="1"/>
-          </p:cNvSpPr>
-          <p:nvPr/>
-        </p:nvSpPr>
-        <p:spPr>
-          <a:xfrm xmlns:a="http://schemas.openxmlformats.org/drawingml/2006/main">
-            <a:off x="619125" y="4191000"/>
-            <a:ext cx="10858500" cy="742950"/>
-          </a:xfrm>
-          <a:prstGeom xmlns:a="http://schemas.openxmlformats.org/drawingml/2006/main" prst="rect">
-            <a:avLst/>
-          </a:prstGeom>
-          <a:noFill xmlns:a="http://schemas.openxmlformats.org/drawingml/2006/main"/>
-          <a:ln xmlns:a="http://schemas.openxmlformats.org/drawingml/2006/main" w="0">
-            <a:noFill/>
-          </a:ln>
-        </p:spPr>
-        <p:txBody>
-          <a:bodyPr xmlns:a="http://schemas.openxmlformats.org/drawingml/2006/main" lIns="0" tIns="0" rIns="0" bIns="0" anchor="t">
-            <a:noAutofit/>
-          </a:bodyPr>
-          <a:lstStyle xmlns:a="http://schemas.openxmlformats.org/drawingml/2006/main">
-            <a:defPPr>
-              <a:defRPr sz="2100" b="0">
-                <a:solidFill>
-                  <a:srgbClr val="172F3B"/>
-                </a:solidFill>
-                <a:latin typeface="Arial"/>
-                <a:ea typeface="Arial"/>
-                <a:cs typeface="Arial"/>
-              </a:defRPr>
-            </a:defPPr>
-          </a:lstStyle>
-          <a:p xmlns:a="http://schemas.openxmlformats.org/drawingml/2006/main">
-            <a:pPr>
-              <a:defRPr sz="2100" b="0">
-                <a:solidFill>
-                  <a:srgbClr val="172F3B"/>
-                </a:solidFill>
-                <a:latin typeface="Arial"/>
-                <a:ea typeface="Arial"/>
-                <a:cs typeface="Arial"/>
-              </a:defRPr>
-            </a:pPr>
-            <a:r>
-              <a:rPr sz="2100" b="0">
-                <a:solidFill>
-                  <a:srgbClr val="172F3B"/>
-                </a:solidFill>
-                <a:latin typeface="Arial"/>
-                <a:ea typeface="Arial"/>
-                <a:cs typeface="Arial"/>
-              </a:rPr>
-              <a:t>PBI-011.8: failed additive deployment and repair remain unimplemented</a:t>
-            </a:r>
-          </a:p>
-        </p:txBody>
-      </p:sp>
-      <p:sp>
-        <p:nvSpPr>
-          <p:cNvPr id="7" name="">
-            <a:extLst xmlns:a="http://schemas.openxmlformats.org/drawingml/2006/main">
-              <a:ext uri="{FF2B5EF4-FFF2-40B4-BE49-F238E27FC236}">
-                <a16:creationId xmlns:a16="http://schemas.microsoft.com/office/drawing/2014/main" id="{68883E5A-E114-474D-B96C-E5939A48AA19}"/>
-              </a:ext>
-            </a:extLst>
-          </p:cNvPr>
-          <p:cNvSpPr>
-            <a:spLocks xmlns:a="http://schemas.openxmlformats.org/drawingml/2006/main" noGrp="1"/>
-          </p:cNvSpPr>
-          <p:nvPr/>
-        </p:nvSpPr>
-        <p:spPr>
-          <a:xfrm xmlns:a="http://schemas.openxmlformats.org/drawingml/2006/main">
-            <a:off x="619125" y="5429250"/>
-            <a:ext cx="10858500" cy="590550"/>
-          </a:xfrm>
-          <a:prstGeom xmlns:a="http://schemas.openxmlformats.org/drawingml/2006/main" prst="rect">
-            <a:avLst/>
-          </a:prstGeom>
-          <a:noFill xmlns:a="http://schemas.openxmlformats.org/drawingml/2006/main"/>
-          <a:ln xmlns:a="http://schemas.openxmlformats.org/drawingml/2006/main" w="0">
-            <a:noFill/>
-          </a:ln>
-        </p:spPr>
-        <p:txBody>
-          <a:bodyPr xmlns:a="http://schemas.openxmlformats.org/drawingml/2006/main" lIns="0" tIns="0" rIns="0" bIns="0" anchor="t">
-            <a:noAutofit/>
-          </a:bodyPr>
-          <a:lstStyle xmlns:a="http://schemas.openxmlformats.org/drawingml/2006/main">
-            <a:defPPr>
-              <a:defRPr sz="1875" b="0">
-                <a:solidFill>
-                  <a:srgbClr val="A43224"/>
-                </a:solidFill>
-                <a:latin typeface="Arial"/>
-                <a:ea typeface="Arial"/>
-                <a:cs typeface="Arial"/>
-              </a:defRPr>
-            </a:defPPr>
-          </a:lstStyle>
-          <a:p xmlns:a="http://schemas.openxmlformats.org/drawingml/2006/main">
-            <a:pPr>
-              <a:defRPr sz="1875" b="0">
-                <a:solidFill>
-                  <a:srgbClr val="A43224"/>
-                </a:solidFill>
-                <a:latin typeface="Arial"/>
-                <a:ea typeface="Arial"/>
-                <a:cs typeface="Arial"/>
-              </a:defRPr>
-            </a:pPr>
-            <a:r>
-              <a:rPr sz="1875" b="0">
-                <a:solidFill>
-                  <a:srgbClr val="A43224"/>
-                </a:solidFill>
-                <a:latin typeface="Arial"/>
-                <a:ea typeface="Arial"/>
-                <a:cs typeface="Arial"/>
-              </a:rPr>
-              <a:t>PBI-012–016 remain under_design. This handover proposes conclusions and follow-up, not status changes.</a:t>
-            </a:r>
-          </a:p>
-        </p:txBody>
-      </p:sp>
-    </p:spTree>
-    <p:extLst>
-      <p:ext uri="{BB962C8B-B14F-4D97-AF65-F5344CB8AC3E}">
-        <p14:creationId xmlns:p14="http://schemas.microsoft.com/office/powerpoint/2010/main" val="7642390"/>
+        <p14:creationId xmlns:p14="http://schemas.microsoft.com/office/powerpoint/2010/main" val="1256071059"/>
       </p:ext>
     </p:extLst>
   </p:cSld>
@@ -16147,10 +16575,10 @@
       </p:grpSpPr>
       <p:sp>
         <p:nvSpPr>
-          <p:cNvPr id="7" name="">
-            <a:extLst xmlns:a="http://schemas.openxmlformats.org/drawingml/2006/main">
-              <a:ext uri="{FF2B5EF4-FFF2-40B4-BE49-F238E27FC236}">
-                <a16:creationId xmlns:a16="http://schemas.microsoft.com/office/drawing/2014/main" id="{C4795D84-4A7B-464F-BE8E-F537D4334F8A}"/>
+          <p:cNvPr id="8" name="">
+            <a:extLst xmlns:a="http://schemas.openxmlformats.org/drawingml/2006/main">
+              <a:ext uri="{FF2B5EF4-FFF2-40B4-BE49-F238E27FC236}">
+                <a16:creationId xmlns:a16="http://schemas.microsoft.com/office/drawing/2014/main" id="{F4E58DB6-55B6-486D-86F2-DD93DF3BD52A}"/>
               </a:ext>
             </a:extLst>
           </p:cNvPr>
@@ -16208,7 +16636,7 @@
                 <a:ea typeface="Arial"/>
                 <a:cs typeface="Arial"/>
               </a:rPr>
-              <a:t>The remaining Elaboration proofs</a:t>
+              <a:t>Delivered evidence and official status</a:t>
             </a:r>
           </a:p>
         </p:txBody>
@@ -16218,7 +16646,7 @@
           <p:cNvPr id="2" name="">
             <a:extLst xmlns:a="http://schemas.openxmlformats.org/drawingml/2006/main">
               <a:ext uri="{FF2B5EF4-FFF2-40B4-BE49-F238E27FC236}">
-                <a16:creationId xmlns:a16="http://schemas.microsoft.com/office/drawing/2014/main" id="{29D8F151-A05A-4656-BFDF-CCF576FDC2EE}"/>
+                <a16:creationId xmlns:a16="http://schemas.microsoft.com/office/drawing/2014/main" id="{C1F5FD3B-DA74-40CF-9E48-D9AD830A1FBC}"/>
               </a:ext>
             </a:extLst>
           </p:cNvPr>
@@ -16286,7 +16714,7 @@
           <p:cNvPr id="3" name="">
             <a:extLst xmlns:a="http://schemas.openxmlformats.org/drawingml/2006/main">
               <a:ext uri="{FF2B5EF4-FFF2-40B4-BE49-F238E27FC236}">
-                <a16:creationId xmlns:a16="http://schemas.microsoft.com/office/drawing/2014/main" id="{1421473A-5519-4FC3-B4CF-1697A3CBB7CE}"/>
+                <a16:creationId xmlns:a16="http://schemas.microsoft.com/office/drawing/2014/main" id="{0E635706-86FD-4A00-9D42-203821C04976}"/>
               </a:ext>
             </a:extLst>
           </p:cNvPr>
@@ -16298,7 +16726,7 @@
         <p:spPr>
           <a:xfrm xmlns:a="http://schemas.openxmlformats.org/drawingml/2006/main">
             <a:off x="619125" y="1619250"/>
-            <a:ext cx="10858500" cy="914400"/>
+            <a:ext cx="10858500" cy="742950"/>
           </a:xfrm>
           <a:prstGeom xmlns:a="http://schemas.openxmlformats.org/drawingml/2006/main" prst="rect">
             <a:avLst/>
@@ -16344,7 +16772,7 @@
                 <a:ea typeface="Arial"/>
                 <a:cs typeface="Arial"/>
               </a:rPr>
-              <a:t>Atomic contention: synchronized Hello competitors, exactly one winner</a:t>
+              <a:t>PBI-011.1 and 011.3: tested on the board</a:t>
             </a:r>
           </a:p>
         </p:txBody>
@@ -16354,19 +16782,19 @@
           <p:cNvPr id="4" name="">
             <a:extLst xmlns:a="http://schemas.openxmlformats.org/drawingml/2006/main">
               <a:ext uri="{FF2B5EF4-FFF2-40B4-BE49-F238E27FC236}">
-                <a16:creationId xmlns:a16="http://schemas.microsoft.com/office/drawing/2014/main" id="{602742DB-BC38-496B-98F5-8081F890F8AF}"/>
-              </a:ext>
-            </a:extLst>
-          </p:cNvPr>
-          <p:cNvSpPr>
-            <a:spLocks xmlns:a="http://schemas.openxmlformats.org/drawingml/2006/main" noGrp="1"/>
-          </p:cNvSpPr>
-          <p:nvPr/>
-        </p:nvSpPr>
-        <p:spPr>
-          <a:xfrm xmlns:a="http://schemas.openxmlformats.org/drawingml/2006/main">
-            <a:off x="619125" y="2647950"/>
-            <a:ext cx="10858500" cy="914400"/>
+                <a16:creationId xmlns:a16="http://schemas.microsoft.com/office/drawing/2014/main" id="{7E35C4BE-2864-485E-9CB8-4B3A7BA59117}"/>
+              </a:ext>
+            </a:extLst>
+          </p:cNvPr>
+          <p:cNvSpPr>
+            <a:spLocks xmlns:a="http://schemas.openxmlformats.org/drawingml/2006/main" noGrp="1"/>
+          </p:cNvSpPr>
+          <p:nvPr/>
+        </p:nvSpPr>
+        <p:spPr>
+          <a:xfrm xmlns:a="http://schemas.openxmlformats.org/drawingml/2006/main">
+            <a:off x="619125" y="2476500"/>
+            <a:ext cx="10858500" cy="742950"/>
           </a:xfrm>
           <a:prstGeom xmlns:a="http://schemas.openxmlformats.org/drawingml/2006/main" prst="rect">
             <a:avLst/>
@@ -16412,7 +16840,7 @@
                 <a:ea typeface="Arial"/>
                 <a:cs typeface="Arial"/>
               </a:rPr>
-              <a:t>Parallel work: independent Hello/World contributions and safe integration</a:t>
+              <a:t>PBI-011.2, 011.4, 011.6 and 011.7: under construction</a:t>
             </a:r>
           </a:p>
         </p:txBody>
@@ -16422,19 +16850,19 @@
           <p:cNvPr id="5" name="">
             <a:extLst xmlns:a="http://schemas.openxmlformats.org/drawingml/2006/main">
               <a:ext uri="{FF2B5EF4-FFF2-40B4-BE49-F238E27FC236}">
-                <a16:creationId xmlns:a16="http://schemas.microsoft.com/office/drawing/2014/main" id="{8F126A98-24B2-4394-8911-373455AB5BDE}"/>
-              </a:ext>
-            </a:extLst>
-          </p:cNvPr>
-          <p:cNvSpPr>
-            <a:spLocks xmlns:a="http://schemas.openxmlformats.org/drawingml/2006/main" noGrp="1"/>
-          </p:cNvSpPr>
-          <p:nvPr/>
-        </p:nvSpPr>
-        <p:spPr>
-          <a:xfrm xmlns:a="http://schemas.openxmlformats.org/drawingml/2006/main">
-            <a:off x="619125" y="3676650"/>
-            <a:ext cx="10858500" cy="914400"/>
+                <a16:creationId xmlns:a16="http://schemas.microsoft.com/office/drawing/2014/main" id="{08E482D3-B854-40DE-9119-38501B646D1A}"/>
+              </a:ext>
+            </a:extLst>
+          </p:cNvPr>
+          <p:cNvSpPr>
+            <a:spLocks xmlns:a="http://schemas.openxmlformats.org/drawingml/2006/main" noGrp="1"/>
+          </p:cNvSpPr>
+          <p:nvPr/>
+        </p:nvSpPr>
+        <p:spPr>
+          <a:xfrm xmlns:a="http://schemas.openxmlformats.org/drawingml/2006/main">
+            <a:off x="619125" y="3333750"/>
+            <a:ext cx="10858500" cy="742950"/>
           </a:xfrm>
           <a:prstGeom xmlns:a="http://schemas.openxmlformats.org/drawingml/2006/main" prst="rect">
             <a:avLst/>
@@ -16480,7 +16908,7 @@
                 <a:ea typeface="Arial"/>
                 <a:cs typeface="Arial"/>
               </a:rPr>
-              <a:t>Maintenance: stale workers, in-flight sessions and verifier revocation</a:t>
+              <a:t>PBI-011.5: under construction, with concurrent integration still unproved</a:t>
             </a:r>
           </a:p>
         </p:txBody>
@@ -16490,19 +16918,19 @@
           <p:cNvPr id="6" name="">
             <a:extLst xmlns:a="http://schemas.openxmlformats.org/drawingml/2006/main">
               <a:ext uri="{FF2B5EF4-FFF2-40B4-BE49-F238E27FC236}">
-                <a16:creationId xmlns:a16="http://schemas.microsoft.com/office/drawing/2014/main" id="{FA6D3EBB-0554-4CB6-871F-4A6B69B99029}"/>
-              </a:ext>
-            </a:extLst>
-          </p:cNvPr>
-          <p:cNvSpPr>
-            <a:spLocks xmlns:a="http://schemas.openxmlformats.org/drawingml/2006/main" noGrp="1"/>
-          </p:cNvSpPr>
-          <p:nvPr/>
-        </p:nvSpPr>
-        <p:spPr>
-          <a:xfrm xmlns:a="http://schemas.openxmlformats.org/drawingml/2006/main">
-            <a:off x="619125" y="4705350"/>
-            <a:ext cx="10858500" cy="914400"/>
+                <a16:creationId xmlns:a16="http://schemas.microsoft.com/office/drawing/2014/main" id="{F8A0BFA5-72FF-4C3D-978B-07F682D15AF9}"/>
+              </a:ext>
+            </a:extLst>
+          </p:cNvPr>
+          <p:cNvSpPr>
+            <a:spLocks xmlns:a="http://schemas.openxmlformats.org/drawingml/2006/main" noGrp="1"/>
+          </p:cNvSpPr>
+          <p:nvPr/>
+        </p:nvSpPr>
+        <p:spPr>
+          <a:xfrm xmlns:a="http://schemas.openxmlformats.org/drawingml/2006/main">
+            <a:off x="619125" y="4191000"/>
+            <a:ext cx="10858500" cy="742950"/>
           </a:xfrm>
           <a:prstGeom xmlns:a="http://schemas.openxmlformats.org/drawingml/2006/main" prst="rect">
             <a:avLst/>
@@ -16548,7 +16976,75 @@
                 <a:ea typeface="Arial"/>
                 <a:cs typeface="Arial"/>
               </a:rPr>
-              <a:t>Recovery: schema drift and one failed additive deployment with history-preserving repair</a:t>
+              <a:t>PBI-011.8: bounded additive failure/repair proved; broader acceptance remains open</a:t>
+            </a:r>
+          </a:p>
+        </p:txBody>
+      </p:sp>
+      <p:sp>
+        <p:nvSpPr>
+          <p:cNvPr id="7" name="">
+            <a:extLst xmlns:a="http://schemas.openxmlformats.org/drawingml/2006/main">
+              <a:ext uri="{FF2B5EF4-FFF2-40B4-BE49-F238E27FC236}">
+                <a16:creationId xmlns:a16="http://schemas.microsoft.com/office/drawing/2014/main" id="{5AC93A91-FD95-4435-888D-26BC54DA9C65}"/>
+              </a:ext>
+            </a:extLst>
+          </p:cNvPr>
+          <p:cNvSpPr>
+            <a:spLocks xmlns:a="http://schemas.openxmlformats.org/drawingml/2006/main" noGrp="1"/>
+          </p:cNvSpPr>
+          <p:nvPr/>
+        </p:nvSpPr>
+        <p:spPr>
+          <a:xfrm xmlns:a="http://schemas.openxmlformats.org/drawingml/2006/main">
+            <a:off x="619125" y="5429250"/>
+            <a:ext cx="10858500" cy="590550"/>
+          </a:xfrm>
+          <a:prstGeom xmlns:a="http://schemas.openxmlformats.org/drawingml/2006/main" prst="rect">
+            <a:avLst/>
+          </a:prstGeom>
+          <a:noFill xmlns:a="http://schemas.openxmlformats.org/drawingml/2006/main"/>
+          <a:ln xmlns:a="http://schemas.openxmlformats.org/drawingml/2006/main" w="0">
+            <a:noFill/>
+          </a:ln>
+        </p:spPr>
+        <p:txBody>
+          <a:bodyPr xmlns:a="http://schemas.openxmlformats.org/drawingml/2006/main" lIns="0" tIns="0" rIns="0" bIns="0" anchor="t">
+            <a:noAutofit/>
+          </a:bodyPr>
+          <a:lstStyle xmlns:a="http://schemas.openxmlformats.org/drawingml/2006/main">
+            <a:defPPr>
+              <a:defRPr sz="1875" b="0">
+                <a:solidFill>
+                  <a:srgbClr val="A43224"/>
+                </a:solidFill>
+                <a:latin typeface="Arial"/>
+                <a:ea typeface="Arial"/>
+                <a:cs typeface="Arial"/>
+              </a:defRPr>
+            </a:defPPr>
+          </a:lstStyle>
+          <a:p xmlns:a="http://schemas.openxmlformats.org/drawingml/2006/main">
+            <a:pPr>
+              <a:defRPr sz="1875" b="0">
+                <a:solidFill>
+                  <a:srgbClr val="A43224"/>
+                </a:solidFill>
+                <a:latin typeface="Arial"/>
+                <a:ea typeface="Arial"/>
+                <a:cs typeface="Arial"/>
+              </a:defRPr>
+            </a:pPr>
+            <a:r>
+              <a:rPr sz="1875" b="0">
+                <a:solidFill>
+                  <a:srgbClr val="A43224"/>
+                </a:solidFill>
+                <a:latin typeface="Arial"/>
+                <a:ea typeface="Arial"/>
+                <a:cs typeface="Arial"/>
+              </a:rPr>
+              <a:t>PBI-012–016 remain under_design. This handover proposes conclusions and follow-up, not status changes.</a:t>
             </a:r>
           </a:p>
         </p:txBody>
@@ -16556,7 +17052,7 @@
     </p:spTree>
     <p:extLst>
       <p:ext uri="{BB962C8B-B14F-4D97-AF65-F5344CB8AC3E}">
-        <p14:creationId xmlns:p14="http://schemas.microsoft.com/office/powerpoint/2010/main" val="466179017"/>
+        <p14:creationId xmlns:p14="http://schemas.microsoft.com/office/powerpoint/2010/main" val="195069105"/>
       </p:ext>
     </p:extLst>
   </p:cSld>
@@ -16587,7 +17083,7 @@
           <p:cNvPr id="7" name="">
             <a:extLst xmlns:a="http://schemas.openxmlformats.org/drawingml/2006/main">
               <a:ext uri="{FF2B5EF4-FFF2-40B4-BE49-F238E27FC236}">
-                <a16:creationId xmlns:a16="http://schemas.microsoft.com/office/drawing/2014/main" id="{FEB778BC-56D4-420B-A604-A500AA455260}"/>
+                <a16:creationId xmlns:a16="http://schemas.microsoft.com/office/drawing/2014/main" id="{7C9C3CAC-D81E-41FB-9F4E-2161C9CCEDB9}"/>
               </a:ext>
             </a:extLst>
           </p:cNvPr>
@@ -16645,7 +17141,7 @@
                 <a:ea typeface="Arial"/>
                 <a:cs typeface="Arial"/>
               </a:rPr>
-              <a:t>Recommended next step</a:t>
+              <a:t>The remaining Elaboration proofs</a:t>
             </a:r>
           </a:p>
         </p:txBody>
@@ -16655,7 +17151,7 @@
           <p:cNvPr id="2" name="">
             <a:extLst xmlns:a="http://schemas.openxmlformats.org/drawingml/2006/main">
               <a:ext uri="{FF2B5EF4-FFF2-40B4-BE49-F238E27FC236}">
-                <a16:creationId xmlns:a16="http://schemas.microsoft.com/office/drawing/2014/main" id="{A9541AE5-5000-472D-B6D8-3324EE9CF4B1}"/>
+                <a16:creationId xmlns:a16="http://schemas.microsoft.com/office/drawing/2014/main" id="{464D192C-55E0-47C5-8F24-BF6EDA12A8DE}"/>
               </a:ext>
             </a:extLst>
           </p:cNvPr>
@@ -16723,19 +17219,19 @@
           <p:cNvPr id="3" name="">
             <a:extLst xmlns:a="http://schemas.openxmlformats.org/drawingml/2006/main">
               <a:ext uri="{FF2B5EF4-FFF2-40B4-BE49-F238E27FC236}">
-                <a16:creationId xmlns:a16="http://schemas.microsoft.com/office/drawing/2014/main" id="{BC0F4ECC-0C80-4C31-9854-E179376B4383}"/>
-              </a:ext>
-            </a:extLst>
-          </p:cNvPr>
-          <p:cNvSpPr>
-            <a:spLocks xmlns:a="http://schemas.openxmlformats.org/drawingml/2006/main" noGrp="1"/>
-          </p:cNvSpPr>
-          <p:nvPr/>
-        </p:nvSpPr>
-        <p:spPr>
-          <a:xfrm xmlns:a="http://schemas.openxmlformats.org/drawingml/2006/main">
-            <a:off x="619125" y="1762125"/>
-            <a:ext cx="10858500" cy="981075"/>
+                <a16:creationId xmlns:a16="http://schemas.microsoft.com/office/drawing/2014/main" id="{0ACED3DF-37EC-41EB-B51C-A013604EF51C}"/>
+              </a:ext>
+            </a:extLst>
+          </p:cNvPr>
+          <p:cNvSpPr>
+            <a:spLocks xmlns:a="http://schemas.openxmlformats.org/drawingml/2006/main" noGrp="1"/>
+          </p:cNvSpPr>
+          <p:nvPr/>
+        </p:nvSpPr>
+        <p:spPr>
+          <a:xfrm xmlns:a="http://schemas.openxmlformats.org/drawingml/2006/main">
+            <a:off x="619125" y="1619250"/>
+            <a:ext cx="10858500" cy="914400"/>
           </a:xfrm>
           <a:prstGeom xmlns:a="http://schemas.openxmlformats.org/drawingml/2006/main" prst="rect">
             <a:avLst/>
@@ -16751,7 +17247,7 @@
           </a:bodyPr>
           <a:lstStyle xmlns:a="http://schemas.openxmlformats.org/drawingml/2006/main">
             <a:defPPr>
-              <a:defRPr sz="2325" b="0">
+              <a:defRPr sz="2100" b="0">
                 <a:solidFill>
                   <a:srgbClr val="172F3B"/>
                 </a:solidFill>
@@ -16763,25 +17259,25 @@
           </a:lstStyle>
           <a:p xmlns:a="http://schemas.openxmlformats.org/drawingml/2006/main">
             <a:pPr>
-              <a:defRPr sz="2325" b="0">
-                <a:solidFill>
-                  <a:srgbClr val="172F3B"/>
-                </a:solidFill>
-                <a:latin typeface="Arial"/>
-                <a:ea typeface="Arial"/>
-                <a:cs typeface="Arial"/>
-              </a:defRPr>
-            </a:pPr>
-            <a:r>
-              <a:rPr sz="2325" b="0">
-                <a:solidFill>
-                  <a:srgbClr val="172F3B"/>
-                </a:solidFill>
-                <a:latin typeface="Arial"/>
-                <a:ea typeface="Arial"/>
-                <a:cs typeface="Arial"/>
-              </a:rPr>
-              <a:t>Retain the demonstrated delivery and protection slice as E.1 evidence.</a:t>
+              <a:defRPr sz="2100" b="0">
+                <a:solidFill>
+                  <a:srgbClr val="172F3B"/>
+                </a:solidFill>
+                <a:latin typeface="Arial"/>
+                <a:ea typeface="Arial"/>
+                <a:cs typeface="Arial"/>
+              </a:defRPr>
+            </a:pPr>
+            <a:r>
+              <a:rPr sz="2100" b="0">
+                <a:solidFill>
+                  <a:srgbClr val="172F3B"/>
+                </a:solidFill>
+                <a:latin typeface="Arial"/>
+                <a:ea typeface="Arial"/>
+                <a:cs typeface="Arial"/>
+              </a:rPr>
+              <a:t>Atomic contention: synchronized Hello competitors, exactly one winner</a:t>
             </a:r>
           </a:p>
         </p:txBody>
@@ -16791,19 +17287,19 @@
           <p:cNvPr id="4" name="">
             <a:extLst xmlns:a="http://schemas.openxmlformats.org/drawingml/2006/main">
               <a:ext uri="{FF2B5EF4-FFF2-40B4-BE49-F238E27FC236}">
-                <a16:creationId xmlns:a16="http://schemas.microsoft.com/office/drawing/2014/main" id="{4E368FED-52CF-4960-8C57-6A57AFF8A391}"/>
-              </a:ext>
-            </a:extLst>
-          </p:cNvPr>
-          <p:cNvSpPr>
-            <a:spLocks xmlns:a="http://schemas.openxmlformats.org/drawingml/2006/main" noGrp="1"/>
-          </p:cNvSpPr>
-          <p:nvPr/>
-        </p:nvSpPr>
-        <p:spPr>
-          <a:xfrm xmlns:a="http://schemas.openxmlformats.org/drawingml/2006/main">
-            <a:off x="619125" y="2857500"/>
-            <a:ext cx="10858500" cy="981075"/>
+                <a16:creationId xmlns:a16="http://schemas.microsoft.com/office/drawing/2014/main" id="{89912618-75E3-4E1A-95F0-C06AEEF7EEF7}"/>
+              </a:ext>
+            </a:extLst>
+          </p:cNvPr>
+          <p:cNvSpPr>
+            <a:spLocks xmlns:a="http://schemas.openxmlformats.org/drawingml/2006/main" noGrp="1"/>
+          </p:cNvSpPr>
+          <p:nvPr/>
+        </p:nvSpPr>
+        <p:spPr>
+          <a:xfrm xmlns:a="http://schemas.openxmlformats.org/drawingml/2006/main">
+            <a:off x="619125" y="2647950"/>
+            <a:ext cx="10858500" cy="914400"/>
           </a:xfrm>
           <a:prstGeom xmlns:a="http://schemas.openxmlformats.org/drawingml/2006/main" prst="rect">
             <a:avLst/>
@@ -16819,7 +17315,7 @@
           </a:bodyPr>
           <a:lstStyle xmlns:a="http://schemas.openxmlformats.org/drawingml/2006/main">
             <a:defPPr>
-              <a:defRPr sz="2325" b="0">
+              <a:defRPr sz="2100" b="0">
                 <a:solidFill>
                   <a:srgbClr val="172F3B"/>
                 </a:solidFill>
@@ -16831,25 +17327,25 @@
           </a:lstStyle>
           <a:p xmlns:a="http://schemas.openxmlformats.org/drawingml/2006/main">
             <a:pPr>
-              <a:defRPr sz="2325" b="0">
-                <a:solidFill>
-                  <a:srgbClr val="172F3B"/>
-                </a:solidFill>
-                <a:latin typeface="Arial"/>
-                <a:ea typeface="Arial"/>
-                <a:cs typeface="Arial"/>
-              </a:defRPr>
-            </a:pPr>
-            <a:r>
-              <a:rPr sz="2325" b="0">
-                <a:solidFill>
-                  <a:srgbClr val="172F3B"/>
-                </a:solidFill>
-                <a:latin typeface="Arial"/>
-                <a:ea typeface="Arial"/>
-                <a:cs typeface="Arial"/>
-              </a:rPr>
-              <a:t>Run one bounded Elaboration follow-up for concurrency, fencing and forward repair.</a:t>
+              <a:defRPr sz="2100" b="0">
+                <a:solidFill>
+                  <a:srgbClr val="172F3B"/>
+                </a:solidFill>
+                <a:latin typeface="Arial"/>
+                <a:ea typeface="Arial"/>
+                <a:cs typeface="Arial"/>
+              </a:defRPr>
+            </a:pPr>
+            <a:r>
+              <a:rPr sz="2100" b="0">
+                <a:solidFill>
+                  <a:srgbClr val="172F3B"/>
+                </a:solidFill>
+                <a:latin typeface="Arial"/>
+                <a:ea typeface="Arial"/>
+                <a:cs typeface="Arial"/>
+              </a:rPr>
+              <a:t>Parallel work: independent Hello/World contributions and safe integration</a:t>
             </a:r>
           </a:p>
         </p:txBody>
@@ -16859,19 +17355,19 @@
           <p:cNvPr id="5" name="">
             <a:extLst xmlns:a="http://schemas.openxmlformats.org/drawingml/2006/main">
               <a:ext uri="{FF2B5EF4-FFF2-40B4-BE49-F238E27FC236}">
-                <a16:creationId xmlns:a16="http://schemas.microsoft.com/office/drawing/2014/main" id="{63A21561-34AB-497D-897D-55CE8D74EAD6}"/>
-              </a:ext>
-            </a:extLst>
-          </p:cNvPr>
-          <p:cNvSpPr>
-            <a:spLocks xmlns:a="http://schemas.openxmlformats.org/drawingml/2006/main" noGrp="1"/>
-          </p:cNvSpPr>
-          <p:nvPr/>
-        </p:nvSpPr>
-        <p:spPr>
-          <a:xfrm xmlns:a="http://schemas.openxmlformats.org/drawingml/2006/main">
-            <a:off x="619125" y="3952875"/>
-            <a:ext cx="10858500" cy="981075"/>
+                <a16:creationId xmlns:a16="http://schemas.microsoft.com/office/drawing/2014/main" id="{BAA3D4EF-5D56-46A9-AE02-1DAB5241A27E}"/>
+              </a:ext>
+            </a:extLst>
+          </p:cNvPr>
+          <p:cNvSpPr>
+            <a:spLocks xmlns:a="http://schemas.openxmlformats.org/drawingml/2006/main" noGrp="1"/>
+          </p:cNvSpPr>
+          <p:nvPr/>
+        </p:nvSpPr>
+        <p:spPr>
+          <a:xfrm xmlns:a="http://schemas.openxmlformats.org/drawingml/2006/main">
+            <a:off x="619125" y="3676650"/>
+            <a:ext cx="10858500" cy="914400"/>
           </a:xfrm>
           <a:prstGeom xmlns:a="http://schemas.openxmlformats.org/drawingml/2006/main" prst="rect">
             <a:avLst/>
@@ -16887,7 +17383,7 @@
           </a:bodyPr>
           <a:lstStyle xmlns:a="http://schemas.openxmlformats.org/drawingml/2006/main">
             <a:defPPr>
-              <a:defRPr sz="2325" b="0">
+              <a:defRPr sz="2100" b="0">
                 <a:solidFill>
                   <a:srgbClr val="172F3B"/>
                 </a:solidFill>
@@ -16899,25 +17395,25 @@
           </a:lstStyle>
           <a:p xmlns:a="http://schemas.openxmlformats.org/drawingml/2006/main">
             <a:pPr>
-              <a:defRPr sz="2325" b="0">
-                <a:solidFill>
-                  <a:srgbClr val="172F3B"/>
-                </a:solidFill>
-                <a:latin typeface="Arial"/>
-                <a:ea typeface="Arial"/>
-                <a:cs typeface="Arial"/>
-              </a:defRPr>
-            </a:pPr>
-            <a:r>
-              <a:rPr sz="2325" b="0">
-                <a:solidFill>
-                  <a:srgbClr val="172F3B"/>
-                </a:solidFill>
-                <a:latin typeface="Arial"/>
-                <a:ea typeface="Arial"/>
-                <a:cs typeface="Arial"/>
-              </a:rPr>
-              <a:t>Reassess Lifecycle Architecture before committing to full Construction.</a:t>
+              <a:defRPr sz="2100" b="0">
+                <a:solidFill>
+                  <a:srgbClr val="172F3B"/>
+                </a:solidFill>
+                <a:latin typeface="Arial"/>
+                <a:ea typeface="Arial"/>
+                <a:cs typeface="Arial"/>
+              </a:defRPr>
+            </a:pPr>
+            <a:r>
+              <a:rPr sz="2100" b="0">
+                <a:solidFill>
+                  <a:srgbClr val="172F3B"/>
+                </a:solidFill>
+                <a:latin typeface="Arial"/>
+                <a:ea typeface="Arial"/>
+                <a:cs typeface="Arial"/>
+              </a:rPr>
+              <a:t>Maintenance: stale workers, in-flight sessions and verifier revocation</a:t>
             </a:r>
           </a:p>
         </p:txBody>
@@ -16927,19 +17423,19 @@
           <p:cNvPr id="6" name="">
             <a:extLst xmlns:a="http://schemas.openxmlformats.org/drawingml/2006/main">
               <a:ext uri="{FF2B5EF4-FFF2-40B4-BE49-F238E27FC236}">
-                <a16:creationId xmlns:a16="http://schemas.microsoft.com/office/drawing/2014/main" id="{A92D1DB0-D7BF-4A48-95F8-6BC80AAECE07}"/>
-              </a:ext>
-            </a:extLst>
-          </p:cNvPr>
-          <p:cNvSpPr>
-            <a:spLocks xmlns:a="http://schemas.openxmlformats.org/drawingml/2006/main" noGrp="1"/>
-          </p:cNvSpPr>
-          <p:nvPr/>
-        </p:nvSpPr>
-        <p:spPr>
-          <a:xfrm xmlns:a="http://schemas.openxmlformats.org/drawingml/2006/main">
-            <a:off x="619125" y="5715000"/>
-            <a:ext cx="10858500" cy="590550"/>
+                <a16:creationId xmlns:a16="http://schemas.microsoft.com/office/drawing/2014/main" id="{9056DD3B-7817-4557-8B41-D7896CCE2426}"/>
+              </a:ext>
+            </a:extLst>
+          </p:cNvPr>
+          <p:cNvSpPr>
+            <a:spLocks xmlns:a="http://schemas.openxmlformats.org/drawingml/2006/main" noGrp="1"/>
+          </p:cNvSpPr>
+          <p:nvPr/>
+        </p:nvSpPr>
+        <p:spPr>
+          <a:xfrm xmlns:a="http://schemas.openxmlformats.org/drawingml/2006/main">
+            <a:off x="619125" y="4705350"/>
+            <a:ext cx="10858500" cy="914400"/>
           </a:xfrm>
           <a:prstGeom xmlns:a="http://schemas.openxmlformats.org/drawingml/2006/main" prst="rect">
             <a:avLst/>
@@ -16955,9 +17451,9 @@
           </a:bodyPr>
           <a:lstStyle xmlns:a="http://schemas.openxmlformats.org/drawingml/2006/main">
             <a:defPPr>
-              <a:defRPr sz="1800" b="0">
-                <a:solidFill>
-                  <a:srgbClr val="52636B"/>
+              <a:defRPr sz="2100" b="0">
+                <a:solidFill>
+                  <a:srgbClr val="172F3B"/>
                 </a:solidFill>
                 <a:latin typeface="Arial"/>
                 <a:ea typeface="Arial"/>
@@ -16967,25 +17463,25 @@
           </a:lstStyle>
           <a:p xmlns:a="http://schemas.openxmlformats.org/drawingml/2006/main">
             <a:pPr>
-              <a:defRPr sz="1800" b="0">
-                <a:solidFill>
-                  <a:srgbClr val="52636B"/>
-                </a:solidFill>
-                <a:latin typeface="Arial"/>
-                <a:ea typeface="Arial"/>
-                <a:cs typeface="Arial"/>
-              </a:defRPr>
-            </a:pPr>
-            <a:r>
-              <a:rPr sz="1800" b="0">
-                <a:solidFill>
-                  <a:srgbClr val="52636B"/>
-                </a:solidFill>
-                <a:latin typeface="Arial"/>
-                <a:ea typeface="Arial"/>
-                <a:cs typeface="Arial"/>
-              </a:rPr>
-              <a:t>A follow-up sprint and revised scope require Product Owner selection. No new sprint is activated here.</a:t>
+              <a:defRPr sz="2100" b="0">
+                <a:solidFill>
+                  <a:srgbClr val="172F3B"/>
+                </a:solidFill>
+                <a:latin typeface="Arial"/>
+                <a:ea typeface="Arial"/>
+                <a:cs typeface="Arial"/>
+              </a:defRPr>
+            </a:pPr>
+            <a:r>
+              <a:rPr sz="2100" b="0">
+                <a:solidFill>
+                  <a:srgbClr val="172F3B"/>
+                </a:solidFill>
+                <a:latin typeface="Arial"/>
+                <a:ea typeface="Arial"/>
+                <a:cs typeface="Arial"/>
+              </a:rPr>
+              <a:t>Recovery: broader schema drift and unsupported partial database states</a:t>
             </a:r>
           </a:p>
         </p:txBody>
@@ -16993,7 +17489,7 @@
     </p:spTree>
     <p:extLst>
       <p:ext uri="{BB962C8B-B14F-4D97-AF65-F5344CB8AC3E}">
-        <p14:creationId xmlns:p14="http://schemas.microsoft.com/office/powerpoint/2010/main" val="733766751"/>
+        <p14:creationId xmlns:p14="http://schemas.microsoft.com/office/powerpoint/2010/main" val="1362544159"/>
       </p:ext>
     </p:extLst>
   </p:cSld>
@@ -17001,6 +17497,443 @@
 </file>
 
 <file path=ppt/slides/slide28.xml><?xml version="1.0" encoding="utf-8"?>
+<p:sld xmlns:p="http://schemas.openxmlformats.org/presentationml/2006/main">
+  <p:cSld>
+    <p:bg>
+      <p:bgPr>
+        <a:solidFill xmlns:a="http://schemas.openxmlformats.org/drawingml/2006/main">
+          <a:srgbClr val="FFFFFF"/>
+        </a:solidFill>
+      </p:bgPr>
+    </p:bg>
+    <p:spTree>
+      <p:nvGrpSpPr>
+        <p:cNvPr id="1" name=""/>
+        <p:cNvGrpSpPr/>
+        <p:nvPr/>
+      </p:nvGrpSpPr>
+      <p:grpSpPr>
+        <a:xfrm xmlns:a="http://schemas.openxmlformats.org/drawingml/2006/main"/>
+      </p:grpSpPr>
+      <p:sp>
+        <p:nvSpPr>
+          <p:cNvPr id="7" name="">
+            <a:extLst xmlns:a="http://schemas.openxmlformats.org/drawingml/2006/main">
+              <a:ext uri="{FF2B5EF4-FFF2-40B4-BE49-F238E27FC236}">
+                <a16:creationId xmlns:a16="http://schemas.microsoft.com/office/drawing/2014/main" id="{423EF0F2-BD9D-4109-8BCC-27752FD6E4BA}"/>
+              </a:ext>
+            </a:extLst>
+          </p:cNvPr>
+          <p:cNvSpPr>
+            <a:spLocks xmlns:a="http://schemas.openxmlformats.org/drawingml/2006/main" noGrp="1"/>
+          </p:cNvSpPr>
+          <p:nvPr/>
+        </p:nvSpPr>
+        <p:spPr>
+          <a:xfrm xmlns:a="http://schemas.openxmlformats.org/drawingml/2006/main">
+            <a:off x="571500" y="428625"/>
+            <a:ext cx="11049000" cy="952500"/>
+          </a:xfrm>
+          <a:prstGeom xmlns:a="http://schemas.openxmlformats.org/drawingml/2006/main" prst="rect">
+            <a:avLst/>
+          </a:prstGeom>
+          <a:noFill xmlns:a="http://schemas.openxmlformats.org/drawingml/2006/main"/>
+          <a:ln xmlns:a="http://schemas.openxmlformats.org/drawingml/2006/main" w="0">
+            <a:noFill/>
+          </a:ln>
+        </p:spPr>
+        <p:txBody>
+          <a:bodyPr xmlns:a="http://schemas.openxmlformats.org/drawingml/2006/main" lIns="0" tIns="0" rIns="0" bIns="0" anchor="t">
+            <a:noAutofit/>
+          </a:bodyPr>
+          <a:lstStyle xmlns:a="http://schemas.openxmlformats.org/drawingml/2006/main">
+            <a:defPPr>
+              <a:defRPr sz="3450" b="1">
+                <a:solidFill>
+                  <a:srgbClr val="172F3B"/>
+                </a:solidFill>
+                <a:latin typeface="Arial"/>
+                <a:ea typeface="Arial"/>
+                <a:cs typeface="Arial"/>
+              </a:defRPr>
+            </a:defPPr>
+          </a:lstStyle>
+          <a:p xmlns:a="http://schemas.openxmlformats.org/drawingml/2006/main">
+            <a:pPr>
+              <a:defRPr sz="3450" b="1">
+                <a:solidFill>
+                  <a:srgbClr val="172F3B"/>
+                </a:solidFill>
+                <a:latin typeface="Arial"/>
+                <a:ea typeface="Arial"/>
+                <a:cs typeface="Arial"/>
+              </a:defRPr>
+            </a:pPr>
+            <a:r>
+              <a:rPr sz="3450" b="1">
+                <a:solidFill>
+                  <a:srgbClr val="172F3B"/>
+                </a:solidFill>
+                <a:latin typeface="Arial"/>
+                <a:ea typeface="Arial"/>
+                <a:cs typeface="Arial"/>
+              </a:rPr>
+              <a:t>Recommended next step</a:t>
+            </a:r>
+          </a:p>
+        </p:txBody>
+      </p:sp>
+      <p:sp>
+        <p:nvSpPr>
+          <p:cNvPr id="2" name="">
+            <a:extLst xmlns:a="http://schemas.openxmlformats.org/drawingml/2006/main">
+              <a:ext uri="{FF2B5EF4-FFF2-40B4-BE49-F238E27FC236}">
+                <a16:creationId xmlns:a16="http://schemas.microsoft.com/office/drawing/2014/main" id="{17FB3E60-6CD6-480A-97A7-50C38829233D}"/>
+              </a:ext>
+            </a:extLst>
+          </p:cNvPr>
+          <p:cNvSpPr>
+            <a:spLocks xmlns:a="http://schemas.openxmlformats.org/drawingml/2006/main" noGrp="1"/>
+          </p:cNvSpPr>
+          <p:nvPr/>
+        </p:nvSpPr>
+        <p:spPr>
+          <a:xfrm xmlns:a="http://schemas.openxmlformats.org/drawingml/2006/main">
+            <a:off x="11239500" y="6448425"/>
+            <a:ext cx="428625" cy="238125"/>
+          </a:xfrm>
+          <a:prstGeom xmlns:a="http://schemas.openxmlformats.org/drawingml/2006/main" prst="rect">
+            <a:avLst/>
+          </a:prstGeom>
+          <a:noFill xmlns:a="http://schemas.openxmlformats.org/drawingml/2006/main"/>
+          <a:ln xmlns:a="http://schemas.openxmlformats.org/drawingml/2006/main" w="0">
+            <a:noFill/>
+          </a:ln>
+        </p:spPr>
+        <p:txBody>
+          <a:bodyPr xmlns:a="http://schemas.openxmlformats.org/drawingml/2006/main" lIns="0" tIns="0" rIns="0" bIns="0" anchor="t">
+            <a:noAutofit/>
+          </a:bodyPr>
+          <a:lstStyle xmlns:a="http://schemas.openxmlformats.org/drawingml/2006/main">
+            <a:defPPr>
+              <a:defRPr sz="1350" b="0">
+                <a:solidFill>
+                  <a:srgbClr val="52636B"/>
+                </a:solidFill>
+                <a:latin typeface="Arial"/>
+                <a:ea typeface="Arial"/>
+                <a:cs typeface="Arial"/>
+              </a:defRPr>
+            </a:defPPr>
+          </a:lstStyle>
+          <a:p xmlns:a="http://schemas.openxmlformats.org/drawingml/2006/main">
+            <a:pPr>
+              <a:defRPr sz="1350" b="0">
+                <a:solidFill>
+                  <a:srgbClr val="52636B"/>
+                </a:solidFill>
+                <a:latin typeface="Arial"/>
+                <a:ea typeface="Arial"/>
+                <a:cs typeface="Arial"/>
+              </a:defRPr>
+            </a:pPr>
+            <a:r>
+              <a:rPr sz="1350" b="0">
+                <a:solidFill>
+                  <a:srgbClr val="52636B"/>
+                </a:solidFill>
+                <a:latin typeface="Arial"/>
+                <a:ea typeface="Arial"/>
+                <a:cs typeface="Arial"/>
+              </a:rPr>
+              <a:t>28</a:t>
+            </a:r>
+          </a:p>
+        </p:txBody>
+      </p:sp>
+      <p:sp>
+        <p:nvSpPr>
+          <p:cNvPr id="3" name="">
+            <a:extLst xmlns:a="http://schemas.openxmlformats.org/drawingml/2006/main">
+              <a:ext uri="{FF2B5EF4-FFF2-40B4-BE49-F238E27FC236}">
+                <a16:creationId xmlns:a16="http://schemas.microsoft.com/office/drawing/2014/main" id="{7B1296DA-D35F-4425-8427-662EF04536BD}"/>
+              </a:ext>
+            </a:extLst>
+          </p:cNvPr>
+          <p:cNvSpPr>
+            <a:spLocks xmlns:a="http://schemas.openxmlformats.org/drawingml/2006/main" noGrp="1"/>
+          </p:cNvSpPr>
+          <p:nvPr/>
+        </p:nvSpPr>
+        <p:spPr>
+          <a:xfrm xmlns:a="http://schemas.openxmlformats.org/drawingml/2006/main">
+            <a:off x="619125" y="1762125"/>
+            <a:ext cx="10858500" cy="981075"/>
+          </a:xfrm>
+          <a:prstGeom xmlns:a="http://schemas.openxmlformats.org/drawingml/2006/main" prst="rect">
+            <a:avLst/>
+          </a:prstGeom>
+          <a:noFill xmlns:a="http://schemas.openxmlformats.org/drawingml/2006/main"/>
+          <a:ln xmlns:a="http://schemas.openxmlformats.org/drawingml/2006/main" w="0">
+            <a:noFill/>
+          </a:ln>
+        </p:spPr>
+        <p:txBody>
+          <a:bodyPr xmlns:a="http://schemas.openxmlformats.org/drawingml/2006/main" lIns="0" tIns="0" rIns="0" bIns="0" anchor="t">
+            <a:noAutofit/>
+          </a:bodyPr>
+          <a:lstStyle xmlns:a="http://schemas.openxmlformats.org/drawingml/2006/main">
+            <a:defPPr>
+              <a:defRPr sz="2325" b="0">
+                <a:solidFill>
+                  <a:srgbClr val="172F3B"/>
+                </a:solidFill>
+                <a:latin typeface="Arial"/>
+                <a:ea typeface="Arial"/>
+                <a:cs typeface="Arial"/>
+              </a:defRPr>
+            </a:defPPr>
+          </a:lstStyle>
+          <a:p xmlns:a="http://schemas.openxmlformats.org/drawingml/2006/main">
+            <a:pPr>
+              <a:defRPr sz="2325" b="0">
+                <a:solidFill>
+                  <a:srgbClr val="172F3B"/>
+                </a:solidFill>
+                <a:latin typeface="Arial"/>
+                <a:ea typeface="Arial"/>
+                <a:cs typeface="Arial"/>
+              </a:defRPr>
+            </a:pPr>
+            <a:r>
+              <a:rPr sz="2325" b="0">
+                <a:solidFill>
+                  <a:srgbClr val="172F3B"/>
+                </a:solidFill>
+                <a:latin typeface="Arial"/>
+                <a:ea typeface="Arial"/>
+                <a:cs typeface="Arial"/>
+              </a:rPr>
+              <a:t>Retain the demonstrated delivery and protection slice as E.1 evidence.</a:t>
+            </a:r>
+          </a:p>
+        </p:txBody>
+      </p:sp>
+      <p:sp>
+        <p:nvSpPr>
+          <p:cNvPr id="4" name="">
+            <a:extLst xmlns:a="http://schemas.openxmlformats.org/drawingml/2006/main">
+              <a:ext uri="{FF2B5EF4-FFF2-40B4-BE49-F238E27FC236}">
+                <a16:creationId xmlns:a16="http://schemas.microsoft.com/office/drawing/2014/main" id="{BEF2F16A-3261-4FF6-9EBA-317229C68741}"/>
+              </a:ext>
+            </a:extLst>
+          </p:cNvPr>
+          <p:cNvSpPr>
+            <a:spLocks xmlns:a="http://schemas.openxmlformats.org/drawingml/2006/main" noGrp="1"/>
+          </p:cNvSpPr>
+          <p:nvPr/>
+        </p:nvSpPr>
+        <p:spPr>
+          <a:xfrm xmlns:a="http://schemas.openxmlformats.org/drawingml/2006/main">
+            <a:off x="619125" y="2857500"/>
+            <a:ext cx="10858500" cy="981075"/>
+          </a:xfrm>
+          <a:prstGeom xmlns:a="http://schemas.openxmlformats.org/drawingml/2006/main" prst="rect">
+            <a:avLst/>
+          </a:prstGeom>
+          <a:noFill xmlns:a="http://schemas.openxmlformats.org/drawingml/2006/main"/>
+          <a:ln xmlns:a="http://schemas.openxmlformats.org/drawingml/2006/main" w="0">
+            <a:noFill/>
+          </a:ln>
+        </p:spPr>
+        <p:txBody>
+          <a:bodyPr xmlns:a="http://schemas.openxmlformats.org/drawingml/2006/main" lIns="0" tIns="0" rIns="0" bIns="0" anchor="t">
+            <a:noAutofit/>
+          </a:bodyPr>
+          <a:lstStyle xmlns:a="http://schemas.openxmlformats.org/drawingml/2006/main">
+            <a:defPPr>
+              <a:defRPr sz="2325" b="0">
+                <a:solidFill>
+                  <a:srgbClr val="172F3B"/>
+                </a:solidFill>
+                <a:latin typeface="Arial"/>
+                <a:ea typeface="Arial"/>
+                <a:cs typeface="Arial"/>
+              </a:defRPr>
+            </a:defPPr>
+          </a:lstStyle>
+          <a:p xmlns:a="http://schemas.openxmlformats.org/drawingml/2006/main">
+            <a:pPr>
+              <a:defRPr sz="2325" b="0">
+                <a:solidFill>
+                  <a:srgbClr val="172F3B"/>
+                </a:solidFill>
+                <a:latin typeface="Arial"/>
+                <a:ea typeface="Arial"/>
+                <a:cs typeface="Arial"/>
+              </a:defRPr>
+            </a:pPr>
+            <a:r>
+              <a:rPr sz="2325" b="0">
+                <a:solidFill>
+                  <a:srgbClr val="172F3B"/>
+                </a:solidFill>
+                <a:latin typeface="Arial"/>
+                <a:ea typeface="Arial"/>
+                <a:cs typeface="Arial"/>
+              </a:rPr>
+              <a:t>Run one bounded Elaboration follow-up for concurrency, fencing and broader drift controls.</a:t>
+            </a:r>
+          </a:p>
+        </p:txBody>
+      </p:sp>
+      <p:sp>
+        <p:nvSpPr>
+          <p:cNvPr id="5" name="">
+            <a:extLst xmlns:a="http://schemas.openxmlformats.org/drawingml/2006/main">
+              <a:ext uri="{FF2B5EF4-FFF2-40B4-BE49-F238E27FC236}">
+                <a16:creationId xmlns:a16="http://schemas.microsoft.com/office/drawing/2014/main" id="{F0B71108-1BBF-48E0-A88E-5C19378BA2D3}"/>
+              </a:ext>
+            </a:extLst>
+          </p:cNvPr>
+          <p:cNvSpPr>
+            <a:spLocks xmlns:a="http://schemas.openxmlformats.org/drawingml/2006/main" noGrp="1"/>
+          </p:cNvSpPr>
+          <p:nvPr/>
+        </p:nvSpPr>
+        <p:spPr>
+          <a:xfrm xmlns:a="http://schemas.openxmlformats.org/drawingml/2006/main">
+            <a:off x="619125" y="3952875"/>
+            <a:ext cx="10858500" cy="981075"/>
+          </a:xfrm>
+          <a:prstGeom xmlns:a="http://schemas.openxmlformats.org/drawingml/2006/main" prst="rect">
+            <a:avLst/>
+          </a:prstGeom>
+          <a:noFill xmlns:a="http://schemas.openxmlformats.org/drawingml/2006/main"/>
+          <a:ln xmlns:a="http://schemas.openxmlformats.org/drawingml/2006/main" w="0">
+            <a:noFill/>
+          </a:ln>
+        </p:spPr>
+        <p:txBody>
+          <a:bodyPr xmlns:a="http://schemas.openxmlformats.org/drawingml/2006/main" lIns="0" tIns="0" rIns="0" bIns="0" anchor="t">
+            <a:noAutofit/>
+          </a:bodyPr>
+          <a:lstStyle xmlns:a="http://schemas.openxmlformats.org/drawingml/2006/main">
+            <a:defPPr>
+              <a:defRPr sz="2325" b="0">
+                <a:solidFill>
+                  <a:srgbClr val="172F3B"/>
+                </a:solidFill>
+                <a:latin typeface="Arial"/>
+                <a:ea typeface="Arial"/>
+                <a:cs typeface="Arial"/>
+              </a:defRPr>
+            </a:defPPr>
+          </a:lstStyle>
+          <a:p xmlns:a="http://schemas.openxmlformats.org/drawingml/2006/main">
+            <a:pPr>
+              <a:defRPr sz="2325" b="0">
+                <a:solidFill>
+                  <a:srgbClr val="172F3B"/>
+                </a:solidFill>
+                <a:latin typeface="Arial"/>
+                <a:ea typeface="Arial"/>
+                <a:cs typeface="Arial"/>
+              </a:defRPr>
+            </a:pPr>
+            <a:r>
+              <a:rPr sz="2325" b="0">
+                <a:solidFill>
+                  <a:srgbClr val="172F3B"/>
+                </a:solidFill>
+                <a:latin typeface="Arial"/>
+                <a:ea typeface="Arial"/>
+                <a:cs typeface="Arial"/>
+              </a:rPr>
+              <a:t>Reassess Lifecycle Architecture before committing to full Construction.</a:t>
+            </a:r>
+          </a:p>
+        </p:txBody>
+      </p:sp>
+      <p:sp>
+        <p:nvSpPr>
+          <p:cNvPr id="6" name="">
+            <a:extLst xmlns:a="http://schemas.openxmlformats.org/drawingml/2006/main">
+              <a:ext uri="{FF2B5EF4-FFF2-40B4-BE49-F238E27FC236}">
+                <a16:creationId xmlns:a16="http://schemas.microsoft.com/office/drawing/2014/main" id="{3E218EE8-CBB3-4CA3-8271-05FD4D315674}"/>
+              </a:ext>
+            </a:extLst>
+          </p:cNvPr>
+          <p:cNvSpPr>
+            <a:spLocks xmlns:a="http://schemas.openxmlformats.org/drawingml/2006/main" noGrp="1"/>
+          </p:cNvSpPr>
+          <p:nvPr/>
+        </p:nvSpPr>
+        <p:spPr>
+          <a:xfrm xmlns:a="http://schemas.openxmlformats.org/drawingml/2006/main">
+            <a:off x="619125" y="5715000"/>
+            <a:ext cx="10858500" cy="590550"/>
+          </a:xfrm>
+          <a:prstGeom xmlns:a="http://schemas.openxmlformats.org/drawingml/2006/main" prst="rect">
+            <a:avLst/>
+          </a:prstGeom>
+          <a:noFill xmlns:a="http://schemas.openxmlformats.org/drawingml/2006/main"/>
+          <a:ln xmlns:a="http://schemas.openxmlformats.org/drawingml/2006/main" w="0">
+            <a:noFill/>
+          </a:ln>
+        </p:spPr>
+        <p:txBody>
+          <a:bodyPr xmlns:a="http://schemas.openxmlformats.org/drawingml/2006/main" lIns="0" tIns="0" rIns="0" bIns="0" anchor="t">
+            <a:noAutofit/>
+          </a:bodyPr>
+          <a:lstStyle xmlns:a="http://schemas.openxmlformats.org/drawingml/2006/main">
+            <a:defPPr>
+              <a:defRPr sz="1800" b="0">
+                <a:solidFill>
+                  <a:srgbClr val="52636B"/>
+                </a:solidFill>
+                <a:latin typeface="Arial"/>
+                <a:ea typeface="Arial"/>
+                <a:cs typeface="Arial"/>
+              </a:defRPr>
+            </a:defPPr>
+          </a:lstStyle>
+          <a:p xmlns:a="http://schemas.openxmlformats.org/drawingml/2006/main">
+            <a:pPr>
+              <a:defRPr sz="1800" b="0">
+                <a:solidFill>
+                  <a:srgbClr val="52636B"/>
+                </a:solidFill>
+                <a:latin typeface="Arial"/>
+                <a:ea typeface="Arial"/>
+                <a:cs typeface="Arial"/>
+              </a:defRPr>
+            </a:pPr>
+            <a:r>
+              <a:rPr sz="1800" b="0">
+                <a:solidFill>
+                  <a:srgbClr val="52636B"/>
+                </a:solidFill>
+                <a:latin typeface="Arial"/>
+                <a:ea typeface="Arial"/>
+                <a:cs typeface="Arial"/>
+              </a:rPr>
+              <a:t>A follow-up sprint and revised scope require Product Owner selection. No new sprint is activated here.</a:t>
+            </a:r>
+          </a:p>
+        </p:txBody>
+      </p:sp>
+    </p:spTree>
+    <p:extLst>
+      <p:ext uri="{BB962C8B-B14F-4D97-AF65-F5344CB8AC3E}">
+        <p14:creationId xmlns:p14="http://schemas.microsoft.com/office/powerpoint/2010/main" val="1807015777"/>
+      </p:ext>
+    </p:extLst>
+  </p:cSld>
+</p:sld>
+</file>
+
+<file path=ppt/slides/slide29.xml><?xml version="1.0" encoding="utf-8"?>
 <p:sld xmlns:p="http://schemas.openxmlformats.org/presentationml/2006/main">
   <p:cSld>
     <p:bg>
@@ -17024,7 +17957,7 @@
           <p:cNvPr id="7" name="">
             <a:extLst xmlns:a="http://schemas.openxmlformats.org/drawingml/2006/main">
               <a:ext uri="{FF2B5EF4-FFF2-40B4-BE49-F238E27FC236}">
-                <a16:creationId xmlns:a16="http://schemas.microsoft.com/office/drawing/2014/main" id="{205C770F-B4C1-404E-91FF-5FB27897A8B3}"/>
+                <a16:creationId xmlns:a16="http://schemas.microsoft.com/office/drawing/2014/main" id="{C8E18BB7-C79E-4E09-999A-7800B26D0AD4}"/>
               </a:ext>
             </a:extLst>
           </p:cNvPr>
@@ -17092,7 +18025,7 @@
           <p:cNvPr id="2" name="">
             <a:extLst xmlns:a="http://schemas.openxmlformats.org/drawingml/2006/main">
               <a:ext uri="{FF2B5EF4-FFF2-40B4-BE49-F238E27FC236}">
-                <a16:creationId xmlns:a16="http://schemas.microsoft.com/office/drawing/2014/main" id="{7119A628-6561-455B-9617-DE4F658B0817}"/>
+                <a16:creationId xmlns:a16="http://schemas.microsoft.com/office/drawing/2014/main" id="{2D68B889-18DD-4131-973B-C410009A013F}"/>
               </a:ext>
             </a:extLst>
           </p:cNvPr>
@@ -17150,7 +18083,7 @@
                 <a:ea typeface="Arial"/>
                 <a:cs typeface="Arial"/>
               </a:rPr>
-              <a:t>28</a:t>
+              <a:t>29</a:t>
             </a:r>
           </a:p>
         </p:txBody>
@@ -17160,7 +18093,7 @@
           <p:cNvPr id="3" name="">
             <a:extLst xmlns:a="http://schemas.openxmlformats.org/drawingml/2006/main">
               <a:ext uri="{FF2B5EF4-FFF2-40B4-BE49-F238E27FC236}">
-                <a16:creationId xmlns:a16="http://schemas.microsoft.com/office/drawing/2014/main" id="{6B60A89A-490E-4622-887C-6F44B285F771}"/>
+                <a16:creationId xmlns:a16="http://schemas.microsoft.com/office/drawing/2014/main" id="{79B81595-393F-42A7-BAA6-1A2FA4D58E43}"/>
               </a:ext>
             </a:extLst>
           </p:cNvPr>
@@ -17218,7 +18151,7 @@
                 <a:ea typeface="Arial"/>
                 <a:cs typeface="Arial"/>
               </a:rPr>
-              <a:t>Does the handover explain and demonstrate the selected A–H outcomes?</a:t>
+              <a:t>Does the handover explain and demonstrate the selected A–I outcomes?</a:t>
             </a:r>
           </a:p>
         </p:txBody>
@@ -17228,7 +18161,7 @@
           <p:cNvPr id="4" name="">
             <a:extLst xmlns:a="http://schemas.openxmlformats.org/drawingml/2006/main">
               <a:ext uri="{FF2B5EF4-FFF2-40B4-BE49-F238E27FC236}">
-                <a16:creationId xmlns:a16="http://schemas.microsoft.com/office/drawing/2014/main" id="{91E9870A-37E0-4CC9-BE59-24AF27C28362}"/>
+                <a16:creationId xmlns:a16="http://schemas.microsoft.com/office/drawing/2014/main" id="{16568A1B-A79E-4CB4-B527-A98BE3531398}"/>
               </a:ext>
             </a:extLst>
           </p:cNvPr>
@@ -17296,7 +18229,7 @@
           <p:cNvPr id="5" name="">
             <a:extLst xmlns:a="http://schemas.openxmlformats.org/drawingml/2006/main">
               <a:ext uri="{FF2B5EF4-FFF2-40B4-BE49-F238E27FC236}">
-                <a16:creationId xmlns:a16="http://schemas.microsoft.com/office/drawing/2014/main" id="{A5D7B702-CE12-466B-B08E-45B907AE8E98}"/>
+                <a16:creationId xmlns:a16="http://schemas.microsoft.com/office/drawing/2014/main" id="{E8D794CC-F872-4D1B-A0A2-C670E75BDB26}"/>
               </a:ext>
             </a:extLst>
           </p:cNvPr>
@@ -17364,7 +18297,7 @@
           <p:cNvPr id="6" name="">
             <a:extLst xmlns:a="http://schemas.openxmlformats.org/drawingml/2006/main">
               <a:ext uri="{FF2B5EF4-FFF2-40B4-BE49-F238E27FC236}">
-                <a16:creationId xmlns:a16="http://schemas.microsoft.com/office/drawing/2014/main" id="{6BA5F534-6AB7-4CF5-AEAE-BCFBC9F22B16}"/>
+                <a16:creationId xmlns:a16="http://schemas.microsoft.com/office/drawing/2014/main" id="{AE758669-EE60-4667-9317-96AE559D6A40}"/>
               </a:ext>
             </a:extLst>
           </p:cNvPr>
@@ -17430,7 +18363,7 @@
     </p:spTree>
     <p:extLst>
       <p:ext uri="{BB962C8B-B14F-4D97-AF65-F5344CB8AC3E}">
-        <p14:creationId xmlns:p14="http://schemas.microsoft.com/office/powerpoint/2010/main" val="413200977"/>
+        <p14:creationId xmlns:p14="http://schemas.microsoft.com/office/powerpoint/2010/main" val="1831924910"/>
       </p:ext>
     </p:extLst>
   </p:cSld>
@@ -17461,7 +18394,7 @@
           <p:cNvPr id="8" name="">
             <a:extLst xmlns:a="http://schemas.openxmlformats.org/drawingml/2006/main">
               <a:ext uri="{FF2B5EF4-FFF2-40B4-BE49-F238E27FC236}">
-                <a16:creationId xmlns:a16="http://schemas.microsoft.com/office/drawing/2014/main" id="{04BE7F7C-9583-48CB-9494-87B401263AA8}"/>
+                <a16:creationId xmlns:a16="http://schemas.microsoft.com/office/drawing/2014/main" id="{88AF2A34-0BCA-4439-98EA-F5DF08AAC106}"/>
               </a:ext>
             </a:extLst>
           </p:cNvPr>
@@ -17529,7 +18462,7 @@
           <p:cNvPr id="2" name="">
             <a:extLst xmlns:a="http://schemas.openxmlformats.org/drawingml/2006/main">
               <a:ext uri="{FF2B5EF4-FFF2-40B4-BE49-F238E27FC236}">
-                <a16:creationId xmlns:a16="http://schemas.microsoft.com/office/drawing/2014/main" id="{3D1E2DBE-F692-4307-8578-8696E4E0A9E0}"/>
+                <a16:creationId xmlns:a16="http://schemas.microsoft.com/office/drawing/2014/main" id="{3F7148A5-0490-4E4E-A29B-16C3BC18B1F9}"/>
               </a:ext>
             </a:extLst>
           </p:cNvPr>
@@ -17597,7 +18530,7 @@
           <p:cNvPr id="3" name="">
             <a:extLst xmlns:a="http://schemas.openxmlformats.org/drawingml/2006/main">
               <a:ext uri="{FF2B5EF4-FFF2-40B4-BE49-F238E27FC236}">
-                <a16:creationId xmlns:a16="http://schemas.microsoft.com/office/drawing/2014/main" id="{34120ECB-BCA6-4433-A4C7-A252AF519554}"/>
+                <a16:creationId xmlns:a16="http://schemas.microsoft.com/office/drawing/2014/main" id="{CA81BD68-837F-4A97-934C-54737465864F}"/>
               </a:ext>
             </a:extLst>
           </p:cNvPr>
@@ -17665,7 +18598,7 @@
           <p:cNvPr id="4" name="">
             <a:extLst xmlns:a="http://schemas.openxmlformats.org/drawingml/2006/main">
               <a:ext uri="{FF2B5EF4-FFF2-40B4-BE49-F238E27FC236}">
-                <a16:creationId xmlns:a16="http://schemas.microsoft.com/office/drawing/2014/main" id="{18368505-E3B7-4717-9156-051E31160683}"/>
+                <a16:creationId xmlns:a16="http://schemas.microsoft.com/office/drawing/2014/main" id="{F5C9E7A2-7A1D-440C-B749-0A33DFA7B284}"/>
               </a:ext>
             </a:extLst>
           </p:cNvPr>
@@ -17733,7 +18666,7 @@
           <p:cNvPr id="5" name="">
             <a:extLst xmlns:a="http://schemas.openxmlformats.org/drawingml/2006/main">
               <a:ext uri="{FF2B5EF4-FFF2-40B4-BE49-F238E27FC236}">
-                <a16:creationId xmlns:a16="http://schemas.microsoft.com/office/drawing/2014/main" id="{431FC55C-A7DF-4253-8F19-FCEFBCA4475A}"/>
+                <a16:creationId xmlns:a16="http://schemas.microsoft.com/office/drawing/2014/main" id="{FF82482E-FC1D-4247-A3FF-1B5E897625E3}"/>
               </a:ext>
             </a:extLst>
           </p:cNvPr>
@@ -17801,7 +18734,7 @@
           <p:cNvPr id="6" name="">
             <a:extLst xmlns:a="http://schemas.openxmlformats.org/drawingml/2006/main">
               <a:ext uri="{FF2B5EF4-FFF2-40B4-BE49-F238E27FC236}">
-                <a16:creationId xmlns:a16="http://schemas.microsoft.com/office/drawing/2014/main" id="{DA10F1B6-E0F2-40C0-A6A1-5F9D6811A867}"/>
+                <a16:creationId xmlns:a16="http://schemas.microsoft.com/office/drawing/2014/main" id="{AB3C89F4-92E2-4816-97E2-A62474275E18}"/>
               </a:ext>
             </a:extLst>
           </p:cNvPr>
@@ -17869,7 +18802,7 @@
           <p:cNvPr id="7" name="">
             <a:extLst xmlns:a="http://schemas.openxmlformats.org/drawingml/2006/main">
               <a:ext uri="{FF2B5EF4-FFF2-40B4-BE49-F238E27FC236}">
-                <a16:creationId xmlns:a16="http://schemas.microsoft.com/office/drawing/2014/main" id="{A59E1DA5-F221-40B4-9CA0-D7E1896B326C}"/>
+                <a16:creationId xmlns:a16="http://schemas.microsoft.com/office/drawing/2014/main" id="{987F173F-DBBA-4814-9427-312E03D5BDA0}"/>
               </a:ext>
             </a:extLst>
           </p:cNvPr>
@@ -17927,7 +18860,7 @@
                 <a:ea typeface="Arial"/>
                 <a:cs typeface="Arial"/>
               </a:rPr>
-              <a:t>Full concurrency, complete fencing and failed-deployment repair remain open</a:t>
+              <a:t>Bounded repair is proved; concurrency and complete fencing remain open</a:t>
             </a:r>
           </a:p>
         </p:txBody>
@@ -17935,7 +18868,7 @@
     </p:spTree>
     <p:extLst>
       <p:ext uri="{BB962C8B-B14F-4D97-AF65-F5344CB8AC3E}">
-        <p14:creationId xmlns:p14="http://schemas.microsoft.com/office/powerpoint/2010/main" val="423393532"/>
+        <p14:creationId xmlns:p14="http://schemas.microsoft.com/office/powerpoint/2010/main" val="2130808921"/>
       </p:ext>
     </p:extLst>
   </p:cSld>
@@ -17966,7 +18899,7 @@
           <p:cNvPr id="13" name="">
             <a:extLst xmlns:a="http://schemas.openxmlformats.org/drawingml/2006/main">
               <a:ext uri="{FF2B5EF4-FFF2-40B4-BE49-F238E27FC236}">
-                <a16:creationId xmlns:a16="http://schemas.microsoft.com/office/drawing/2014/main" id="{B6002B9C-7532-48BD-840A-1A4CA84A49E7}"/>
+                <a16:creationId xmlns:a16="http://schemas.microsoft.com/office/drawing/2014/main" id="{FE7FF95E-F111-43D3-8E09-610F9306F054}"/>
               </a:ext>
             </a:extLst>
           </p:cNvPr>
@@ -17997,7 +18930,7 @@
           <p:cNvPr id="12" name="">
             <a:extLst xmlns:a="http://schemas.openxmlformats.org/drawingml/2006/main">
               <a:ext uri="{FF2B5EF4-FFF2-40B4-BE49-F238E27FC236}">
-                <a16:creationId xmlns:a16="http://schemas.microsoft.com/office/drawing/2014/main" id="{358BF1CC-C977-46B1-8947-5B59382108EE}"/>
+                <a16:creationId xmlns:a16="http://schemas.microsoft.com/office/drawing/2014/main" id="{E622C1E1-0247-4819-83C2-5849AB555E8D}"/>
               </a:ext>
             </a:extLst>
           </p:cNvPr>
@@ -18028,7 +18961,7 @@
           <p:cNvPr id="11" name="">
             <a:extLst xmlns:a="http://schemas.openxmlformats.org/drawingml/2006/main">
               <a:ext uri="{FF2B5EF4-FFF2-40B4-BE49-F238E27FC236}">
-                <a16:creationId xmlns:a16="http://schemas.microsoft.com/office/drawing/2014/main" id="{27ED2E0A-484A-43DA-BDE8-432471BCCC69}"/>
+                <a16:creationId xmlns:a16="http://schemas.microsoft.com/office/drawing/2014/main" id="{C7999331-D5DA-46A2-B041-A2E33418227C}"/>
               </a:ext>
             </a:extLst>
           </p:cNvPr>
@@ -18059,7 +18992,7 @@
           <p:cNvPr id="15" name="">
             <a:extLst xmlns:a="http://schemas.openxmlformats.org/drawingml/2006/main">
               <a:ext uri="{FF2B5EF4-FFF2-40B4-BE49-F238E27FC236}">
-                <a16:creationId xmlns:a16="http://schemas.microsoft.com/office/drawing/2014/main" id="{81F7E8EA-C453-479C-A631-30CB7E7F73DE}"/>
+                <a16:creationId xmlns:a16="http://schemas.microsoft.com/office/drawing/2014/main" id="{DB3C61AB-115B-4129-80C2-8315C98E36D3}"/>
               </a:ext>
             </a:extLst>
           </p:cNvPr>
@@ -18127,7 +19060,7 @@
           <p:cNvPr id="2" name="">
             <a:extLst xmlns:a="http://schemas.openxmlformats.org/drawingml/2006/main">
               <a:ext uri="{FF2B5EF4-FFF2-40B4-BE49-F238E27FC236}">
-                <a16:creationId xmlns:a16="http://schemas.microsoft.com/office/drawing/2014/main" id="{E1D92D7B-FDAE-4397-A153-4799BEBFDE3B}"/>
+                <a16:creationId xmlns:a16="http://schemas.microsoft.com/office/drawing/2014/main" id="{5F94E148-5569-4746-BAF2-3A015B4BBEB0}"/>
               </a:ext>
             </a:extLst>
           </p:cNvPr>
@@ -18195,7 +19128,7 @@
           <p:cNvPr id="3" name="">
             <a:extLst xmlns:a="http://schemas.openxmlformats.org/drawingml/2006/main">
               <a:ext uri="{FF2B5EF4-FFF2-40B4-BE49-F238E27FC236}">
-                <a16:creationId xmlns:a16="http://schemas.microsoft.com/office/drawing/2014/main" id="{B2122F67-3F87-4E2C-91D3-57694981AA96}"/>
+                <a16:creationId xmlns:a16="http://schemas.microsoft.com/office/drawing/2014/main" id="{2B980132-10DD-404D-824C-D74856EB24E8}"/>
               </a:ext>
             </a:extLst>
           </p:cNvPr>
@@ -18263,7 +19196,7 @@
           <p:cNvPr id="4" name="">
             <a:extLst xmlns:a="http://schemas.openxmlformats.org/drawingml/2006/main">
               <a:ext uri="{FF2B5EF4-FFF2-40B4-BE49-F238E27FC236}">
-                <a16:creationId xmlns:a16="http://schemas.microsoft.com/office/drawing/2014/main" id="{612ED721-B62F-4DCB-BDDA-36D36FA741E5}"/>
+                <a16:creationId xmlns:a16="http://schemas.microsoft.com/office/drawing/2014/main" id="{93F1BBB4-E0F7-405E-A32E-B9AB16E7FA37}"/>
               </a:ext>
             </a:extLst>
           </p:cNvPr>
@@ -18381,7 +19314,7 @@
           <p:cNvPr id="5" name="">
             <a:extLst xmlns:a="http://schemas.openxmlformats.org/drawingml/2006/main">
               <a:ext uri="{FF2B5EF4-FFF2-40B4-BE49-F238E27FC236}">
-                <a16:creationId xmlns:a16="http://schemas.microsoft.com/office/drawing/2014/main" id="{426F1174-7B12-4E8D-A91E-742217D74B85}"/>
+                <a16:creationId xmlns:a16="http://schemas.microsoft.com/office/drawing/2014/main" id="{CF684A9B-1841-4E99-8529-1D0D5BC555E8}"/>
               </a:ext>
             </a:extLst>
           </p:cNvPr>
@@ -18449,7 +19382,7 @@
           <p:cNvPr id="6" name="">
             <a:extLst xmlns:a="http://schemas.openxmlformats.org/drawingml/2006/main">
               <a:ext uri="{FF2B5EF4-FFF2-40B4-BE49-F238E27FC236}">
-                <a16:creationId xmlns:a16="http://schemas.microsoft.com/office/drawing/2014/main" id="{0D76E709-51C8-4BD8-8A72-B32DECBA1073}"/>
+                <a16:creationId xmlns:a16="http://schemas.microsoft.com/office/drawing/2014/main" id="{D1FCFB2F-1FFB-4233-AD9E-6E4FD2D27A15}"/>
               </a:ext>
             </a:extLst>
           </p:cNvPr>
@@ -18567,7 +19500,7 @@
           <p:cNvPr id="7" name="">
             <a:extLst xmlns:a="http://schemas.openxmlformats.org/drawingml/2006/main">
               <a:ext uri="{FF2B5EF4-FFF2-40B4-BE49-F238E27FC236}">
-                <a16:creationId xmlns:a16="http://schemas.microsoft.com/office/drawing/2014/main" id="{09FAE511-483C-42A2-B6E9-E7AAEF6B4D97}"/>
+                <a16:creationId xmlns:a16="http://schemas.microsoft.com/office/drawing/2014/main" id="{D12655F4-193D-4414-AAB9-CC9DE828EF3C}"/>
               </a:ext>
             </a:extLst>
           </p:cNvPr>
@@ -18635,7 +19568,7 @@
           <p:cNvPr id="8" name="">
             <a:extLst xmlns:a="http://schemas.openxmlformats.org/drawingml/2006/main">
               <a:ext uri="{FF2B5EF4-FFF2-40B4-BE49-F238E27FC236}">
-                <a16:creationId xmlns:a16="http://schemas.microsoft.com/office/drawing/2014/main" id="{C015758A-E11C-4D13-9D78-363EEC1B0C25}"/>
+                <a16:creationId xmlns:a16="http://schemas.microsoft.com/office/drawing/2014/main" id="{6C1F1C07-FBA3-4CF9-AC52-F5293500C75E}"/>
               </a:ext>
             </a:extLst>
           </p:cNvPr>
@@ -18753,7 +19686,7 @@
           <p:cNvPr id="9" name="">
             <a:extLst xmlns:a="http://schemas.openxmlformats.org/drawingml/2006/main">
               <a:ext uri="{FF2B5EF4-FFF2-40B4-BE49-F238E27FC236}">
-                <a16:creationId xmlns:a16="http://schemas.microsoft.com/office/drawing/2014/main" id="{A4C1960D-7546-467B-AFBB-90E290CAABEB}"/>
+                <a16:creationId xmlns:a16="http://schemas.microsoft.com/office/drawing/2014/main" id="{E85D7A70-6306-4867-BC60-7E57D381F263}"/>
               </a:ext>
             </a:extLst>
           </p:cNvPr>
@@ -18821,7 +19754,7 @@
           <p:cNvPr id="10" name="">
             <a:extLst xmlns:a="http://schemas.openxmlformats.org/drawingml/2006/main">
               <a:ext uri="{FF2B5EF4-FFF2-40B4-BE49-F238E27FC236}">
-                <a16:creationId xmlns:a16="http://schemas.microsoft.com/office/drawing/2014/main" id="{94C114C7-DCF3-4C3B-BD8B-6553DE1244D0}"/>
+                <a16:creationId xmlns:a16="http://schemas.microsoft.com/office/drawing/2014/main" id="{2BA39EAB-169E-4363-B62E-21A79D7802BA}"/>
               </a:ext>
             </a:extLst>
           </p:cNvPr>
@@ -18939,7 +19872,7 @@
           <p:cNvPr id="14" name="">
             <a:extLst xmlns:a="http://schemas.openxmlformats.org/drawingml/2006/main">
               <a:ext uri="{FF2B5EF4-FFF2-40B4-BE49-F238E27FC236}">
-                <a16:creationId xmlns:a16="http://schemas.microsoft.com/office/drawing/2014/main" id="{5E19BFCB-4C88-4342-881B-35A486BEC628}"/>
+                <a16:creationId xmlns:a16="http://schemas.microsoft.com/office/drawing/2014/main" id="{D84F785D-775E-4FAA-BAF4-65DA990F0344}"/>
               </a:ext>
             </a:extLst>
           </p:cNvPr>
@@ -19005,7 +19938,7 @@
     </p:spTree>
     <p:extLst>
       <p:ext uri="{BB962C8B-B14F-4D97-AF65-F5344CB8AC3E}">
-        <p14:creationId xmlns:p14="http://schemas.microsoft.com/office/powerpoint/2010/main" val="44933570"/>
+        <p14:creationId xmlns:p14="http://schemas.microsoft.com/office/powerpoint/2010/main" val="1997514990"/>
       </p:ext>
     </p:extLst>
   </p:cSld>
@@ -19036,7 +19969,7 @@
           <p:cNvPr id="7" name="">
             <a:extLst xmlns:a="http://schemas.openxmlformats.org/drawingml/2006/main">
               <a:ext uri="{FF2B5EF4-FFF2-40B4-BE49-F238E27FC236}">
-                <a16:creationId xmlns:a16="http://schemas.microsoft.com/office/drawing/2014/main" id="{636EFE85-A3ED-4A34-BAC7-CF00B22CE578}"/>
+                <a16:creationId xmlns:a16="http://schemas.microsoft.com/office/drawing/2014/main" id="{4E97D6CF-CE41-4053-A394-3A9047E69B57}"/>
               </a:ext>
             </a:extLst>
           </p:cNvPr>
@@ -19070,7 +20003,7 @@
           <p:cNvPr id="6" name="">
             <a:extLst xmlns:a="http://schemas.openxmlformats.org/drawingml/2006/main">
               <a:ext uri="{FF2B5EF4-FFF2-40B4-BE49-F238E27FC236}">
-                <a16:creationId xmlns:a16="http://schemas.microsoft.com/office/drawing/2014/main" id="{FAED69F1-B442-4376-8AA5-5F085D7998EC}"/>
+                <a16:creationId xmlns:a16="http://schemas.microsoft.com/office/drawing/2014/main" id="{8F9C0E1E-F074-4B6E-B291-A2B882774785}"/>
               </a:ext>
             </a:extLst>
           </p:cNvPr>
@@ -19104,7 +20037,7 @@
           <p:cNvPr id="9" name="">
             <a:extLst xmlns:a="http://schemas.openxmlformats.org/drawingml/2006/main">
               <a:ext uri="{FF2B5EF4-FFF2-40B4-BE49-F238E27FC236}">
-                <a16:creationId xmlns:a16="http://schemas.microsoft.com/office/drawing/2014/main" id="{3870D4A4-5672-4E0E-BDE1-D895275DA8B8}"/>
+                <a16:creationId xmlns:a16="http://schemas.microsoft.com/office/drawing/2014/main" id="{AF9D636C-C068-4296-8038-A6F0A4748896}"/>
               </a:ext>
             </a:extLst>
           </p:cNvPr>
@@ -19172,7 +20105,7 @@
           <p:cNvPr id="2" name="">
             <a:extLst xmlns:a="http://schemas.openxmlformats.org/drawingml/2006/main">
               <a:ext uri="{FF2B5EF4-FFF2-40B4-BE49-F238E27FC236}">
-                <a16:creationId xmlns:a16="http://schemas.microsoft.com/office/drawing/2014/main" id="{9F712091-B346-49DE-A53A-096A96C4D99C}"/>
+                <a16:creationId xmlns:a16="http://schemas.microsoft.com/office/drawing/2014/main" id="{8E775669-681A-488D-9AC6-1A76DAE2F66D}"/>
               </a:ext>
             </a:extLst>
           </p:cNvPr>
@@ -19240,7 +20173,7 @@
           <p:cNvPr id="3" name="">
             <a:extLst xmlns:a="http://schemas.openxmlformats.org/drawingml/2006/main">
               <a:ext uri="{FF2B5EF4-FFF2-40B4-BE49-F238E27FC236}">
-                <a16:creationId xmlns:a16="http://schemas.microsoft.com/office/drawing/2014/main" id="{C3B02685-28FC-4A88-B6E5-155E64EB6E79}"/>
+                <a16:creationId xmlns:a16="http://schemas.microsoft.com/office/drawing/2014/main" id="{441ED5C4-FB4D-4CB3-BBEA-A1E3CAE5DDD9}"/>
               </a:ext>
             </a:extLst>
           </p:cNvPr>
@@ -19335,7 +20268,7 @@
           <p:cNvPr id="4" name="">
             <a:extLst xmlns:a="http://schemas.openxmlformats.org/drawingml/2006/main">
               <a:ext uri="{FF2B5EF4-FFF2-40B4-BE49-F238E27FC236}">
-                <a16:creationId xmlns:a16="http://schemas.microsoft.com/office/drawing/2014/main" id="{0FA35CB0-9FB2-40A6-A01A-0CF351F0AC69}"/>
+                <a16:creationId xmlns:a16="http://schemas.microsoft.com/office/drawing/2014/main" id="{95D952F7-9D7D-450B-A788-818D1179B713}"/>
               </a:ext>
             </a:extLst>
           </p:cNvPr>
@@ -19430,7 +20363,7 @@
           <p:cNvPr id="5" name="">
             <a:extLst xmlns:a="http://schemas.openxmlformats.org/drawingml/2006/main">
               <a:ext uri="{FF2B5EF4-FFF2-40B4-BE49-F238E27FC236}">
-                <a16:creationId xmlns:a16="http://schemas.microsoft.com/office/drawing/2014/main" id="{C3B3CDB4-5406-40F7-BB5A-C5E2F84936A0}"/>
+                <a16:creationId xmlns:a16="http://schemas.microsoft.com/office/drawing/2014/main" id="{820194D7-6D46-4886-A3B8-BEB2B54C34F8}"/>
               </a:ext>
             </a:extLst>
           </p:cNvPr>
@@ -19525,7 +20458,7 @@
           <p:cNvPr id="8" name="">
             <a:extLst xmlns:a="http://schemas.openxmlformats.org/drawingml/2006/main">
               <a:ext uri="{FF2B5EF4-FFF2-40B4-BE49-F238E27FC236}">
-                <a16:creationId xmlns:a16="http://schemas.microsoft.com/office/drawing/2014/main" id="{E5AFF378-134C-4ECF-ACC4-EC3827261DD7}"/>
+                <a16:creationId xmlns:a16="http://schemas.microsoft.com/office/drawing/2014/main" id="{E65CDA19-654E-400B-8D08-582D9C05FB2E}"/>
               </a:ext>
             </a:extLst>
           </p:cNvPr>
@@ -19591,7 +20524,7 @@
     </p:spTree>
     <p:extLst>
       <p:ext uri="{BB962C8B-B14F-4D97-AF65-F5344CB8AC3E}">
-        <p14:creationId xmlns:p14="http://schemas.microsoft.com/office/powerpoint/2010/main" val="907406682"/>
+        <p14:creationId xmlns:p14="http://schemas.microsoft.com/office/powerpoint/2010/main" val="1944909814"/>
       </p:ext>
     </p:extLst>
   </p:cSld>
@@ -19622,7 +20555,7 @@
           <p:cNvPr id="9" name="">
             <a:extLst xmlns:a="http://schemas.openxmlformats.org/drawingml/2006/main">
               <a:ext uri="{FF2B5EF4-FFF2-40B4-BE49-F238E27FC236}">
-                <a16:creationId xmlns:a16="http://schemas.microsoft.com/office/drawing/2014/main" id="{58F4AAB9-D9F3-4439-A914-65F385CB1692}"/>
+                <a16:creationId xmlns:a16="http://schemas.microsoft.com/office/drawing/2014/main" id="{FC1582A6-C34F-48D4-BD99-F44EE271FD57}"/>
               </a:ext>
             </a:extLst>
           </p:cNvPr>
@@ -19690,7 +20623,7 @@
           <p:cNvPr id="2" name="">
             <a:extLst xmlns:a="http://schemas.openxmlformats.org/drawingml/2006/main">
               <a:ext uri="{FF2B5EF4-FFF2-40B4-BE49-F238E27FC236}">
-                <a16:creationId xmlns:a16="http://schemas.microsoft.com/office/drawing/2014/main" id="{E8DF8161-B60F-4092-B438-14DB3F74A0AE}"/>
+                <a16:creationId xmlns:a16="http://schemas.microsoft.com/office/drawing/2014/main" id="{5B61766C-9028-42E4-8B4C-14D96107C8D4}"/>
               </a:ext>
             </a:extLst>
           </p:cNvPr>
@@ -19758,7 +20691,7 @@
           <p:cNvPr id="3" name="">
             <a:extLst xmlns:a="http://schemas.openxmlformats.org/drawingml/2006/main">
               <a:ext uri="{FF2B5EF4-FFF2-40B4-BE49-F238E27FC236}">
-                <a16:creationId xmlns:a16="http://schemas.microsoft.com/office/drawing/2014/main" id="{10FCBA9B-6C9E-4313-9D69-F7A880E36038}"/>
+                <a16:creationId xmlns:a16="http://schemas.microsoft.com/office/drawing/2014/main" id="{5C0FDC16-A1FE-4B1E-AB5E-38C849624138}"/>
               </a:ext>
             </a:extLst>
           </p:cNvPr>
@@ -19826,7 +20759,7 @@
           <p:cNvPr id="4" name="">
             <a:extLst xmlns:a="http://schemas.openxmlformats.org/drawingml/2006/main">
               <a:ext uri="{FF2B5EF4-FFF2-40B4-BE49-F238E27FC236}">
-                <a16:creationId xmlns:a16="http://schemas.microsoft.com/office/drawing/2014/main" id="{013CB617-E280-4425-A727-D344E72CA235}"/>
+                <a16:creationId xmlns:a16="http://schemas.microsoft.com/office/drawing/2014/main" id="{017C2A23-1806-411C-B3E0-659C9AC378EB}"/>
               </a:ext>
             </a:extLst>
           </p:cNvPr>
@@ -19894,7 +20827,7 @@
           <p:cNvPr id="5" name="">
             <a:extLst xmlns:a="http://schemas.openxmlformats.org/drawingml/2006/main">
               <a:ext uri="{FF2B5EF4-FFF2-40B4-BE49-F238E27FC236}">
-                <a16:creationId xmlns:a16="http://schemas.microsoft.com/office/drawing/2014/main" id="{B357648F-285D-4335-A45F-B6DB99D14837}"/>
+                <a16:creationId xmlns:a16="http://schemas.microsoft.com/office/drawing/2014/main" id="{7CC99483-14AA-46B0-BFB8-690FE0A06ECC}"/>
               </a:ext>
             </a:extLst>
           </p:cNvPr>
@@ -19962,7 +20895,7 @@
           <p:cNvPr id="6" name="">
             <a:extLst xmlns:a="http://schemas.openxmlformats.org/drawingml/2006/main">
               <a:ext uri="{FF2B5EF4-FFF2-40B4-BE49-F238E27FC236}">
-                <a16:creationId xmlns:a16="http://schemas.microsoft.com/office/drawing/2014/main" id="{2FA05FA0-B920-4D92-9B0F-1CD73D246D19}"/>
+                <a16:creationId xmlns:a16="http://schemas.microsoft.com/office/drawing/2014/main" id="{B99988BB-074A-47AC-BB39-A82483849B5F}"/>
               </a:ext>
             </a:extLst>
           </p:cNvPr>
@@ -20030,7 +20963,7 @@
           <p:cNvPr id="7" name="">
             <a:extLst xmlns:a="http://schemas.openxmlformats.org/drawingml/2006/main">
               <a:ext uri="{FF2B5EF4-FFF2-40B4-BE49-F238E27FC236}">
-                <a16:creationId xmlns:a16="http://schemas.microsoft.com/office/drawing/2014/main" id="{64D574AB-34B9-40D5-942C-7095E2C1310B}"/>
+                <a16:creationId xmlns:a16="http://schemas.microsoft.com/office/drawing/2014/main" id="{6AEC76AA-A5FF-41ED-9CD2-431F22EC0579}"/>
               </a:ext>
             </a:extLst>
           </p:cNvPr>
@@ -20098,7 +21031,7 @@
           <p:cNvPr id="8" name="">
             <a:extLst xmlns:a="http://schemas.openxmlformats.org/drawingml/2006/main">
               <a:ext uri="{FF2B5EF4-FFF2-40B4-BE49-F238E27FC236}">
-                <a16:creationId xmlns:a16="http://schemas.microsoft.com/office/drawing/2014/main" id="{DAFD7F87-E8B5-41D2-8E38-7736A22BEA58}"/>
+                <a16:creationId xmlns:a16="http://schemas.microsoft.com/office/drawing/2014/main" id="{0D10B821-E073-4307-98B8-1DF994258B16}"/>
               </a:ext>
             </a:extLst>
           </p:cNvPr>
@@ -20164,7 +21097,7 @@
     </p:spTree>
     <p:extLst>
       <p:ext uri="{BB962C8B-B14F-4D97-AF65-F5344CB8AC3E}">
-        <p14:creationId xmlns:p14="http://schemas.microsoft.com/office/powerpoint/2010/main" val="2117006484"/>
+        <p14:creationId xmlns:p14="http://schemas.microsoft.com/office/powerpoint/2010/main" val="1019207024"/>
       </p:ext>
     </p:extLst>
   </p:cSld>
@@ -20195,7 +21128,7 @@
           <p:cNvPr id="9" name="">
             <a:extLst xmlns:a="http://schemas.openxmlformats.org/drawingml/2006/main">
               <a:ext uri="{FF2B5EF4-FFF2-40B4-BE49-F238E27FC236}">
-                <a16:creationId xmlns:a16="http://schemas.microsoft.com/office/drawing/2014/main" id="{15C60ABC-6237-45A8-807B-711091E09299}"/>
+                <a16:creationId xmlns:a16="http://schemas.microsoft.com/office/drawing/2014/main" id="{F93ABB6E-8759-4F65-BEBA-8D7F22C280ED}"/>
               </a:ext>
             </a:extLst>
           </p:cNvPr>
@@ -20263,7 +21196,7 @@
           <p:cNvPr id="2" name="">
             <a:extLst xmlns:a="http://schemas.openxmlformats.org/drawingml/2006/main">
               <a:ext uri="{FF2B5EF4-FFF2-40B4-BE49-F238E27FC236}">
-                <a16:creationId xmlns:a16="http://schemas.microsoft.com/office/drawing/2014/main" id="{ED19024B-FB94-433F-BF49-7D0C63F4AE33}"/>
+                <a16:creationId xmlns:a16="http://schemas.microsoft.com/office/drawing/2014/main" id="{6DF7BE2B-8880-4E5C-AC4E-F59D1484B9E1}"/>
               </a:ext>
             </a:extLst>
           </p:cNvPr>
@@ -20331,7 +21264,7 @@
           <p:cNvPr id="3" name="">
             <a:extLst xmlns:a="http://schemas.openxmlformats.org/drawingml/2006/main">
               <a:ext uri="{FF2B5EF4-FFF2-40B4-BE49-F238E27FC236}">
-                <a16:creationId xmlns:a16="http://schemas.microsoft.com/office/drawing/2014/main" id="{0FCD98EA-C59B-4456-BA9E-C000AA1F6972}"/>
+                <a16:creationId xmlns:a16="http://schemas.microsoft.com/office/drawing/2014/main" id="{B7FAF875-FF19-44EB-8C95-220E25134730}"/>
               </a:ext>
             </a:extLst>
           </p:cNvPr>
@@ -20399,7 +21332,7 @@
           <p:cNvPr id="4" name="">
             <a:extLst xmlns:a="http://schemas.openxmlformats.org/drawingml/2006/main">
               <a:ext uri="{FF2B5EF4-FFF2-40B4-BE49-F238E27FC236}">
-                <a16:creationId xmlns:a16="http://schemas.microsoft.com/office/drawing/2014/main" id="{0DAF0937-1B8D-4D5A-868B-CB4D14245C30}"/>
+                <a16:creationId xmlns:a16="http://schemas.microsoft.com/office/drawing/2014/main" id="{2FD05F69-34F1-4387-8CD8-0C310972156D}"/>
               </a:ext>
             </a:extLst>
           </p:cNvPr>
@@ -20467,7 +21400,7 @@
           <p:cNvPr id="5" name="">
             <a:extLst xmlns:a="http://schemas.openxmlformats.org/drawingml/2006/main">
               <a:ext uri="{FF2B5EF4-FFF2-40B4-BE49-F238E27FC236}">
-                <a16:creationId xmlns:a16="http://schemas.microsoft.com/office/drawing/2014/main" id="{C43CF2FD-7E03-4206-A44D-68D232250411}"/>
+                <a16:creationId xmlns:a16="http://schemas.microsoft.com/office/drawing/2014/main" id="{079C698F-5905-4BF3-97E1-5F1C80A9E4F8}"/>
               </a:ext>
             </a:extLst>
           </p:cNvPr>
@@ -20535,7 +21468,7 @@
           <p:cNvPr id="6" name="">
             <a:extLst xmlns:a="http://schemas.openxmlformats.org/drawingml/2006/main">
               <a:ext uri="{FF2B5EF4-FFF2-40B4-BE49-F238E27FC236}">
-                <a16:creationId xmlns:a16="http://schemas.microsoft.com/office/drawing/2014/main" id="{4B14C842-4C2C-4C52-81D4-1FEEC4F2EA71}"/>
+                <a16:creationId xmlns:a16="http://schemas.microsoft.com/office/drawing/2014/main" id="{A55E45EB-C042-4162-B684-E5B77B99E6D6}"/>
               </a:ext>
             </a:extLst>
           </p:cNvPr>
@@ -20603,7 +21536,7 @@
           <p:cNvPr id="7" name="">
             <a:extLst xmlns:a="http://schemas.openxmlformats.org/drawingml/2006/main">
               <a:ext uri="{FF2B5EF4-FFF2-40B4-BE49-F238E27FC236}">
-                <a16:creationId xmlns:a16="http://schemas.microsoft.com/office/drawing/2014/main" id="{B0F0E236-6709-4487-B79C-A6ADFB5FDC73}"/>
+                <a16:creationId xmlns:a16="http://schemas.microsoft.com/office/drawing/2014/main" id="{084B06F9-FF27-47DE-8686-2AC7389AD314}"/>
               </a:ext>
             </a:extLst>
           </p:cNvPr>
@@ -20671,7 +21604,7 @@
           <p:cNvPr id="8" name="">
             <a:extLst xmlns:a="http://schemas.openxmlformats.org/drawingml/2006/main">
               <a:ext uri="{FF2B5EF4-FFF2-40B4-BE49-F238E27FC236}">
-                <a16:creationId xmlns:a16="http://schemas.microsoft.com/office/drawing/2014/main" id="{5EF86652-0C7A-433A-BB04-E7317ED17B71}"/>
+                <a16:creationId xmlns:a16="http://schemas.microsoft.com/office/drawing/2014/main" id="{D308C2BB-1C11-43D3-8859-8D4883900759}"/>
               </a:ext>
             </a:extLst>
           </p:cNvPr>
@@ -20737,7 +21670,7 @@
     </p:spTree>
     <p:extLst>
       <p:ext uri="{BB962C8B-B14F-4D97-AF65-F5344CB8AC3E}">
-        <p14:creationId xmlns:p14="http://schemas.microsoft.com/office/powerpoint/2010/main" val="426519458"/>
+        <p14:creationId xmlns:p14="http://schemas.microsoft.com/office/powerpoint/2010/main" val="483898790"/>
       </p:ext>
     </p:extLst>
   </p:cSld>
@@ -20768,7 +21701,7 @@
           <p:cNvPr id="17" name="">
             <a:extLst xmlns:a="http://schemas.openxmlformats.org/drawingml/2006/main">
               <a:ext uri="{FF2B5EF4-FFF2-40B4-BE49-F238E27FC236}">
-                <a16:creationId xmlns:a16="http://schemas.microsoft.com/office/drawing/2014/main" id="{4049AF73-A13D-47C6-AC20-2E0E3F627A46}"/>
+                <a16:creationId xmlns:a16="http://schemas.microsoft.com/office/drawing/2014/main" id="{95E84943-25CB-475C-BF1E-8152A9946A47}"/>
               </a:ext>
             </a:extLst>
           </p:cNvPr>
@@ -20836,7 +21769,7 @@
           <p:cNvPr id="2" name="">
             <a:extLst xmlns:a="http://schemas.openxmlformats.org/drawingml/2006/main">
               <a:ext uri="{FF2B5EF4-FFF2-40B4-BE49-F238E27FC236}">
-                <a16:creationId xmlns:a16="http://schemas.microsoft.com/office/drawing/2014/main" id="{F21E913E-C883-4E9F-8EFA-964C82A5F6C0}"/>
+                <a16:creationId xmlns:a16="http://schemas.microsoft.com/office/drawing/2014/main" id="{CF969DDF-B424-4E5B-82A7-CFF5DD13CF9D}"/>
               </a:ext>
             </a:extLst>
           </p:cNvPr>
@@ -20904,7 +21837,7 @@
           <p:cNvPr id="3" name="">
             <a:extLst xmlns:a="http://schemas.openxmlformats.org/drawingml/2006/main">
               <a:ext uri="{FF2B5EF4-FFF2-40B4-BE49-F238E27FC236}">
-                <a16:creationId xmlns:a16="http://schemas.microsoft.com/office/drawing/2014/main" id="{6EE03718-245B-45AF-96AE-A4836130F625}"/>
+                <a16:creationId xmlns:a16="http://schemas.microsoft.com/office/drawing/2014/main" id="{031FFCB0-66A8-400A-AEE3-733B1CE5D18A}"/>
               </a:ext>
             </a:extLst>
           </p:cNvPr>
@@ -20972,7 +21905,7 @@
           <p:cNvPr id="4" name="">
             <a:extLst xmlns:a="http://schemas.openxmlformats.org/drawingml/2006/main">
               <a:ext uri="{FF2B5EF4-FFF2-40B4-BE49-F238E27FC236}">
-                <a16:creationId xmlns:a16="http://schemas.microsoft.com/office/drawing/2014/main" id="{1953F9AA-065B-4B52-8401-0624A501CAB3}"/>
+                <a16:creationId xmlns:a16="http://schemas.microsoft.com/office/drawing/2014/main" id="{E887C9F2-06CE-4BBA-99A4-87407A3CF9F7}"/>
               </a:ext>
             </a:extLst>
           </p:cNvPr>
@@ -21040,7 +21973,7 @@
           <p:cNvPr id="5" name="">
             <a:extLst xmlns:a="http://schemas.openxmlformats.org/drawingml/2006/main">
               <a:ext uri="{FF2B5EF4-FFF2-40B4-BE49-F238E27FC236}">
-                <a16:creationId xmlns:a16="http://schemas.microsoft.com/office/drawing/2014/main" id="{349D5B24-DC62-45AB-AD0B-17430F872465}"/>
+                <a16:creationId xmlns:a16="http://schemas.microsoft.com/office/drawing/2014/main" id="{DB57F8B4-913C-4E60-A19D-8F866023A4C1}"/>
               </a:ext>
             </a:extLst>
           </p:cNvPr>
@@ -21108,7 +22041,7 @@
           <p:cNvPr id="6" name="">
             <a:extLst xmlns:a="http://schemas.openxmlformats.org/drawingml/2006/main">
               <a:ext uri="{FF2B5EF4-FFF2-40B4-BE49-F238E27FC236}">
-                <a16:creationId xmlns:a16="http://schemas.microsoft.com/office/drawing/2014/main" id="{14AD19A6-F036-440D-B8EC-7E6D23D865C3}"/>
+                <a16:creationId xmlns:a16="http://schemas.microsoft.com/office/drawing/2014/main" id="{6516F27B-51E2-4A2C-BA5D-59123BC688D0}"/>
               </a:ext>
             </a:extLst>
           </p:cNvPr>
@@ -21176,7 +22109,7 @@
           <p:cNvPr id="7" name="">
             <a:extLst xmlns:a="http://schemas.openxmlformats.org/drawingml/2006/main">
               <a:ext uri="{FF2B5EF4-FFF2-40B4-BE49-F238E27FC236}">
-                <a16:creationId xmlns:a16="http://schemas.microsoft.com/office/drawing/2014/main" id="{B6697949-B87D-4CB3-84BF-80B4F3399F34}"/>
+                <a16:creationId xmlns:a16="http://schemas.microsoft.com/office/drawing/2014/main" id="{9C31C74C-BD7A-4BE6-9E35-FCC95B97EBB6}"/>
               </a:ext>
             </a:extLst>
           </p:cNvPr>
@@ -21244,7 +22177,7 @@
           <p:cNvPr id="8" name="">
             <a:extLst xmlns:a="http://schemas.openxmlformats.org/drawingml/2006/main">
               <a:ext uri="{FF2B5EF4-FFF2-40B4-BE49-F238E27FC236}">
-                <a16:creationId xmlns:a16="http://schemas.microsoft.com/office/drawing/2014/main" id="{9E9D9BCE-3D65-4ECE-99F7-4D3C835A6240}"/>
+                <a16:creationId xmlns:a16="http://schemas.microsoft.com/office/drawing/2014/main" id="{E7D95794-031F-4FA6-8317-AF8FE6E18C6D}"/>
               </a:ext>
             </a:extLst>
           </p:cNvPr>
@@ -21312,7 +22245,7 @@
           <p:cNvPr id="9" name="">
             <a:extLst xmlns:a="http://schemas.openxmlformats.org/drawingml/2006/main">
               <a:ext uri="{FF2B5EF4-FFF2-40B4-BE49-F238E27FC236}">
-                <a16:creationId xmlns:a16="http://schemas.microsoft.com/office/drawing/2014/main" id="{84A6FC91-4DEB-4D3C-B99F-75578AECF1C2}"/>
+                <a16:creationId xmlns:a16="http://schemas.microsoft.com/office/drawing/2014/main" id="{C736779A-7942-4751-9936-9698EA0F5C40}"/>
               </a:ext>
             </a:extLst>
           </p:cNvPr>
@@ -21380,7 +22313,7 @@
           <p:cNvPr id="10" name="">
             <a:extLst xmlns:a="http://schemas.openxmlformats.org/drawingml/2006/main">
               <a:ext uri="{FF2B5EF4-FFF2-40B4-BE49-F238E27FC236}">
-                <a16:creationId xmlns:a16="http://schemas.microsoft.com/office/drawing/2014/main" id="{3AC3BE44-66B4-4E80-A495-CB89DCBB896E}"/>
+                <a16:creationId xmlns:a16="http://schemas.microsoft.com/office/drawing/2014/main" id="{EC39F583-9367-4217-8C78-CF4C957B3E40}"/>
               </a:ext>
             </a:extLst>
           </p:cNvPr>
@@ -21448,7 +22381,7 @@
           <p:cNvPr id="11" name="">
             <a:extLst xmlns:a="http://schemas.openxmlformats.org/drawingml/2006/main">
               <a:ext uri="{FF2B5EF4-FFF2-40B4-BE49-F238E27FC236}">
-                <a16:creationId xmlns:a16="http://schemas.microsoft.com/office/drawing/2014/main" id="{B88CC0E9-1D33-4EE7-B6F8-AF531622D333}"/>
+                <a16:creationId xmlns:a16="http://schemas.microsoft.com/office/drawing/2014/main" id="{3AFBA62D-EB55-4E38-9FE7-18B32CF2A296}"/>
               </a:ext>
             </a:extLst>
           </p:cNvPr>
@@ -21516,7 +22449,7 @@
           <p:cNvPr id="12" name="">
             <a:extLst xmlns:a="http://schemas.openxmlformats.org/drawingml/2006/main">
               <a:ext uri="{FF2B5EF4-FFF2-40B4-BE49-F238E27FC236}">
-                <a16:creationId xmlns:a16="http://schemas.microsoft.com/office/drawing/2014/main" id="{37A95C16-519A-4072-AF74-77C491EEBA4F}"/>
+                <a16:creationId xmlns:a16="http://schemas.microsoft.com/office/drawing/2014/main" id="{6CEE831B-FC84-4FE6-B290-B8103E41D5F2}"/>
               </a:ext>
             </a:extLst>
           </p:cNvPr>
@@ -21584,7 +22517,7 @@
           <p:cNvPr id="13" name="">
             <a:extLst xmlns:a="http://schemas.openxmlformats.org/drawingml/2006/main">
               <a:ext uri="{FF2B5EF4-FFF2-40B4-BE49-F238E27FC236}">
-                <a16:creationId xmlns:a16="http://schemas.microsoft.com/office/drawing/2014/main" id="{93032775-7353-4C60-84C9-28C3636F005F}"/>
+                <a16:creationId xmlns:a16="http://schemas.microsoft.com/office/drawing/2014/main" id="{E2023885-CF78-41D7-85BC-5AF513824417}"/>
               </a:ext>
             </a:extLst>
           </p:cNvPr>
@@ -21652,7 +22585,7 @@
           <p:cNvPr id="14" name="">
             <a:extLst xmlns:a="http://schemas.openxmlformats.org/drawingml/2006/main">
               <a:ext uri="{FF2B5EF4-FFF2-40B4-BE49-F238E27FC236}">
-                <a16:creationId xmlns:a16="http://schemas.microsoft.com/office/drawing/2014/main" id="{FC72D72E-5C36-42C0-9BDA-FA091D3D440F}"/>
+                <a16:creationId xmlns:a16="http://schemas.microsoft.com/office/drawing/2014/main" id="{F718B064-125A-4185-A9F8-89C7F0903876}"/>
               </a:ext>
             </a:extLst>
           </p:cNvPr>
@@ -21720,7 +22653,7 @@
           <p:cNvPr id="15" name="">
             <a:extLst xmlns:a="http://schemas.openxmlformats.org/drawingml/2006/main">
               <a:ext uri="{FF2B5EF4-FFF2-40B4-BE49-F238E27FC236}">
-                <a16:creationId xmlns:a16="http://schemas.microsoft.com/office/drawing/2014/main" id="{8D0DB7DA-38F7-470E-96C0-61E27652A5D2}"/>
+                <a16:creationId xmlns:a16="http://schemas.microsoft.com/office/drawing/2014/main" id="{B13D9A4C-F891-41F3-B32C-8F42BF6F952C}"/>
               </a:ext>
             </a:extLst>
           </p:cNvPr>
@@ -21788,7 +22721,7 @@
           <p:cNvPr id="16" name="">
             <a:extLst xmlns:a="http://schemas.openxmlformats.org/drawingml/2006/main">
               <a:ext uri="{FF2B5EF4-FFF2-40B4-BE49-F238E27FC236}">
-                <a16:creationId xmlns:a16="http://schemas.microsoft.com/office/drawing/2014/main" id="{081D7C14-24A0-4504-AD20-3B95C17F3B19}"/>
+                <a16:creationId xmlns:a16="http://schemas.microsoft.com/office/drawing/2014/main" id="{CCB41022-8322-4DA6-8404-80607BB18C5B}"/>
               </a:ext>
             </a:extLst>
           </p:cNvPr>
@@ -21854,7 +22787,7 @@
     </p:spTree>
     <p:extLst>
       <p:ext uri="{BB962C8B-B14F-4D97-AF65-F5344CB8AC3E}">
-        <p14:creationId xmlns:p14="http://schemas.microsoft.com/office/powerpoint/2010/main" val="422918652"/>
+        <p14:creationId xmlns:p14="http://schemas.microsoft.com/office/powerpoint/2010/main" val="1585721341"/>
       </p:ext>
     </p:extLst>
   </p:cSld>
@@ -21885,7 +22818,7 @@
           <p:cNvPr id="9" name="">
             <a:extLst xmlns:a="http://schemas.openxmlformats.org/drawingml/2006/main">
               <a:ext uri="{FF2B5EF4-FFF2-40B4-BE49-F238E27FC236}">
-                <a16:creationId xmlns:a16="http://schemas.microsoft.com/office/drawing/2014/main" id="{3648AFBB-CA4F-4016-8A98-7143241333D8}"/>
+                <a16:creationId xmlns:a16="http://schemas.microsoft.com/office/drawing/2014/main" id="{4C9BB6C2-BCC3-4556-8BE9-C2BF044CA98F}"/>
               </a:ext>
             </a:extLst>
           </p:cNvPr>
@@ -21953,7 +22886,7 @@
           <p:cNvPr id="2" name="">
             <a:extLst xmlns:a="http://schemas.openxmlformats.org/drawingml/2006/main">
               <a:ext uri="{FF2B5EF4-FFF2-40B4-BE49-F238E27FC236}">
-                <a16:creationId xmlns:a16="http://schemas.microsoft.com/office/drawing/2014/main" id="{68D09F84-4B44-43F6-9798-2D578B759F8A}"/>
+                <a16:creationId xmlns:a16="http://schemas.microsoft.com/office/drawing/2014/main" id="{FBB24893-EBE0-463B-9E78-1033CB9495B7}"/>
               </a:ext>
             </a:extLst>
           </p:cNvPr>
@@ -22021,7 +22954,7 @@
           <p:cNvPr id="3" name="">
             <a:extLst xmlns:a="http://schemas.openxmlformats.org/drawingml/2006/main">
               <a:ext uri="{FF2B5EF4-FFF2-40B4-BE49-F238E27FC236}">
-                <a16:creationId xmlns:a16="http://schemas.microsoft.com/office/drawing/2014/main" id="{A2F90ACA-23D8-4121-BB30-6F3197BCAD00}"/>
+                <a16:creationId xmlns:a16="http://schemas.microsoft.com/office/drawing/2014/main" id="{8F42285E-A83B-4809-AB0C-2DD8496B53C4}"/>
               </a:ext>
             </a:extLst>
           </p:cNvPr>
@@ -22089,7 +23022,7 @@
           <p:cNvPr id="4" name="">
             <a:extLst xmlns:a="http://schemas.openxmlformats.org/drawingml/2006/main">
               <a:ext uri="{FF2B5EF4-FFF2-40B4-BE49-F238E27FC236}">
-                <a16:creationId xmlns:a16="http://schemas.microsoft.com/office/drawing/2014/main" id="{CF246618-2BFF-4223-B244-8C6B3CF55086}"/>
+                <a16:creationId xmlns:a16="http://schemas.microsoft.com/office/drawing/2014/main" id="{A17F5653-5444-4D83-AE82-CBB3ED71AA49}"/>
               </a:ext>
             </a:extLst>
           </p:cNvPr>
@@ -22157,7 +23090,7 @@
           <p:cNvPr id="5" name="">
             <a:extLst xmlns:a="http://schemas.openxmlformats.org/drawingml/2006/main">
               <a:ext uri="{FF2B5EF4-FFF2-40B4-BE49-F238E27FC236}">
-                <a16:creationId xmlns:a16="http://schemas.microsoft.com/office/drawing/2014/main" id="{8DF7E102-91B8-46A6-863D-096DB90DE323}"/>
+                <a16:creationId xmlns:a16="http://schemas.microsoft.com/office/drawing/2014/main" id="{7A4703B3-289A-4A33-9BA2-4AB6DDF6BF88}"/>
               </a:ext>
             </a:extLst>
           </p:cNvPr>
@@ -22225,7 +23158,7 @@
           <p:cNvPr id="6" name="">
             <a:extLst xmlns:a="http://schemas.openxmlformats.org/drawingml/2006/main">
               <a:ext uri="{FF2B5EF4-FFF2-40B4-BE49-F238E27FC236}">
-                <a16:creationId xmlns:a16="http://schemas.microsoft.com/office/drawing/2014/main" id="{40CA1D45-9B4D-4BE1-AF5A-507E38EBACAA}"/>
+                <a16:creationId xmlns:a16="http://schemas.microsoft.com/office/drawing/2014/main" id="{EBFC58C8-2223-4664-B823-AA4A6E1D5CAC}"/>
               </a:ext>
             </a:extLst>
           </p:cNvPr>
@@ -22293,7 +23226,7 @@
           <p:cNvPr id="7" name="">
             <a:extLst xmlns:a="http://schemas.openxmlformats.org/drawingml/2006/main">
               <a:ext uri="{FF2B5EF4-FFF2-40B4-BE49-F238E27FC236}">
-                <a16:creationId xmlns:a16="http://schemas.microsoft.com/office/drawing/2014/main" id="{FFF537FA-301F-4E72-8900-0DCEEA0C83EE}"/>
+                <a16:creationId xmlns:a16="http://schemas.microsoft.com/office/drawing/2014/main" id="{3683942E-CA76-434A-A5A4-51508C8625B6}"/>
               </a:ext>
             </a:extLst>
           </p:cNvPr>
@@ -22361,7 +23294,7 @@
           <p:cNvPr id="8" name="">
             <a:extLst xmlns:a="http://schemas.openxmlformats.org/drawingml/2006/main">
               <a:ext uri="{FF2B5EF4-FFF2-40B4-BE49-F238E27FC236}">
-                <a16:creationId xmlns:a16="http://schemas.microsoft.com/office/drawing/2014/main" id="{4B5C4EFD-B391-4736-94A1-3C36F6CE5F91}"/>
+                <a16:creationId xmlns:a16="http://schemas.microsoft.com/office/drawing/2014/main" id="{778A53D2-01F3-49B0-A453-B6EA957E8243}"/>
               </a:ext>
             </a:extLst>
           </p:cNvPr>
@@ -22427,7 +23360,7 @@
     </p:spTree>
     <p:extLst>
       <p:ext uri="{BB962C8B-B14F-4D97-AF65-F5344CB8AC3E}">
-        <p14:creationId xmlns:p14="http://schemas.microsoft.com/office/powerpoint/2010/main" val="872721256"/>
+        <p14:creationId xmlns:p14="http://schemas.microsoft.com/office/powerpoint/2010/main" val="1437247535"/>
       </p:ext>
     </p:extLst>
   </p:cSld>
